--- a/public/Copy of PPT Template_1.pptx
+++ b/public/Copy of PPT Template_1.pptx
@@ -1,26 +1,33 @@
 
 <file path=ppt/presentation.xml><?xml version="1.0" encoding="utf-8"?>
-<p:presentation xmlns:a="http://schemas.openxmlformats.org/drawingml/2006/main" xmlns:r="http://schemas.openxmlformats.org/officeDocument/2006/relationships" xmlns:p="http://schemas.openxmlformats.org/presentationml/2006/main" saveSubsetFonts="1" embedTrueTypeFonts="true">
+<p:presentation xmlns:a="http://schemas.openxmlformats.org/drawingml/2006/main" xmlns:r="http://schemas.openxmlformats.org/officeDocument/2006/relationships" xmlns:p="http://schemas.openxmlformats.org/presentationml/2006/main" embedTrueTypeFonts="1" saveSubsetFonts="1">
   <p:sldMasterIdLst>
     <p:sldMasterId id="2147483648" r:id="rId1"/>
   </p:sldMasterIdLst>
   <p:sldIdLst>
-    <p:sldId id="256" r:id="rId6"/>
-    <p:sldId id="257" r:id="rId7"/>
-    <p:sldId id="258" r:id="rId8"/>
-    <p:sldId id="259" r:id="rId9"/>
-    <p:sldId id="260" r:id="rId10"/>
-    <p:sldId id="261" r:id="rId11"/>
+    <p:sldId id="256" r:id="rId2"/>
+    <p:sldId id="257" r:id="rId3"/>
+    <p:sldId id="258" r:id="rId4"/>
+    <p:sldId id="259" r:id="rId5"/>
+    <p:sldId id="260" r:id="rId6"/>
+    <p:sldId id="261" r:id="rId7"/>
   </p:sldIdLst>
   <p:sldSz cx="18288000" cy="10287000"/>
   <p:notesSz cx="6858000" cy="9144000"/>
   <p:embeddedFontLst>
     <p:embeddedFont>
-      <p:font typeface="Nunito" charset="1" panose="00000000000000000000"/>
-      <p:regular r:id="rId12"/>
+      <p:font typeface="Nunito Bold" panose="020B0604020202020204" charset="0"/>
+      <p:regular r:id="rId8"/>
     </p:embeddedFont>
     <p:embeddedFont>
-      <p:font typeface="Nunito Bold" charset="1" panose="00000000000000000000"/>
+      <p:font typeface="Calibri" panose="020F0502020204030204" pitchFamily="34" charset="0"/>
+      <p:regular r:id="rId9"/>
+      <p:bold r:id="rId10"/>
+      <p:italic r:id="rId11"/>
+      <p:boldItalic r:id="rId12"/>
+    </p:embeddedFont>
+    <p:embeddedFont>
+      <p:font typeface="Nunito" panose="020B0604020202020204" charset="0"/>
       <p:regular r:id="rId13"/>
     </p:embeddedFont>
   </p:embeddedFontLst>
@@ -119,6 +126,22 @@
       </a:defRPr>
     </a:lvl9pPr>
   </p:defaultTextStyle>
+  <p:extLst>
+    <p:ext uri="{EFAFB233-063F-42B5-8137-9DF3F51BA10A}">
+      <p15:sldGuideLst xmlns:p15="http://schemas.microsoft.com/office/powerpoint/2012/main">
+        <p15:guide id="1" orient="horz" pos="2160">
+          <p15:clr>
+            <a:srgbClr val="A4A3A4"/>
+          </p15:clr>
+        </p15:guide>
+        <p15:guide id="2" pos="2880">
+          <p15:clr>
+            <a:srgbClr val="A4A3A4"/>
+          </p15:clr>
+        </p15:guide>
+      </p15:sldGuideLst>
+    </p:ext>
+  </p:extLst>
 </p:presentation>
 </file>
 
@@ -304,7 +327,7 @@
             <a:fld id="{1D8BD707-D9CF-40AE-B4C6-C98DA3205C09}" type="datetimeFigureOut">
               <a:rPr lang="en-US" smtClean="0"/>
               <a:pPr/>
-              <a:t>8/1/2011</a:t>
+              <a:t>2/18/2026</a:t>
             </a:fld>
             <a:endParaRPr lang="en-US"/>
           </a:p>
@@ -471,7 +494,7 @@
             <a:fld id="{1D8BD707-D9CF-40AE-B4C6-C98DA3205C09}" type="datetimeFigureOut">
               <a:rPr lang="en-US" smtClean="0"/>
               <a:pPr/>
-              <a:t>8/1/2011</a:t>
+              <a:t>2/18/2026</a:t>
             </a:fld>
             <a:endParaRPr lang="en-US"/>
           </a:p>
@@ -648,7 +671,7 @@
             <a:fld id="{1D8BD707-D9CF-40AE-B4C6-C98DA3205C09}" type="datetimeFigureOut">
               <a:rPr lang="en-US" smtClean="0"/>
               <a:pPr/>
-              <a:t>8/1/2011</a:t>
+              <a:t>2/18/2026</a:t>
             </a:fld>
             <a:endParaRPr lang="en-US"/>
           </a:p>
@@ -815,7 +838,7 @@
             <a:fld id="{1D8BD707-D9CF-40AE-B4C6-C98DA3205C09}" type="datetimeFigureOut">
               <a:rPr lang="en-US" smtClean="0"/>
               <a:pPr/>
-              <a:t>8/1/2011</a:t>
+              <a:t>2/18/2026</a:t>
             </a:fld>
             <a:endParaRPr lang="en-US"/>
           </a:p>
@@ -1058,7 +1081,7 @@
             <a:fld id="{1D8BD707-D9CF-40AE-B4C6-C98DA3205C09}" type="datetimeFigureOut">
               <a:rPr lang="en-US" smtClean="0"/>
               <a:pPr/>
-              <a:t>8/1/2011</a:t>
+              <a:t>2/18/2026</a:t>
             </a:fld>
             <a:endParaRPr lang="en-US"/>
           </a:p>
@@ -1343,7 +1366,7 @@
             <a:fld id="{1D8BD707-D9CF-40AE-B4C6-C98DA3205C09}" type="datetimeFigureOut">
               <a:rPr lang="en-US" smtClean="0"/>
               <a:pPr/>
-              <a:t>8/1/2011</a:t>
+              <a:t>2/18/2026</a:t>
             </a:fld>
             <a:endParaRPr lang="en-US"/>
           </a:p>
@@ -1762,7 +1785,7 @@
             <a:fld id="{1D8BD707-D9CF-40AE-B4C6-C98DA3205C09}" type="datetimeFigureOut">
               <a:rPr lang="en-US" smtClean="0"/>
               <a:pPr/>
-              <a:t>8/1/2011</a:t>
+              <a:t>2/18/2026</a:t>
             </a:fld>
             <a:endParaRPr lang="en-US"/>
           </a:p>
@@ -1877,7 +1900,7 @@
             <a:fld id="{1D8BD707-D9CF-40AE-B4C6-C98DA3205C09}" type="datetimeFigureOut">
               <a:rPr lang="en-US" smtClean="0"/>
               <a:pPr/>
-              <a:t>8/1/2011</a:t>
+              <a:t>2/18/2026</a:t>
             </a:fld>
             <a:endParaRPr lang="en-US"/>
           </a:p>
@@ -1969,7 +1992,7 @@
             <a:fld id="{1D8BD707-D9CF-40AE-B4C6-C98DA3205C09}" type="datetimeFigureOut">
               <a:rPr lang="en-US" smtClean="0"/>
               <a:pPr/>
-              <a:t>8/1/2011</a:t>
+              <a:t>2/18/2026</a:t>
             </a:fld>
             <a:endParaRPr lang="en-US"/>
           </a:p>
@@ -2243,7 +2266,7 @@
             <a:fld id="{1D8BD707-D9CF-40AE-B4C6-C98DA3205C09}" type="datetimeFigureOut">
               <a:rPr lang="en-US" smtClean="0"/>
               <a:pPr/>
-              <a:t>8/1/2011</a:t>
+              <a:t>2/18/2026</a:t>
             </a:fld>
             <a:endParaRPr lang="en-US"/>
           </a:p>
@@ -2493,7 +2516,7 @@
             <a:fld id="{1D8BD707-D9CF-40AE-B4C6-C98DA3205C09}" type="datetimeFigureOut">
               <a:rPr lang="en-US" smtClean="0"/>
               <a:pPr/>
-              <a:t>8/1/2011</a:t>
+              <a:t>2/18/2026</a:t>
             </a:fld>
             <a:endParaRPr lang="en-US"/>
           </a:p>
@@ -2703,7 +2726,7 @@
             <a:fld id="{1D8BD707-D9CF-40AE-B4C6-C98DA3205C09}" type="datetimeFigureOut">
               <a:rPr lang="en-US" smtClean="0"/>
               <a:pPr/>
-              <a:t>8/1/2011</a:t>
+              <a:t>2/18/2026</a:t>
             </a:fld>
             <a:endParaRPr lang="en-US"/>
           </a:p>
@@ -3058,13 +3081,14 @@
 </file>
 
 <file path=ppt/slides/slide1.xml><?xml version="1.0" encoding="utf-8"?>
-<p:sld xmlns:p="http://schemas.openxmlformats.org/presentationml/2006/main" xmlns:a="http://schemas.openxmlformats.org/drawingml/2006/main" xmlns:r="http://schemas.openxmlformats.org/officeDocument/2006/relationships">
+<p:sld xmlns:a="http://schemas.openxmlformats.org/drawingml/2006/main" xmlns:r="http://schemas.openxmlformats.org/officeDocument/2006/relationships" xmlns:p="http://schemas.openxmlformats.org/presentationml/2006/main">
   <p:cSld>
     <p:bg>
       <p:bgPr>
         <a:solidFill>
-          <a:srgbClr val="D1D1D1"/>
+          <a:srgbClr val="000000"/>
         </a:solidFill>
+        <a:effectLst/>
       </p:bgPr>
     </p:bg>
     <p:spTree>
@@ -3083,34 +3107,34 @@
       </p:grpSpPr>
       <p:sp>
         <p:nvSpPr>
-          <p:cNvPr name="Freeform 2" id="2"/>
+          <p:cNvPr id="2" name="Freeform 2"/>
           <p:cNvSpPr/>
           <p:nvPr/>
         </p:nvSpPr>
         <p:spPr>
-          <a:xfrm flipH="false" flipV="false" rot="0">
-            <a:off x="352799" y="553246"/>
-            <a:ext cx="3850017" cy="950908"/>
+          <a:xfrm>
+            <a:off x="-3383650" y="-2941320"/>
+            <a:ext cx="8824700" cy="8824700"/>
           </a:xfrm>
           <a:custGeom>
             <a:avLst/>
             <a:gdLst/>
             <a:ahLst/>
             <a:cxnLst/>
-            <a:rect r="r" b="b" t="t" l="l"/>
+            <a:rect l="l" t="t" r="r" b="b"/>
             <a:pathLst>
-              <a:path h="950908" w="3850017">
+              <a:path w="8824700" h="8824700">
                 <a:moveTo>
                   <a:pt x="0" y="0"/>
                 </a:moveTo>
                 <a:lnTo>
-                  <a:pt x="3850017" y="0"/>
-                </a:lnTo>
-                <a:lnTo>
-                  <a:pt x="3850017" y="950908"/>
-                </a:lnTo>
-                <a:lnTo>
-                  <a:pt x="0" y="950908"/>
+                  <a:pt x="8824700" y="0"/>
+                </a:lnTo>
+                <a:lnTo>
+                  <a:pt x="8824700" y="8824699"/>
+                </a:lnTo>
+                <a:lnTo>
+                  <a:pt x="0" y="8824699"/>
                 </a:lnTo>
                 <a:lnTo>
                   <a:pt x="0" y="0"/>
@@ -3122,41 +3146,179 @@
           <a:blipFill>
             <a:blip r:embed="rId2"/>
             <a:stretch>
-              <a:fillRect l="0" t="0" r="0" b="0"/>
+              <a:fillRect/>
             </a:stretch>
           </a:blipFill>
         </p:spPr>
       </p:sp>
       <p:sp>
         <p:nvSpPr>
-          <p:cNvPr name="Freeform 3" id="3"/>
+          <p:cNvPr id="3" name="Freeform 3"/>
           <p:cNvSpPr/>
           <p:nvPr/>
         </p:nvSpPr>
         <p:spPr>
-          <a:xfrm flipH="false" flipV="false" rot="0">
-            <a:off x="6044292" y="252250"/>
-            <a:ext cx="6199416" cy="2181958"/>
+          <a:xfrm>
+            <a:off x="11888339" y="2758109"/>
+            <a:ext cx="10156534" cy="10156534"/>
           </a:xfrm>
           <a:custGeom>
             <a:avLst/>
             <a:gdLst/>
             <a:ahLst/>
             <a:cxnLst/>
-            <a:rect r="r" b="b" t="t" l="l"/>
+            <a:rect l="l" t="t" r="r" b="b"/>
             <a:pathLst>
-              <a:path h="2181958" w="6199416">
+              <a:path w="10156534" h="10156534">
                 <a:moveTo>
                   <a:pt x="0" y="0"/>
                 </a:moveTo>
                 <a:lnTo>
-                  <a:pt x="6199416" y="0"/>
-                </a:lnTo>
-                <a:lnTo>
-                  <a:pt x="6199416" y="2181959"/>
-                </a:lnTo>
-                <a:lnTo>
-                  <a:pt x="0" y="2181959"/>
+                  <a:pt x="10156534" y="0"/>
+                </a:lnTo>
+                <a:lnTo>
+                  <a:pt x="10156534" y="10156534"/>
+                </a:lnTo>
+                <a:lnTo>
+                  <a:pt x="0" y="10156534"/>
+                </a:lnTo>
+                <a:lnTo>
+                  <a:pt x="0" y="0"/>
+                </a:lnTo>
+                <a:close/>
+              </a:path>
+            </a:pathLst>
+          </a:custGeom>
+          <a:blipFill>
+            <a:blip r:embed="rId2"/>
+            <a:stretch>
+              <a:fillRect/>
+            </a:stretch>
+          </a:blipFill>
+        </p:spPr>
+      </p:sp>
+      <p:sp>
+        <p:nvSpPr>
+          <p:cNvPr id="4" name="Freeform 4"/>
+          <p:cNvSpPr/>
+          <p:nvPr/>
+        </p:nvSpPr>
+        <p:spPr>
+          <a:xfrm>
+            <a:off x="14685065" y="-4472609"/>
+            <a:ext cx="8229600" cy="8229600"/>
+          </a:xfrm>
+          <a:custGeom>
+            <a:avLst/>
+            <a:gdLst/>
+            <a:ahLst/>
+            <a:cxnLst/>
+            <a:rect l="l" t="t" r="r" b="b"/>
+            <a:pathLst>
+              <a:path w="8229600" h="8229600">
+                <a:moveTo>
+                  <a:pt x="0" y="0"/>
+                </a:moveTo>
+                <a:lnTo>
+                  <a:pt x="8229600" y="0"/>
+                </a:lnTo>
+                <a:lnTo>
+                  <a:pt x="8229600" y="8229600"/>
+                </a:lnTo>
+                <a:lnTo>
+                  <a:pt x="0" y="8229600"/>
+                </a:lnTo>
+                <a:lnTo>
+                  <a:pt x="0" y="0"/>
+                </a:lnTo>
+                <a:close/>
+              </a:path>
+            </a:pathLst>
+          </a:custGeom>
+          <a:blipFill>
+            <a:blip r:embed="rId2"/>
+            <a:stretch>
+              <a:fillRect/>
+            </a:stretch>
+          </a:blipFill>
+        </p:spPr>
+      </p:sp>
+      <p:sp>
+        <p:nvSpPr>
+          <p:cNvPr id="5" name="Freeform 5"/>
+          <p:cNvSpPr/>
+          <p:nvPr/>
+        </p:nvSpPr>
+        <p:spPr>
+          <a:xfrm>
+            <a:off x="-3956517" y="6907696"/>
+            <a:ext cx="8229600" cy="8229600"/>
+          </a:xfrm>
+          <a:custGeom>
+            <a:avLst/>
+            <a:gdLst/>
+            <a:ahLst/>
+            <a:cxnLst/>
+            <a:rect l="l" t="t" r="r" b="b"/>
+            <a:pathLst>
+              <a:path w="8229600" h="8229600">
+                <a:moveTo>
+                  <a:pt x="0" y="0"/>
+                </a:moveTo>
+                <a:lnTo>
+                  <a:pt x="8229600" y="0"/>
+                </a:lnTo>
+                <a:lnTo>
+                  <a:pt x="8229600" y="8229600"/>
+                </a:lnTo>
+                <a:lnTo>
+                  <a:pt x="0" y="8229600"/>
+                </a:lnTo>
+                <a:lnTo>
+                  <a:pt x="0" y="0"/>
+                </a:lnTo>
+                <a:close/>
+              </a:path>
+            </a:pathLst>
+          </a:custGeom>
+          <a:blipFill>
+            <a:blip r:embed="rId2"/>
+            <a:stretch>
+              <a:fillRect/>
+            </a:stretch>
+          </a:blipFill>
+        </p:spPr>
+      </p:sp>
+      <p:sp>
+        <p:nvSpPr>
+          <p:cNvPr id="6" name="Freeform 6"/>
+          <p:cNvSpPr/>
+          <p:nvPr/>
+        </p:nvSpPr>
+        <p:spPr>
+          <a:xfrm>
+            <a:off x="423065" y="520122"/>
+            <a:ext cx="3850017" cy="950908"/>
+          </a:xfrm>
+          <a:custGeom>
+            <a:avLst/>
+            <a:gdLst/>
+            <a:ahLst/>
+            <a:cxnLst/>
+            <a:rect l="l" t="t" r="r" b="b"/>
+            <a:pathLst>
+              <a:path w="3850017" h="950908">
+                <a:moveTo>
+                  <a:pt x="0" y="0"/>
+                </a:moveTo>
+                <a:lnTo>
+                  <a:pt x="3850018" y="0"/>
+                </a:lnTo>
+                <a:lnTo>
+                  <a:pt x="3850018" y="950908"/>
+                </a:lnTo>
+                <a:lnTo>
+                  <a:pt x="0" y="950908"/>
                 </a:lnTo>
                 <a:lnTo>
                   <a:pt x="0" y="0"/>
@@ -3168,41 +3330,41 @@
           <a:blipFill>
             <a:blip r:embed="rId3"/>
             <a:stretch>
-              <a:fillRect l="0" t="0" r="0" b="0"/>
+              <a:fillRect/>
             </a:stretch>
           </a:blipFill>
         </p:spPr>
       </p:sp>
       <p:sp>
         <p:nvSpPr>
-          <p:cNvPr name="Freeform 4" id="4"/>
+          <p:cNvPr id="7" name="Freeform 7"/>
           <p:cNvSpPr/>
           <p:nvPr/>
         </p:nvSpPr>
         <p:spPr>
-          <a:xfrm flipH="false" flipV="false" rot="0">
-            <a:off x="14848072" y="-888877"/>
-            <a:ext cx="3665706" cy="3665706"/>
+          <a:xfrm>
+            <a:off x="6449961" y="202204"/>
+            <a:ext cx="5905938" cy="2078665"/>
           </a:xfrm>
           <a:custGeom>
             <a:avLst/>
             <a:gdLst/>
             <a:ahLst/>
             <a:cxnLst/>
-            <a:rect r="r" b="b" t="t" l="l"/>
+            <a:rect l="l" t="t" r="r" b="b"/>
             <a:pathLst>
-              <a:path h="3665706" w="3665706">
+              <a:path w="5905938" h="2078665">
                 <a:moveTo>
                   <a:pt x="0" y="0"/>
                 </a:moveTo>
                 <a:lnTo>
-                  <a:pt x="3665706" y="0"/>
-                </a:lnTo>
-                <a:lnTo>
-                  <a:pt x="3665706" y="3665706"/>
-                </a:lnTo>
-                <a:lnTo>
-                  <a:pt x="0" y="3665706"/>
+                  <a:pt x="5905938" y="0"/>
+                </a:lnTo>
+                <a:lnTo>
+                  <a:pt x="5905938" y="2078665"/>
+                </a:lnTo>
+                <a:lnTo>
+                  <a:pt x="0" y="2078665"/>
                 </a:lnTo>
                 <a:lnTo>
                   <a:pt x="0" y="0"/>
@@ -3214,133 +3376,28 @@
           <a:blipFill>
             <a:blip r:embed="rId4"/>
             <a:stretch>
-              <a:fillRect l="0" t="0" r="0" b="0"/>
+              <a:fillRect/>
             </a:stretch>
           </a:blipFill>
         </p:spPr>
       </p:sp>
-      <p:grpSp>
-        <p:nvGrpSpPr>
-          <p:cNvPr name="Group 5" id="5"/>
-          <p:cNvGrpSpPr/>
+      <p:sp>
+        <p:nvSpPr>
+          <p:cNvPr id="8" name="TextBox 8"/>
+          <p:cNvSpPr txBox="1"/>
           <p:nvPr/>
-        </p:nvGrpSpPr>
-        <p:grpSpPr>
-          <a:xfrm rot="0">
-            <a:off x="1426283" y="2589821"/>
-            <a:ext cx="15435433" cy="7308934"/>
-            <a:chOff x="0" y="0"/>
-            <a:chExt cx="4065299" cy="1924987"/>
-          </a:xfrm>
-        </p:grpSpPr>
-        <p:sp>
-          <p:nvSpPr>
-            <p:cNvPr name="Freeform 6" id="6"/>
-            <p:cNvSpPr/>
-            <p:nvPr/>
-          </p:nvSpPr>
-          <p:spPr>
-            <a:xfrm flipH="false" flipV="false" rot="0">
-              <a:off x="0" y="0"/>
-              <a:ext cx="4065299" cy="1924987"/>
-            </a:xfrm>
-            <a:custGeom>
-              <a:avLst/>
-              <a:gdLst/>
-              <a:ahLst/>
-              <a:cxnLst/>
-              <a:rect r="r" b="b" t="t" l="l"/>
-              <a:pathLst>
-                <a:path h="1924987" w="4065299">
-                  <a:moveTo>
-                    <a:pt x="8527" y="0"/>
-                  </a:moveTo>
-                  <a:lnTo>
-                    <a:pt x="4056773" y="0"/>
-                  </a:lnTo>
-                  <a:cubicBezTo>
-                    <a:pt x="4061482" y="0"/>
-                    <a:pt x="4065299" y="3818"/>
-                    <a:pt x="4065299" y="8527"/>
-                  </a:cubicBezTo>
-                  <a:lnTo>
-                    <a:pt x="4065299" y="1916460"/>
-                  </a:lnTo>
-                  <a:cubicBezTo>
-                    <a:pt x="4065299" y="1921169"/>
-                    <a:pt x="4061482" y="1924987"/>
-                    <a:pt x="4056773" y="1924987"/>
-                  </a:cubicBezTo>
-                  <a:lnTo>
-                    <a:pt x="8527" y="1924987"/>
-                  </a:lnTo>
-                  <a:cubicBezTo>
-                    <a:pt x="3818" y="1924987"/>
-                    <a:pt x="0" y="1921169"/>
-                    <a:pt x="0" y="1916460"/>
-                  </a:cubicBezTo>
-                  <a:lnTo>
-                    <a:pt x="0" y="8527"/>
-                  </a:lnTo>
-                  <a:cubicBezTo>
-                    <a:pt x="0" y="3818"/>
-                    <a:pt x="3818" y="0"/>
-                    <a:pt x="8527" y="0"/>
-                  </a:cubicBezTo>
-                  <a:close/>
-                </a:path>
-              </a:pathLst>
-            </a:custGeom>
-            <a:solidFill>
-              <a:srgbClr val="E7E5E5"/>
-            </a:solidFill>
-          </p:spPr>
-        </p:sp>
-        <p:sp>
-          <p:nvSpPr>
-            <p:cNvPr name="TextBox 7" id="7"/>
-            <p:cNvSpPr txBox="true"/>
-            <p:nvPr/>
-          </p:nvSpPr>
-          <p:spPr>
-            <a:xfrm>
-              <a:off x="0" y="-95250"/>
-              <a:ext cx="4065299" cy="2020237"/>
-            </a:xfrm>
-            <a:prstGeom prst="rect">
-              <a:avLst/>
-            </a:prstGeom>
-          </p:spPr>
-          <p:txBody>
-            <a:bodyPr anchor="ctr" rtlCol="false" tIns="50800" lIns="50800" bIns="50800" rIns="50800"/>
-            <a:lstStyle/>
-            <a:p>
-              <a:pPr algn="ctr">
-                <a:lnSpc>
-                  <a:spcPts val="3287"/>
-                </a:lnSpc>
-              </a:pPr>
-            </a:p>
-          </p:txBody>
-        </p:sp>
-      </p:grpSp>
-      <p:sp>
-        <p:nvSpPr>
-          <p:cNvPr name="TextBox 8" id="8"/>
-          <p:cNvSpPr txBox="true"/>
-          <p:nvPr/>
         </p:nvSpPr>
         <p:spPr>
-          <a:xfrm rot="0">
-            <a:off x="1759658" y="2643479"/>
-            <a:ext cx="6914545" cy="7653046"/>
+          <a:xfrm>
+            <a:off x="722728" y="2468089"/>
+            <a:ext cx="9340329" cy="7848302"/>
           </a:xfrm>
           <a:prstGeom prst="rect">
             <a:avLst/>
           </a:prstGeom>
         </p:spPr>
         <p:txBody>
-          <a:bodyPr anchor="t" rtlCol="false" tIns="0" lIns="0" bIns="0" rIns="0">
+          <a:bodyPr wrap="square" lIns="0" tIns="0" rIns="0" bIns="0" rtlCol="0" anchor="t">
             <a:spAutoFit/>
           </a:bodyPr>
           <a:lstStyle/>
@@ -3351,28 +3408,16 @@
               </a:lnSpc>
             </a:pPr>
             <a:r>
-              <a:rPr lang="en-US" sz="2989" spc="164">
+              <a:rPr lang="en-US" sz="2989" spc="164" dirty="0">
                 <a:solidFill>
-                  <a:srgbClr val="000000"/>
+                  <a:srgbClr val="FFFFFF"/>
                 </a:solidFill>
                 <a:latin typeface="Nunito"/>
                 <a:ea typeface="Nunito"/>
                 <a:cs typeface="Nunito"/>
                 <a:sym typeface="Nunito"/>
               </a:rPr>
-              <a:t>Team Name :</a:t>
-            </a:r>
-            <a:r>
-              <a:rPr lang="en-US" sz="2989" spc="164">
-                <a:solidFill>
-                  <a:srgbClr val="000000"/>
-                </a:solidFill>
-                <a:latin typeface="Nunito"/>
-                <a:ea typeface="Nunito"/>
-                <a:cs typeface="Nunito"/>
-                <a:sym typeface="Nunito"/>
-              </a:rPr>
-              <a:t> </a:t>
+              <a:t>Team Name : </a:t>
             </a:r>
           </a:p>
           <a:p>
@@ -3385,28 +3430,16 @@
               </a:spcBef>
             </a:pPr>
             <a:r>
-              <a:rPr lang="en-US" sz="2989" spc="164">
+              <a:rPr lang="en-US" sz="2989" spc="164" dirty="0">
                 <a:solidFill>
-                  <a:srgbClr val="000000"/>
+                  <a:srgbClr val="FFFFFF"/>
                 </a:solidFill>
                 <a:latin typeface="Nunito"/>
                 <a:ea typeface="Nunito"/>
                 <a:cs typeface="Nunito"/>
                 <a:sym typeface="Nunito"/>
               </a:rPr>
-              <a:t>Team Members / </a:t>
-            </a:r>
-            <a:r>
-              <a:rPr lang="en-US" sz="2989" spc="164">
-                <a:solidFill>
-                  <a:srgbClr val="000000"/>
-                </a:solidFill>
-                <a:latin typeface="Nunito"/>
-                <a:ea typeface="Nunito"/>
-                <a:cs typeface="Nunito"/>
-                <a:sym typeface="Nunito"/>
-              </a:rPr>
-              <a:t>Year / Department :</a:t>
+              <a:t>Team Members / Year / Department :</a:t>
             </a:r>
           </a:p>
           <a:p>
@@ -3418,6 +3451,15 @@
                 <a:spcPct val="0"/>
               </a:spcBef>
             </a:pPr>
+            <a:endParaRPr lang="en-US" sz="2989" spc="164" dirty="0">
+              <a:solidFill>
+                <a:srgbClr val="FFFFFF"/>
+              </a:solidFill>
+              <a:latin typeface="Nunito"/>
+              <a:ea typeface="Nunito"/>
+              <a:cs typeface="Nunito"/>
+              <a:sym typeface="Nunito"/>
+            </a:endParaRPr>
           </a:p>
           <a:p>
             <a:pPr algn="l">
@@ -3428,6 +3470,15 @@
                 <a:spcPct val="0"/>
               </a:spcBef>
             </a:pPr>
+            <a:endParaRPr lang="en-US" sz="2989" spc="164" dirty="0">
+              <a:solidFill>
+                <a:srgbClr val="FFFFFF"/>
+              </a:solidFill>
+              <a:latin typeface="Nunito"/>
+              <a:ea typeface="Nunito"/>
+              <a:cs typeface="Nunito"/>
+              <a:sym typeface="Nunito"/>
+            </a:endParaRPr>
           </a:p>
           <a:p>
             <a:pPr algn="l">
@@ -3438,6 +3489,15 @@
                 <a:spcPct val="0"/>
               </a:spcBef>
             </a:pPr>
+            <a:endParaRPr lang="en-US" sz="2989" spc="164" dirty="0">
+              <a:solidFill>
+                <a:srgbClr val="FFFFFF"/>
+              </a:solidFill>
+              <a:latin typeface="Nunito"/>
+              <a:ea typeface="Nunito"/>
+              <a:cs typeface="Nunito"/>
+              <a:sym typeface="Nunito"/>
+            </a:endParaRPr>
           </a:p>
           <a:p>
             <a:pPr algn="l">
@@ -3448,6 +3508,15 @@
                 <a:spcPct val="0"/>
               </a:spcBef>
             </a:pPr>
+            <a:endParaRPr lang="en-US" sz="2989" spc="164" dirty="0">
+              <a:solidFill>
+                <a:srgbClr val="FFFFFF"/>
+              </a:solidFill>
+              <a:latin typeface="Nunito"/>
+              <a:ea typeface="Nunito"/>
+              <a:cs typeface="Nunito"/>
+              <a:sym typeface="Nunito"/>
+            </a:endParaRPr>
           </a:p>
           <a:p>
             <a:pPr algn="l">
@@ -3458,6 +3527,15 @@
                 <a:spcPct val="0"/>
               </a:spcBef>
             </a:pPr>
+            <a:endParaRPr lang="en-US" sz="2989" spc="164" dirty="0">
+              <a:solidFill>
+                <a:srgbClr val="FFFFFF"/>
+              </a:solidFill>
+              <a:latin typeface="Nunito"/>
+              <a:ea typeface="Nunito"/>
+              <a:cs typeface="Nunito"/>
+              <a:sym typeface="Nunito"/>
+            </a:endParaRPr>
           </a:p>
           <a:p>
             <a:pPr algn="l">
@@ -3468,6 +3546,15 @@
                 <a:spcPct val="0"/>
               </a:spcBef>
             </a:pPr>
+            <a:endParaRPr lang="en-US" sz="2989" spc="164" dirty="0">
+              <a:solidFill>
+                <a:srgbClr val="FFFFFF"/>
+              </a:solidFill>
+              <a:latin typeface="Nunito"/>
+              <a:ea typeface="Nunito"/>
+              <a:cs typeface="Nunito"/>
+              <a:sym typeface="Nunito"/>
+            </a:endParaRPr>
           </a:p>
           <a:p>
             <a:pPr algn="l">
@@ -3478,6 +3565,15 @@
                 <a:spcPct val="0"/>
               </a:spcBef>
             </a:pPr>
+            <a:endParaRPr lang="en-US" sz="2989" spc="164" dirty="0">
+              <a:solidFill>
+                <a:srgbClr val="FFFFFF"/>
+              </a:solidFill>
+              <a:latin typeface="Nunito"/>
+              <a:ea typeface="Nunito"/>
+              <a:cs typeface="Nunito"/>
+              <a:sym typeface="Nunito"/>
+            </a:endParaRPr>
           </a:p>
           <a:p>
             <a:pPr algn="l">
@@ -3489,9 +3585,9 @@
               </a:spcBef>
             </a:pPr>
             <a:r>
-              <a:rPr lang="en-US" sz="2989" spc="164">
+              <a:rPr lang="en-US" sz="2989" spc="164" dirty="0">
                 <a:solidFill>
-                  <a:srgbClr val="000000"/>
+                  <a:srgbClr val="FFFFFF"/>
                 </a:solidFill>
                 <a:latin typeface="Nunito"/>
                 <a:ea typeface="Nunito"/>
@@ -3511,9 +3607,9 @@
               </a:spcBef>
             </a:pPr>
             <a:r>
-              <a:rPr lang="en-US" sz="2989" spc="164">
+              <a:rPr lang="en-US" sz="2989" spc="164" dirty="0">
                 <a:solidFill>
-                  <a:srgbClr val="000000"/>
+                  <a:srgbClr val="FFFFFF"/>
                 </a:solidFill>
                 <a:latin typeface="Nunito"/>
                 <a:ea typeface="Nunito"/>
@@ -3532,9 +3628,242 @@
                 <a:spcPct val="0"/>
               </a:spcBef>
             </a:pPr>
+            <a:endParaRPr lang="en-US" sz="2989" spc="164" dirty="0">
+              <a:solidFill>
+                <a:srgbClr val="FFFFFF"/>
+              </a:solidFill>
+              <a:latin typeface="Nunito"/>
+              <a:ea typeface="Nunito"/>
+              <a:cs typeface="Nunito"/>
+              <a:sym typeface="Nunito"/>
+            </a:endParaRPr>
           </a:p>
         </p:txBody>
       </p:sp>
+      <p:sp>
+        <p:nvSpPr>
+          <p:cNvPr id="9" name="Freeform 9"/>
+          <p:cNvSpPr/>
+          <p:nvPr/>
+        </p:nvSpPr>
+        <p:spPr>
+          <a:xfrm>
+            <a:off x="14045835" y="335805"/>
+            <a:ext cx="3680010" cy="1030450"/>
+          </a:xfrm>
+          <a:custGeom>
+            <a:avLst/>
+            <a:gdLst/>
+            <a:ahLst/>
+            <a:cxnLst/>
+            <a:rect l="l" t="t" r="r" b="b"/>
+            <a:pathLst>
+              <a:path w="3680010" h="1030450">
+                <a:moveTo>
+                  <a:pt x="0" y="0"/>
+                </a:moveTo>
+                <a:lnTo>
+                  <a:pt x="3680010" y="0"/>
+                </a:lnTo>
+                <a:lnTo>
+                  <a:pt x="3680010" y="1030450"/>
+                </a:lnTo>
+                <a:lnTo>
+                  <a:pt x="0" y="1030450"/>
+                </a:lnTo>
+                <a:lnTo>
+                  <a:pt x="0" y="0"/>
+                </a:lnTo>
+                <a:close/>
+              </a:path>
+            </a:pathLst>
+          </a:custGeom>
+          <a:blipFill>
+            <a:blip r:embed="rId5"/>
+            <a:stretch>
+              <a:fillRect l="-5824" t="-119570" r="-642" b="-160652"/>
+            </a:stretch>
+          </a:blipFill>
+          <a:ln cap="sq">
+            <a:noFill/>
+            <a:prstDash val="solid"/>
+            <a:miter/>
+          </a:ln>
+        </p:spPr>
+      </p:sp>
+      <p:sp>
+        <p:nvSpPr>
+          <p:cNvPr id="10" name="Freeform 10"/>
+          <p:cNvSpPr/>
+          <p:nvPr/>
+        </p:nvSpPr>
+        <p:spPr>
+          <a:xfrm>
+            <a:off x="14017260" y="1154195"/>
+            <a:ext cx="3821029" cy="633670"/>
+          </a:xfrm>
+          <a:custGeom>
+            <a:avLst/>
+            <a:gdLst/>
+            <a:ahLst/>
+            <a:cxnLst/>
+            <a:rect l="l" t="t" r="r" b="b"/>
+            <a:pathLst>
+              <a:path w="3821029" h="633670">
+                <a:moveTo>
+                  <a:pt x="0" y="0"/>
+                </a:moveTo>
+                <a:lnTo>
+                  <a:pt x="3821029" y="0"/>
+                </a:lnTo>
+                <a:lnTo>
+                  <a:pt x="3821029" y="633669"/>
+                </a:lnTo>
+                <a:lnTo>
+                  <a:pt x="0" y="633669"/>
+                </a:lnTo>
+                <a:lnTo>
+                  <a:pt x="0" y="0"/>
+                </a:lnTo>
+                <a:close/>
+              </a:path>
+            </a:pathLst>
+          </a:custGeom>
+          <a:blipFill>
+            <a:blip r:embed="rId5"/>
+            <a:stretch>
+              <a:fillRect l="-4000" t="-343124" b="-184000"/>
+            </a:stretch>
+          </a:blipFill>
+        </p:spPr>
+      </p:sp>
+      <p:grpSp>
+        <p:nvGrpSpPr>
+          <p:cNvPr id="11" name="Group 11"/>
+          <p:cNvGrpSpPr/>
+          <p:nvPr/>
+        </p:nvGrpSpPr>
+        <p:grpSpPr>
+          <a:xfrm>
+            <a:off x="413540" y="2174584"/>
+            <a:ext cx="17441869" cy="7971820"/>
+            <a:chOff x="0" y="0"/>
+            <a:chExt cx="4593743" cy="2099574"/>
+          </a:xfrm>
+        </p:grpSpPr>
+        <p:sp>
+          <p:nvSpPr>
+            <p:cNvPr id="12" name="Freeform 12"/>
+            <p:cNvSpPr/>
+            <p:nvPr/>
+          </p:nvSpPr>
+          <p:spPr>
+            <a:xfrm>
+              <a:off x="0" y="0"/>
+              <a:ext cx="4593743" cy="2099574"/>
+            </a:xfrm>
+            <a:custGeom>
+              <a:avLst/>
+              <a:gdLst/>
+              <a:ahLst/>
+              <a:cxnLst/>
+              <a:rect l="l" t="t" r="r" b="b"/>
+              <a:pathLst>
+                <a:path w="4593743" h="2099574">
+                  <a:moveTo>
+                    <a:pt x="16867" y="0"/>
+                  </a:moveTo>
+                  <a:lnTo>
+                    <a:pt x="4576876" y="0"/>
+                  </a:lnTo>
+                  <a:cubicBezTo>
+                    <a:pt x="4581349" y="0"/>
+                    <a:pt x="4585640" y="1777"/>
+                    <a:pt x="4588803" y="4940"/>
+                  </a:cubicBezTo>
+                  <a:cubicBezTo>
+                    <a:pt x="4591966" y="8103"/>
+                    <a:pt x="4593743" y="12394"/>
+                    <a:pt x="4593743" y="16867"/>
+                  </a:cubicBezTo>
+                  <a:lnTo>
+                    <a:pt x="4593743" y="2082707"/>
+                  </a:lnTo>
+                  <a:cubicBezTo>
+                    <a:pt x="4593743" y="2092022"/>
+                    <a:pt x="4586192" y="2099574"/>
+                    <a:pt x="4576876" y="2099574"/>
+                  </a:cubicBezTo>
+                  <a:lnTo>
+                    <a:pt x="16867" y="2099574"/>
+                  </a:lnTo>
+                  <a:cubicBezTo>
+                    <a:pt x="12394" y="2099574"/>
+                    <a:pt x="8103" y="2097797"/>
+                    <a:pt x="4940" y="2094634"/>
+                  </a:cubicBezTo>
+                  <a:cubicBezTo>
+                    <a:pt x="1777" y="2091471"/>
+                    <a:pt x="0" y="2087180"/>
+                    <a:pt x="0" y="2082707"/>
+                  </a:cubicBezTo>
+                  <a:lnTo>
+                    <a:pt x="0" y="16867"/>
+                  </a:lnTo>
+                  <a:cubicBezTo>
+                    <a:pt x="0" y="12394"/>
+                    <a:pt x="1777" y="8103"/>
+                    <a:pt x="4940" y="4940"/>
+                  </a:cubicBezTo>
+                  <a:cubicBezTo>
+                    <a:pt x="8103" y="1777"/>
+                    <a:pt x="12394" y="0"/>
+                    <a:pt x="16867" y="0"/>
+                  </a:cubicBezTo>
+                  <a:close/>
+                </a:path>
+              </a:pathLst>
+            </a:custGeom>
+            <a:ln w="76200" cap="rnd">
+              <a:solidFill>
+                <a:srgbClr val="D1D1D1">
+                  <a:alpha val="89804"/>
+                </a:srgbClr>
+              </a:solidFill>
+              <a:prstDash val="solid"/>
+              <a:round/>
+            </a:ln>
+          </p:spPr>
+        </p:sp>
+        <p:sp>
+          <p:nvSpPr>
+            <p:cNvPr id="13" name="TextBox 13"/>
+            <p:cNvSpPr txBox="1"/>
+            <p:nvPr/>
+          </p:nvSpPr>
+          <p:spPr>
+            <a:xfrm>
+              <a:off x="0" y="-95250"/>
+              <a:ext cx="4593743" cy="2194824"/>
+            </a:xfrm>
+            <a:prstGeom prst="rect">
+              <a:avLst/>
+            </a:prstGeom>
+          </p:spPr>
+          <p:txBody>
+            <a:bodyPr lIns="50800" tIns="50800" rIns="50800" bIns="50800" rtlCol="0" anchor="ctr"/>
+            <a:lstStyle/>
+            <a:p>
+              <a:pPr algn="just">
+                <a:lnSpc>
+                  <a:spcPts val="3287"/>
+                </a:lnSpc>
+              </a:pPr>
+              <a:endParaRPr/>
+            </a:p>
+          </p:txBody>
+        </p:sp>
+      </p:grpSp>
     </p:spTree>
   </p:cSld>
   <p:clrMapOvr>
@@ -3544,13 +3873,14 @@
 </file>
 
 <file path=ppt/slides/slide2.xml><?xml version="1.0" encoding="utf-8"?>
-<p:sld xmlns:p="http://schemas.openxmlformats.org/presentationml/2006/main" xmlns:a="http://schemas.openxmlformats.org/drawingml/2006/main" xmlns:r="http://schemas.openxmlformats.org/officeDocument/2006/relationships">
+<p:sld xmlns:a="http://schemas.openxmlformats.org/drawingml/2006/main" xmlns:r="http://schemas.openxmlformats.org/officeDocument/2006/relationships" xmlns:p="http://schemas.openxmlformats.org/presentationml/2006/main">
   <p:cSld>
     <p:bg>
       <p:bgPr>
         <a:solidFill>
-          <a:srgbClr val="D1D1D1"/>
+          <a:srgbClr val="000000"/>
         </a:solidFill>
+        <a:effectLst/>
       </p:bgPr>
     </p:bg>
     <p:spTree>
@@ -3569,34 +3899,34 @@
       </p:grpSpPr>
       <p:sp>
         <p:nvSpPr>
-          <p:cNvPr name="Freeform 2" id="2"/>
+          <p:cNvPr id="2" name="Freeform 2"/>
           <p:cNvSpPr/>
           <p:nvPr/>
         </p:nvSpPr>
         <p:spPr>
-          <a:xfrm flipH="false" flipV="false" rot="0">
-            <a:off x="423065" y="520122"/>
-            <a:ext cx="3850017" cy="950908"/>
+          <a:xfrm>
+            <a:off x="-3383650" y="-2941320"/>
+            <a:ext cx="8824700" cy="8824700"/>
           </a:xfrm>
           <a:custGeom>
             <a:avLst/>
             <a:gdLst/>
             <a:ahLst/>
             <a:cxnLst/>
-            <a:rect r="r" b="b" t="t" l="l"/>
+            <a:rect l="l" t="t" r="r" b="b"/>
             <a:pathLst>
-              <a:path h="950908" w="3850017">
+              <a:path w="8824700" h="8824700">
                 <a:moveTo>
                   <a:pt x="0" y="0"/>
                 </a:moveTo>
                 <a:lnTo>
-                  <a:pt x="3850018" y="0"/>
-                </a:lnTo>
-                <a:lnTo>
-                  <a:pt x="3850018" y="950908"/>
-                </a:lnTo>
-                <a:lnTo>
-                  <a:pt x="0" y="950908"/>
+                  <a:pt x="8824700" y="0"/>
+                </a:lnTo>
+                <a:lnTo>
+                  <a:pt x="8824700" y="8824699"/>
+                </a:lnTo>
+                <a:lnTo>
+                  <a:pt x="0" y="8824699"/>
                 </a:lnTo>
                 <a:lnTo>
                   <a:pt x="0" y="0"/>
@@ -3608,41 +3938,179 @@
           <a:blipFill>
             <a:blip r:embed="rId2"/>
             <a:stretch>
-              <a:fillRect l="0" t="0" r="0" b="0"/>
+              <a:fillRect/>
             </a:stretch>
           </a:blipFill>
         </p:spPr>
       </p:sp>
       <p:sp>
         <p:nvSpPr>
-          <p:cNvPr name="Freeform 3" id="3"/>
+          <p:cNvPr id="3" name="Freeform 3"/>
           <p:cNvSpPr/>
           <p:nvPr/>
         </p:nvSpPr>
         <p:spPr>
-          <a:xfrm flipH="false" flipV="false" rot="0">
-            <a:off x="14974972" y="520122"/>
-            <a:ext cx="2889962" cy="1017157"/>
+          <a:xfrm>
+            <a:off x="11888339" y="2758109"/>
+            <a:ext cx="10156534" cy="10156534"/>
           </a:xfrm>
           <a:custGeom>
             <a:avLst/>
             <a:gdLst/>
             <a:ahLst/>
             <a:cxnLst/>
-            <a:rect r="r" b="b" t="t" l="l"/>
+            <a:rect l="l" t="t" r="r" b="b"/>
             <a:pathLst>
-              <a:path h="1017157" w="2889962">
+              <a:path w="10156534" h="10156534">
                 <a:moveTo>
                   <a:pt x="0" y="0"/>
                 </a:moveTo>
                 <a:lnTo>
-                  <a:pt x="2889963" y="0"/>
-                </a:lnTo>
-                <a:lnTo>
-                  <a:pt x="2889963" y="1017156"/>
-                </a:lnTo>
-                <a:lnTo>
-                  <a:pt x="0" y="1017156"/>
+                  <a:pt x="10156534" y="0"/>
+                </a:lnTo>
+                <a:lnTo>
+                  <a:pt x="10156534" y="10156534"/>
+                </a:lnTo>
+                <a:lnTo>
+                  <a:pt x="0" y="10156534"/>
+                </a:lnTo>
+                <a:lnTo>
+                  <a:pt x="0" y="0"/>
+                </a:lnTo>
+                <a:close/>
+              </a:path>
+            </a:pathLst>
+          </a:custGeom>
+          <a:blipFill>
+            <a:blip r:embed="rId2"/>
+            <a:stretch>
+              <a:fillRect/>
+            </a:stretch>
+          </a:blipFill>
+        </p:spPr>
+      </p:sp>
+      <p:sp>
+        <p:nvSpPr>
+          <p:cNvPr id="4" name="Freeform 4"/>
+          <p:cNvSpPr/>
+          <p:nvPr/>
+        </p:nvSpPr>
+        <p:spPr>
+          <a:xfrm>
+            <a:off x="14685065" y="-4472609"/>
+            <a:ext cx="8229600" cy="8229600"/>
+          </a:xfrm>
+          <a:custGeom>
+            <a:avLst/>
+            <a:gdLst/>
+            <a:ahLst/>
+            <a:cxnLst/>
+            <a:rect l="l" t="t" r="r" b="b"/>
+            <a:pathLst>
+              <a:path w="8229600" h="8229600">
+                <a:moveTo>
+                  <a:pt x="0" y="0"/>
+                </a:moveTo>
+                <a:lnTo>
+                  <a:pt x="8229600" y="0"/>
+                </a:lnTo>
+                <a:lnTo>
+                  <a:pt x="8229600" y="8229600"/>
+                </a:lnTo>
+                <a:lnTo>
+                  <a:pt x="0" y="8229600"/>
+                </a:lnTo>
+                <a:lnTo>
+                  <a:pt x="0" y="0"/>
+                </a:lnTo>
+                <a:close/>
+              </a:path>
+            </a:pathLst>
+          </a:custGeom>
+          <a:blipFill>
+            <a:blip r:embed="rId2"/>
+            <a:stretch>
+              <a:fillRect/>
+            </a:stretch>
+          </a:blipFill>
+        </p:spPr>
+      </p:sp>
+      <p:sp>
+        <p:nvSpPr>
+          <p:cNvPr id="5" name="Freeform 5"/>
+          <p:cNvSpPr/>
+          <p:nvPr/>
+        </p:nvSpPr>
+        <p:spPr>
+          <a:xfrm>
+            <a:off x="-3956517" y="6907696"/>
+            <a:ext cx="8229600" cy="8229600"/>
+          </a:xfrm>
+          <a:custGeom>
+            <a:avLst/>
+            <a:gdLst/>
+            <a:ahLst/>
+            <a:cxnLst/>
+            <a:rect l="l" t="t" r="r" b="b"/>
+            <a:pathLst>
+              <a:path w="8229600" h="8229600">
+                <a:moveTo>
+                  <a:pt x="0" y="0"/>
+                </a:moveTo>
+                <a:lnTo>
+                  <a:pt x="8229600" y="0"/>
+                </a:lnTo>
+                <a:lnTo>
+                  <a:pt x="8229600" y="8229600"/>
+                </a:lnTo>
+                <a:lnTo>
+                  <a:pt x="0" y="8229600"/>
+                </a:lnTo>
+                <a:lnTo>
+                  <a:pt x="0" y="0"/>
+                </a:lnTo>
+                <a:close/>
+              </a:path>
+            </a:pathLst>
+          </a:custGeom>
+          <a:blipFill>
+            <a:blip r:embed="rId2"/>
+            <a:stretch>
+              <a:fillRect/>
+            </a:stretch>
+          </a:blipFill>
+        </p:spPr>
+      </p:sp>
+      <p:sp>
+        <p:nvSpPr>
+          <p:cNvPr id="6" name="Freeform 6"/>
+          <p:cNvSpPr/>
+          <p:nvPr/>
+        </p:nvSpPr>
+        <p:spPr>
+          <a:xfrm>
+            <a:off x="423065" y="520122"/>
+            <a:ext cx="3850017" cy="950908"/>
+          </a:xfrm>
+          <a:custGeom>
+            <a:avLst/>
+            <a:gdLst/>
+            <a:ahLst/>
+            <a:cxnLst/>
+            <a:rect l="l" t="t" r="r" b="b"/>
+            <a:pathLst>
+              <a:path w="3850017" h="950908">
+                <a:moveTo>
+                  <a:pt x="0" y="0"/>
+                </a:moveTo>
+                <a:lnTo>
+                  <a:pt x="3850018" y="0"/>
+                </a:lnTo>
+                <a:lnTo>
+                  <a:pt x="3850018" y="950908"/>
+                </a:lnTo>
+                <a:lnTo>
+                  <a:pt x="0" y="950908"/>
                 </a:lnTo>
                 <a:lnTo>
                   <a:pt x="0" y="0"/>
@@ -3654,19 +4122,219 @@
           <a:blipFill>
             <a:blip r:embed="rId3"/>
             <a:stretch>
-              <a:fillRect l="0" t="0" r="0" b="0"/>
+              <a:fillRect/>
             </a:stretch>
           </a:blipFill>
         </p:spPr>
       </p:sp>
+      <p:sp>
+        <p:nvSpPr>
+          <p:cNvPr id="7" name="Freeform 7"/>
+          <p:cNvSpPr/>
+          <p:nvPr/>
+        </p:nvSpPr>
+        <p:spPr>
+          <a:xfrm>
+            <a:off x="14974972" y="520122"/>
+            <a:ext cx="2889962" cy="1017157"/>
+          </a:xfrm>
+          <a:custGeom>
+            <a:avLst/>
+            <a:gdLst/>
+            <a:ahLst/>
+            <a:cxnLst/>
+            <a:rect l="l" t="t" r="r" b="b"/>
+            <a:pathLst>
+              <a:path w="2889962" h="1017157">
+                <a:moveTo>
+                  <a:pt x="0" y="0"/>
+                </a:moveTo>
+                <a:lnTo>
+                  <a:pt x="2889963" y="0"/>
+                </a:lnTo>
+                <a:lnTo>
+                  <a:pt x="2889963" y="1017156"/>
+                </a:lnTo>
+                <a:lnTo>
+                  <a:pt x="0" y="1017156"/>
+                </a:lnTo>
+                <a:lnTo>
+                  <a:pt x="0" y="0"/>
+                </a:lnTo>
+                <a:close/>
+              </a:path>
+            </a:pathLst>
+          </a:custGeom>
+          <a:blipFill>
+            <a:blip r:embed="rId4"/>
+            <a:stretch>
+              <a:fillRect/>
+            </a:stretch>
+          </a:blipFill>
+        </p:spPr>
+      </p:sp>
       <p:grpSp>
         <p:nvGrpSpPr>
-          <p:cNvPr name="Group 4" id="4"/>
+          <p:cNvPr id="8" name="Group 8"/>
           <p:cNvGrpSpPr/>
           <p:nvPr/>
         </p:nvGrpSpPr>
         <p:grpSpPr>
-          <a:xfrm rot="0">
+          <a:xfrm>
+            <a:off x="5092575" y="520122"/>
+            <a:ext cx="8329793" cy="960907"/>
+            <a:chOff x="0" y="0"/>
+            <a:chExt cx="2193855" cy="253079"/>
+          </a:xfrm>
+        </p:grpSpPr>
+        <p:sp>
+          <p:nvSpPr>
+            <p:cNvPr id="9" name="Freeform 9"/>
+            <p:cNvSpPr/>
+            <p:nvPr/>
+          </p:nvSpPr>
+          <p:spPr>
+            <a:xfrm>
+              <a:off x="0" y="0"/>
+              <a:ext cx="2193855" cy="253078"/>
+            </a:xfrm>
+            <a:custGeom>
+              <a:avLst/>
+              <a:gdLst/>
+              <a:ahLst/>
+              <a:cxnLst/>
+              <a:rect l="l" t="t" r="r" b="b"/>
+              <a:pathLst>
+                <a:path w="2193855" h="253078">
+                  <a:moveTo>
+                    <a:pt x="92943" y="0"/>
+                  </a:moveTo>
+                  <a:lnTo>
+                    <a:pt x="2100912" y="0"/>
+                  </a:lnTo>
+                  <a:cubicBezTo>
+                    <a:pt x="2152243" y="0"/>
+                    <a:pt x="2193855" y="41612"/>
+                    <a:pt x="2193855" y="92943"/>
+                  </a:cubicBezTo>
+                  <a:lnTo>
+                    <a:pt x="2193855" y="160136"/>
+                  </a:lnTo>
+                  <a:cubicBezTo>
+                    <a:pt x="2193855" y="211467"/>
+                    <a:pt x="2152243" y="253078"/>
+                    <a:pt x="2100912" y="253078"/>
+                  </a:cubicBezTo>
+                  <a:lnTo>
+                    <a:pt x="92943" y="253078"/>
+                  </a:lnTo>
+                  <a:cubicBezTo>
+                    <a:pt x="41612" y="253078"/>
+                    <a:pt x="0" y="211467"/>
+                    <a:pt x="0" y="160136"/>
+                  </a:cubicBezTo>
+                  <a:lnTo>
+                    <a:pt x="0" y="92943"/>
+                  </a:lnTo>
+                  <a:cubicBezTo>
+                    <a:pt x="0" y="41612"/>
+                    <a:pt x="41612" y="0"/>
+                    <a:pt x="92943" y="0"/>
+                  </a:cubicBezTo>
+                  <a:close/>
+                </a:path>
+              </a:pathLst>
+            </a:custGeom>
+            <a:ln w="38100" cap="rnd">
+              <a:solidFill>
+                <a:srgbClr val="FFFFFF"/>
+              </a:solidFill>
+              <a:prstDash val="solid"/>
+              <a:round/>
+            </a:ln>
+          </p:spPr>
+        </p:sp>
+        <p:sp>
+          <p:nvSpPr>
+            <p:cNvPr id="10" name="TextBox 10"/>
+            <p:cNvSpPr txBox="1"/>
+            <p:nvPr/>
+          </p:nvSpPr>
+          <p:spPr>
+            <a:xfrm>
+              <a:off x="0" y="-95250"/>
+              <a:ext cx="2193855" cy="348329"/>
+            </a:xfrm>
+            <a:prstGeom prst="rect">
+              <a:avLst/>
+            </a:prstGeom>
+          </p:spPr>
+          <p:txBody>
+            <a:bodyPr lIns="50800" tIns="50800" rIns="50800" bIns="50800" rtlCol="0" anchor="ctr"/>
+            <a:lstStyle/>
+            <a:p>
+              <a:pPr algn="ctr">
+                <a:lnSpc>
+                  <a:spcPts val="3287"/>
+                </a:lnSpc>
+              </a:pPr>
+              <a:endParaRPr/>
+            </a:p>
+          </p:txBody>
+        </p:sp>
+      </p:grpSp>
+      <p:sp>
+        <p:nvSpPr>
+          <p:cNvPr id="11" name="TextBox 11"/>
+          <p:cNvSpPr txBox="1"/>
+          <p:nvPr/>
+        </p:nvSpPr>
+        <p:spPr>
+          <a:xfrm>
+            <a:off x="5147504" y="688863"/>
+            <a:ext cx="7992989" cy="679673"/>
+          </a:xfrm>
+          <a:prstGeom prst="rect">
+            <a:avLst/>
+          </a:prstGeom>
+        </p:spPr>
+        <p:txBody>
+          <a:bodyPr wrap="square" lIns="0" tIns="0" rIns="0" bIns="0" rtlCol="0" anchor="t">
+            <a:spAutoFit/>
+          </a:bodyPr>
+          <a:lstStyle/>
+          <a:p>
+            <a:pPr algn="ctr">
+              <a:lnSpc>
+                <a:spcPts val="5339"/>
+              </a:lnSpc>
+              <a:spcBef>
+                <a:spcPct val="0"/>
+              </a:spcBef>
+            </a:pPr>
+            <a:r>
+              <a:rPr lang="en-US" sz="3122" b="1" spc="171" dirty="0">
+                <a:solidFill>
+                  <a:srgbClr val="FFFFFF"/>
+                </a:solidFill>
+                <a:latin typeface="Nunito Bold"/>
+                <a:ea typeface="Nunito Bold"/>
+                <a:cs typeface="Nunito Bold"/>
+                <a:sym typeface="Nunito Bold"/>
+              </a:rPr>
+              <a:t>PROBLEM STATEMENT BREAKDOWN</a:t>
+            </a:r>
+          </a:p>
+        </p:txBody>
+      </p:sp>
+      <p:grpSp>
+        <p:nvGrpSpPr>
+          <p:cNvPr id="12" name="Group 12"/>
+          <p:cNvGrpSpPr/>
+          <p:nvPr/>
+        </p:nvGrpSpPr>
+        <p:grpSpPr>
+          <a:xfrm>
             <a:off x="423065" y="1926934"/>
             <a:ext cx="17441869" cy="7971820"/>
             <a:chOff x="0" y="0"/>
@@ -3675,12 +4343,12 @@
         </p:grpSpPr>
         <p:sp>
           <p:nvSpPr>
-            <p:cNvPr name="Freeform 5" id="5"/>
+            <p:cNvPr id="13" name="Freeform 13"/>
             <p:cNvSpPr/>
             <p:nvPr/>
           </p:nvSpPr>
           <p:spPr>
-            <a:xfrm flipH="false" flipV="false" rot="0">
+            <a:xfrm>
               <a:off x="0" y="0"/>
               <a:ext cx="4593743" cy="2099574"/>
             </a:xfrm>
@@ -3689,72 +4357,78 @@
               <a:gdLst/>
               <a:ahLst/>
               <a:cxnLst/>
-              <a:rect r="r" b="b" t="t" l="l"/>
+              <a:rect l="l" t="t" r="r" b="b"/>
               <a:pathLst>
-                <a:path h="2099574" w="4593743">
+                <a:path w="4593743" h="2099574">
                   <a:moveTo>
-                    <a:pt x="7546" y="0"/>
+                    <a:pt x="16867" y="0"/>
                   </a:moveTo>
                   <a:lnTo>
-                    <a:pt x="4586198" y="0"/>
+                    <a:pt x="4576876" y="0"/>
                   </a:lnTo>
                   <a:cubicBezTo>
-                    <a:pt x="4588199" y="0"/>
-                    <a:pt x="4590118" y="795"/>
-                    <a:pt x="4591533" y="2210"/>
-                  </a:cubicBezTo>
-                  <a:cubicBezTo>
-                    <a:pt x="4592948" y="3625"/>
-                    <a:pt x="4593743" y="5545"/>
-                    <a:pt x="4593743" y="7546"/>
+                    <a:pt x="4581349" y="0"/>
+                    <a:pt x="4585640" y="1777"/>
+                    <a:pt x="4588803" y="4940"/>
+                  </a:cubicBezTo>
+                  <a:cubicBezTo>
+                    <a:pt x="4591966" y="8103"/>
+                    <a:pt x="4593743" y="12394"/>
+                    <a:pt x="4593743" y="16867"/>
                   </a:cubicBezTo>
                   <a:lnTo>
-                    <a:pt x="4593743" y="2092028"/>
+                    <a:pt x="4593743" y="2082707"/>
                   </a:lnTo>
                   <a:cubicBezTo>
-                    <a:pt x="4593743" y="2096196"/>
-                    <a:pt x="4590365" y="2099574"/>
-                    <a:pt x="4586198" y="2099574"/>
+                    <a:pt x="4593743" y="2092022"/>
+                    <a:pt x="4586192" y="2099574"/>
+                    <a:pt x="4576876" y="2099574"/>
                   </a:cubicBezTo>
                   <a:lnTo>
-                    <a:pt x="7546" y="2099574"/>
+                    <a:pt x="16867" y="2099574"/>
                   </a:lnTo>
                   <a:cubicBezTo>
-                    <a:pt x="5545" y="2099574"/>
-                    <a:pt x="3625" y="2098779"/>
-                    <a:pt x="2210" y="2097364"/>
-                  </a:cubicBezTo>
-                  <a:cubicBezTo>
-                    <a:pt x="795" y="2095949"/>
-                    <a:pt x="0" y="2094030"/>
-                    <a:pt x="0" y="2092028"/>
+                    <a:pt x="12394" y="2099574"/>
+                    <a:pt x="8103" y="2097797"/>
+                    <a:pt x="4940" y="2094634"/>
+                  </a:cubicBezTo>
+                  <a:cubicBezTo>
+                    <a:pt x="1777" y="2091471"/>
+                    <a:pt x="0" y="2087180"/>
+                    <a:pt x="0" y="2082707"/>
                   </a:cubicBezTo>
                   <a:lnTo>
-                    <a:pt x="0" y="7546"/>
+                    <a:pt x="0" y="16867"/>
                   </a:lnTo>
                   <a:cubicBezTo>
-                    <a:pt x="0" y="5545"/>
-                    <a:pt x="795" y="3625"/>
-                    <a:pt x="2210" y="2210"/>
-                  </a:cubicBezTo>
-                  <a:cubicBezTo>
-                    <a:pt x="3625" y="795"/>
-                    <a:pt x="5545" y="0"/>
-                    <a:pt x="7546" y="0"/>
+                    <a:pt x="0" y="12394"/>
+                    <a:pt x="1777" y="8103"/>
+                    <a:pt x="4940" y="4940"/>
+                  </a:cubicBezTo>
+                  <a:cubicBezTo>
+                    <a:pt x="8103" y="1777"/>
+                    <a:pt x="12394" y="0"/>
+                    <a:pt x="16867" y="0"/>
                   </a:cubicBezTo>
                   <a:close/>
                 </a:path>
               </a:pathLst>
             </a:custGeom>
-            <a:solidFill>
-              <a:srgbClr val="E7E5E5"/>
-            </a:solidFill>
+            <a:ln w="76200" cap="rnd">
+              <a:solidFill>
+                <a:srgbClr val="D1D1D1">
+                  <a:alpha val="89804"/>
+                </a:srgbClr>
+              </a:solidFill>
+              <a:prstDash val="solid"/>
+              <a:round/>
+            </a:ln>
           </p:spPr>
         </p:sp>
         <p:sp>
           <p:nvSpPr>
-            <p:cNvPr name="TextBox 6" id="6"/>
-            <p:cNvSpPr txBox="true"/>
+            <p:cNvPr id="14" name="TextBox 14"/>
+            <p:cNvSpPr txBox="1"/>
             <p:nvPr/>
           </p:nvSpPr>
           <p:spPr>
@@ -3767,191 +4441,19 @@
             </a:prstGeom>
           </p:spPr>
           <p:txBody>
-            <a:bodyPr anchor="ctr" rtlCol="false" tIns="50800" lIns="50800" bIns="50800" rIns="50800"/>
+            <a:bodyPr lIns="50800" tIns="50800" rIns="50800" bIns="50800" rtlCol="0" anchor="ctr"/>
             <a:lstStyle/>
             <a:p>
-              <a:pPr algn="ctr">
+              <a:pPr algn="just">
                 <a:lnSpc>
                   <a:spcPts val="3287"/>
                 </a:lnSpc>
               </a:pPr>
+              <a:endParaRPr/>
             </a:p>
           </p:txBody>
         </p:sp>
       </p:grpSp>
-      <p:grpSp>
-        <p:nvGrpSpPr>
-          <p:cNvPr name="Group 7" id="7"/>
-          <p:cNvGrpSpPr/>
-          <p:nvPr/>
-        </p:nvGrpSpPr>
-        <p:grpSpPr>
-          <a:xfrm rot="0">
-            <a:off x="5440445" y="520122"/>
-            <a:ext cx="7559510" cy="960907"/>
-            <a:chOff x="0" y="0"/>
-            <a:chExt cx="1990982" cy="253079"/>
-          </a:xfrm>
-        </p:grpSpPr>
-        <p:sp>
-          <p:nvSpPr>
-            <p:cNvPr name="Freeform 8" id="8"/>
-            <p:cNvSpPr/>
-            <p:nvPr/>
-          </p:nvSpPr>
-          <p:spPr>
-            <a:xfrm flipH="false" flipV="false" rot="0">
-              <a:off x="0" y="0"/>
-              <a:ext cx="1990982" cy="253078"/>
-            </a:xfrm>
-            <a:custGeom>
-              <a:avLst/>
-              <a:gdLst/>
-              <a:ahLst/>
-              <a:cxnLst/>
-              <a:rect r="r" b="b" t="t" l="l"/>
-              <a:pathLst>
-                <a:path h="253078" w="1990982">
-                  <a:moveTo>
-                    <a:pt x="102413" y="0"/>
-                  </a:moveTo>
-                  <a:lnTo>
-                    <a:pt x="1888569" y="0"/>
-                  </a:lnTo>
-                  <a:cubicBezTo>
-                    <a:pt x="1945130" y="0"/>
-                    <a:pt x="1990982" y="45852"/>
-                    <a:pt x="1990982" y="102413"/>
-                  </a:cubicBezTo>
-                  <a:lnTo>
-                    <a:pt x="1990982" y="150666"/>
-                  </a:lnTo>
-                  <a:cubicBezTo>
-                    <a:pt x="1990982" y="177827"/>
-                    <a:pt x="1980192" y="203876"/>
-                    <a:pt x="1960986" y="223082"/>
-                  </a:cubicBezTo>
-                  <a:cubicBezTo>
-                    <a:pt x="1941780" y="242289"/>
-                    <a:pt x="1915731" y="253078"/>
-                    <a:pt x="1888569" y="253078"/>
-                  </a:cubicBezTo>
-                  <a:lnTo>
-                    <a:pt x="102413" y="253078"/>
-                  </a:lnTo>
-                  <a:cubicBezTo>
-                    <a:pt x="75251" y="253078"/>
-                    <a:pt x="49202" y="242289"/>
-                    <a:pt x="29996" y="223082"/>
-                  </a:cubicBezTo>
-                  <a:cubicBezTo>
-                    <a:pt x="10790" y="203876"/>
-                    <a:pt x="0" y="177827"/>
-                    <a:pt x="0" y="150666"/>
-                  </a:cubicBezTo>
-                  <a:lnTo>
-                    <a:pt x="0" y="102413"/>
-                  </a:lnTo>
-                  <a:cubicBezTo>
-                    <a:pt x="0" y="75251"/>
-                    <a:pt x="10790" y="49202"/>
-                    <a:pt x="29996" y="29996"/>
-                  </a:cubicBezTo>
-                  <a:cubicBezTo>
-                    <a:pt x="49202" y="10790"/>
-                    <a:pt x="75251" y="0"/>
-                    <a:pt x="102413" y="0"/>
-                  </a:cubicBezTo>
-                  <a:close/>
-                </a:path>
-              </a:pathLst>
-            </a:custGeom>
-            <a:solidFill>
-              <a:srgbClr val="000000">
-                <a:alpha val="0"/>
-              </a:srgbClr>
-            </a:solidFill>
-            <a:ln w="38100" cap="rnd">
-              <a:solidFill>
-                <a:srgbClr val="303870"/>
-              </a:solidFill>
-              <a:prstDash val="solid"/>
-              <a:round/>
-            </a:ln>
-          </p:spPr>
-        </p:sp>
-        <p:sp>
-          <p:nvSpPr>
-            <p:cNvPr name="TextBox 9" id="9"/>
-            <p:cNvSpPr txBox="true"/>
-            <p:nvPr/>
-          </p:nvSpPr>
-          <p:spPr>
-            <a:xfrm>
-              <a:off x="0" y="-95250"/>
-              <a:ext cx="1990982" cy="348329"/>
-            </a:xfrm>
-            <a:prstGeom prst="rect">
-              <a:avLst/>
-            </a:prstGeom>
-          </p:spPr>
-          <p:txBody>
-            <a:bodyPr anchor="ctr" rtlCol="false" tIns="50800" lIns="50800" bIns="50800" rIns="50800"/>
-            <a:lstStyle/>
-            <a:p>
-              <a:pPr algn="ctr">
-                <a:lnSpc>
-                  <a:spcPts val="3287"/>
-                </a:lnSpc>
-              </a:pPr>
-            </a:p>
-          </p:txBody>
-        </p:sp>
-      </p:grpSp>
-      <p:sp>
-        <p:nvSpPr>
-          <p:cNvPr name="TextBox 10" id="10"/>
-          <p:cNvSpPr txBox="true"/>
-          <p:nvPr/>
-        </p:nvSpPr>
-        <p:spPr>
-          <a:xfrm rot="0">
-            <a:off x="5726192" y="644309"/>
-            <a:ext cx="6988016" cy="569657"/>
-          </a:xfrm>
-          <a:prstGeom prst="rect">
-            <a:avLst/>
-          </a:prstGeom>
-        </p:spPr>
-        <p:txBody>
-          <a:bodyPr anchor="t" rtlCol="false" tIns="0" lIns="0" bIns="0" rIns="0">
-            <a:spAutoFit/>
-          </a:bodyPr>
-          <a:lstStyle/>
-          <a:p>
-            <a:pPr algn="ctr">
-              <a:lnSpc>
-                <a:spcPts val="4826"/>
-              </a:lnSpc>
-              <a:spcBef>
-                <a:spcPct val="0"/>
-              </a:spcBef>
-            </a:pPr>
-            <a:r>
-              <a:rPr lang="en-US" b="true" sz="2822" spc="155">
-                <a:solidFill>
-                  <a:srgbClr val="000000"/>
-                </a:solidFill>
-                <a:latin typeface="Nunito Bold"/>
-                <a:ea typeface="Nunito Bold"/>
-                <a:cs typeface="Nunito Bold"/>
-                <a:sym typeface="Nunito Bold"/>
-              </a:rPr>
-              <a:t>PROBLEM STATEMENT BREAKDOWN</a:t>
-            </a:r>
-          </a:p>
-        </p:txBody>
-      </p:sp>
     </p:spTree>
   </p:cSld>
   <p:clrMapOvr>
@@ -3961,13 +4463,14 @@
 </file>
 
 <file path=ppt/slides/slide3.xml><?xml version="1.0" encoding="utf-8"?>
-<p:sld xmlns:p="http://schemas.openxmlformats.org/presentationml/2006/main" xmlns:a="http://schemas.openxmlformats.org/drawingml/2006/main" xmlns:r="http://schemas.openxmlformats.org/officeDocument/2006/relationships">
+<p:sld xmlns:a="http://schemas.openxmlformats.org/drawingml/2006/main" xmlns:r="http://schemas.openxmlformats.org/officeDocument/2006/relationships" xmlns:p="http://schemas.openxmlformats.org/presentationml/2006/main">
   <p:cSld>
     <p:bg>
       <p:bgPr>
         <a:solidFill>
-          <a:srgbClr val="D1D1D1"/>
+          <a:srgbClr val="000000"/>
         </a:solidFill>
+        <a:effectLst/>
       </p:bgPr>
     </p:bg>
     <p:spTree>
@@ -3986,34 +4489,34 @@
       </p:grpSpPr>
       <p:sp>
         <p:nvSpPr>
-          <p:cNvPr name="Freeform 2" id="2"/>
+          <p:cNvPr id="2" name="Freeform 2"/>
           <p:cNvSpPr/>
           <p:nvPr/>
         </p:nvSpPr>
         <p:spPr>
-          <a:xfrm flipH="false" flipV="false" rot="0">
-            <a:off x="423065" y="520122"/>
-            <a:ext cx="3850017" cy="950908"/>
+          <a:xfrm>
+            <a:off x="-3383650" y="-2941320"/>
+            <a:ext cx="8824700" cy="8824700"/>
           </a:xfrm>
           <a:custGeom>
             <a:avLst/>
             <a:gdLst/>
             <a:ahLst/>
             <a:cxnLst/>
-            <a:rect r="r" b="b" t="t" l="l"/>
+            <a:rect l="l" t="t" r="r" b="b"/>
             <a:pathLst>
-              <a:path h="950908" w="3850017">
+              <a:path w="8824700" h="8824700">
                 <a:moveTo>
                   <a:pt x="0" y="0"/>
                 </a:moveTo>
                 <a:lnTo>
-                  <a:pt x="3850018" y="0"/>
-                </a:lnTo>
-                <a:lnTo>
-                  <a:pt x="3850018" y="950908"/>
-                </a:lnTo>
-                <a:lnTo>
-                  <a:pt x="0" y="950908"/>
+                  <a:pt x="8824700" y="0"/>
+                </a:lnTo>
+                <a:lnTo>
+                  <a:pt x="8824700" y="8824699"/>
+                </a:lnTo>
+                <a:lnTo>
+                  <a:pt x="0" y="8824699"/>
                 </a:lnTo>
                 <a:lnTo>
                   <a:pt x="0" y="0"/>
@@ -4025,41 +4528,179 @@
           <a:blipFill>
             <a:blip r:embed="rId2"/>
             <a:stretch>
-              <a:fillRect l="0" t="0" r="0" b="0"/>
+              <a:fillRect/>
             </a:stretch>
           </a:blipFill>
         </p:spPr>
       </p:sp>
       <p:sp>
         <p:nvSpPr>
-          <p:cNvPr name="Freeform 3" id="3"/>
+          <p:cNvPr id="3" name="Freeform 3"/>
           <p:cNvSpPr/>
           <p:nvPr/>
         </p:nvSpPr>
         <p:spPr>
-          <a:xfrm flipH="false" flipV="false" rot="0">
-            <a:off x="14974972" y="520122"/>
-            <a:ext cx="2889962" cy="1017157"/>
+          <a:xfrm>
+            <a:off x="11888339" y="2758109"/>
+            <a:ext cx="10156534" cy="10156534"/>
           </a:xfrm>
           <a:custGeom>
             <a:avLst/>
             <a:gdLst/>
             <a:ahLst/>
             <a:cxnLst/>
-            <a:rect r="r" b="b" t="t" l="l"/>
+            <a:rect l="l" t="t" r="r" b="b"/>
             <a:pathLst>
-              <a:path h="1017157" w="2889962">
+              <a:path w="10156534" h="10156534">
                 <a:moveTo>
                   <a:pt x="0" y="0"/>
                 </a:moveTo>
                 <a:lnTo>
-                  <a:pt x="2889963" y="0"/>
-                </a:lnTo>
-                <a:lnTo>
-                  <a:pt x="2889963" y="1017156"/>
-                </a:lnTo>
-                <a:lnTo>
-                  <a:pt x="0" y="1017156"/>
+                  <a:pt x="10156534" y="0"/>
+                </a:lnTo>
+                <a:lnTo>
+                  <a:pt x="10156534" y="10156534"/>
+                </a:lnTo>
+                <a:lnTo>
+                  <a:pt x="0" y="10156534"/>
+                </a:lnTo>
+                <a:lnTo>
+                  <a:pt x="0" y="0"/>
+                </a:lnTo>
+                <a:close/>
+              </a:path>
+            </a:pathLst>
+          </a:custGeom>
+          <a:blipFill>
+            <a:blip r:embed="rId2"/>
+            <a:stretch>
+              <a:fillRect/>
+            </a:stretch>
+          </a:blipFill>
+        </p:spPr>
+      </p:sp>
+      <p:sp>
+        <p:nvSpPr>
+          <p:cNvPr id="4" name="Freeform 4"/>
+          <p:cNvSpPr/>
+          <p:nvPr/>
+        </p:nvSpPr>
+        <p:spPr>
+          <a:xfrm>
+            <a:off x="14685065" y="-4472609"/>
+            <a:ext cx="8229600" cy="8229600"/>
+          </a:xfrm>
+          <a:custGeom>
+            <a:avLst/>
+            <a:gdLst/>
+            <a:ahLst/>
+            <a:cxnLst/>
+            <a:rect l="l" t="t" r="r" b="b"/>
+            <a:pathLst>
+              <a:path w="8229600" h="8229600">
+                <a:moveTo>
+                  <a:pt x="0" y="0"/>
+                </a:moveTo>
+                <a:lnTo>
+                  <a:pt x="8229600" y="0"/>
+                </a:lnTo>
+                <a:lnTo>
+                  <a:pt x="8229600" y="8229600"/>
+                </a:lnTo>
+                <a:lnTo>
+                  <a:pt x="0" y="8229600"/>
+                </a:lnTo>
+                <a:lnTo>
+                  <a:pt x="0" y="0"/>
+                </a:lnTo>
+                <a:close/>
+              </a:path>
+            </a:pathLst>
+          </a:custGeom>
+          <a:blipFill>
+            <a:blip r:embed="rId2"/>
+            <a:stretch>
+              <a:fillRect/>
+            </a:stretch>
+          </a:blipFill>
+        </p:spPr>
+      </p:sp>
+      <p:sp>
+        <p:nvSpPr>
+          <p:cNvPr id="5" name="Freeform 5"/>
+          <p:cNvSpPr/>
+          <p:nvPr/>
+        </p:nvSpPr>
+        <p:spPr>
+          <a:xfrm>
+            <a:off x="-3956517" y="6907696"/>
+            <a:ext cx="8229600" cy="8229600"/>
+          </a:xfrm>
+          <a:custGeom>
+            <a:avLst/>
+            <a:gdLst/>
+            <a:ahLst/>
+            <a:cxnLst/>
+            <a:rect l="l" t="t" r="r" b="b"/>
+            <a:pathLst>
+              <a:path w="8229600" h="8229600">
+                <a:moveTo>
+                  <a:pt x="0" y="0"/>
+                </a:moveTo>
+                <a:lnTo>
+                  <a:pt x="8229600" y="0"/>
+                </a:lnTo>
+                <a:lnTo>
+                  <a:pt x="8229600" y="8229600"/>
+                </a:lnTo>
+                <a:lnTo>
+                  <a:pt x="0" y="8229600"/>
+                </a:lnTo>
+                <a:lnTo>
+                  <a:pt x="0" y="0"/>
+                </a:lnTo>
+                <a:close/>
+              </a:path>
+            </a:pathLst>
+          </a:custGeom>
+          <a:blipFill>
+            <a:blip r:embed="rId2"/>
+            <a:stretch>
+              <a:fillRect/>
+            </a:stretch>
+          </a:blipFill>
+        </p:spPr>
+      </p:sp>
+      <p:sp>
+        <p:nvSpPr>
+          <p:cNvPr id="6" name="Freeform 6"/>
+          <p:cNvSpPr/>
+          <p:nvPr/>
+        </p:nvSpPr>
+        <p:spPr>
+          <a:xfrm>
+            <a:off x="423065" y="520122"/>
+            <a:ext cx="3850017" cy="950908"/>
+          </a:xfrm>
+          <a:custGeom>
+            <a:avLst/>
+            <a:gdLst/>
+            <a:ahLst/>
+            <a:cxnLst/>
+            <a:rect l="l" t="t" r="r" b="b"/>
+            <a:pathLst>
+              <a:path w="3850017" h="950908">
+                <a:moveTo>
+                  <a:pt x="0" y="0"/>
+                </a:moveTo>
+                <a:lnTo>
+                  <a:pt x="3850018" y="0"/>
+                </a:lnTo>
+                <a:lnTo>
+                  <a:pt x="3850018" y="950908"/>
+                </a:lnTo>
+                <a:lnTo>
+                  <a:pt x="0" y="950908"/>
                 </a:lnTo>
                 <a:lnTo>
                   <a:pt x="0" y="0"/>
@@ -4071,19 +4712,234 @@
           <a:blipFill>
             <a:blip r:embed="rId3"/>
             <a:stretch>
-              <a:fillRect l="0" t="0" r="0" b="0"/>
+              <a:fillRect/>
             </a:stretch>
           </a:blipFill>
         </p:spPr>
       </p:sp>
+      <p:sp>
+        <p:nvSpPr>
+          <p:cNvPr id="7" name="Freeform 7"/>
+          <p:cNvSpPr/>
+          <p:nvPr/>
+        </p:nvSpPr>
+        <p:spPr>
+          <a:xfrm>
+            <a:off x="14974972" y="520122"/>
+            <a:ext cx="2889962" cy="1017157"/>
+          </a:xfrm>
+          <a:custGeom>
+            <a:avLst/>
+            <a:gdLst/>
+            <a:ahLst/>
+            <a:cxnLst/>
+            <a:rect l="l" t="t" r="r" b="b"/>
+            <a:pathLst>
+              <a:path w="2889962" h="1017157">
+                <a:moveTo>
+                  <a:pt x="0" y="0"/>
+                </a:moveTo>
+                <a:lnTo>
+                  <a:pt x="2889963" y="0"/>
+                </a:lnTo>
+                <a:lnTo>
+                  <a:pt x="2889963" y="1017156"/>
+                </a:lnTo>
+                <a:lnTo>
+                  <a:pt x="0" y="1017156"/>
+                </a:lnTo>
+                <a:lnTo>
+                  <a:pt x="0" y="0"/>
+                </a:lnTo>
+                <a:close/>
+              </a:path>
+            </a:pathLst>
+          </a:custGeom>
+          <a:blipFill>
+            <a:blip r:embed="rId4"/>
+            <a:stretch>
+              <a:fillRect/>
+            </a:stretch>
+          </a:blipFill>
+        </p:spPr>
+      </p:sp>
       <p:grpSp>
         <p:nvGrpSpPr>
-          <p:cNvPr name="Group 4" id="4"/>
+          <p:cNvPr id="8" name="Group 8"/>
           <p:cNvGrpSpPr/>
           <p:nvPr/>
         </p:nvGrpSpPr>
         <p:grpSpPr>
-          <a:xfrm rot="0">
+          <a:xfrm>
+            <a:off x="5440445" y="520122"/>
+            <a:ext cx="7559510" cy="960907"/>
+            <a:chOff x="0" y="0"/>
+            <a:chExt cx="1990982" cy="253079"/>
+          </a:xfrm>
+        </p:grpSpPr>
+        <p:sp>
+          <p:nvSpPr>
+            <p:cNvPr id="9" name="Freeform 9"/>
+            <p:cNvSpPr/>
+            <p:nvPr/>
+          </p:nvSpPr>
+          <p:spPr>
+            <a:xfrm>
+              <a:off x="0" y="0"/>
+              <a:ext cx="1990982" cy="253078"/>
+            </a:xfrm>
+            <a:custGeom>
+              <a:avLst/>
+              <a:gdLst/>
+              <a:ahLst/>
+              <a:cxnLst/>
+              <a:rect l="l" t="t" r="r" b="b"/>
+              <a:pathLst>
+                <a:path w="1990982" h="253078">
+                  <a:moveTo>
+                    <a:pt x="102413" y="0"/>
+                  </a:moveTo>
+                  <a:lnTo>
+                    <a:pt x="1888569" y="0"/>
+                  </a:lnTo>
+                  <a:cubicBezTo>
+                    <a:pt x="1945130" y="0"/>
+                    <a:pt x="1990982" y="45852"/>
+                    <a:pt x="1990982" y="102413"/>
+                  </a:cubicBezTo>
+                  <a:lnTo>
+                    <a:pt x="1990982" y="150666"/>
+                  </a:lnTo>
+                  <a:cubicBezTo>
+                    <a:pt x="1990982" y="177827"/>
+                    <a:pt x="1980192" y="203876"/>
+                    <a:pt x="1960986" y="223082"/>
+                  </a:cubicBezTo>
+                  <a:cubicBezTo>
+                    <a:pt x="1941780" y="242289"/>
+                    <a:pt x="1915731" y="253078"/>
+                    <a:pt x="1888569" y="253078"/>
+                  </a:cubicBezTo>
+                  <a:lnTo>
+                    <a:pt x="102413" y="253078"/>
+                  </a:lnTo>
+                  <a:cubicBezTo>
+                    <a:pt x="75251" y="253078"/>
+                    <a:pt x="49202" y="242289"/>
+                    <a:pt x="29996" y="223082"/>
+                  </a:cubicBezTo>
+                  <a:cubicBezTo>
+                    <a:pt x="10790" y="203876"/>
+                    <a:pt x="0" y="177827"/>
+                    <a:pt x="0" y="150666"/>
+                  </a:cubicBezTo>
+                  <a:lnTo>
+                    <a:pt x="0" y="102413"/>
+                  </a:lnTo>
+                  <a:cubicBezTo>
+                    <a:pt x="0" y="75251"/>
+                    <a:pt x="10790" y="49202"/>
+                    <a:pt x="29996" y="29996"/>
+                  </a:cubicBezTo>
+                  <a:cubicBezTo>
+                    <a:pt x="49202" y="10790"/>
+                    <a:pt x="75251" y="0"/>
+                    <a:pt x="102413" y="0"/>
+                  </a:cubicBezTo>
+                  <a:close/>
+                </a:path>
+              </a:pathLst>
+            </a:custGeom>
+            <a:ln w="38100" cap="rnd">
+              <a:solidFill>
+                <a:srgbClr val="FFFFFF"/>
+              </a:solidFill>
+              <a:prstDash val="solid"/>
+              <a:round/>
+            </a:ln>
+          </p:spPr>
+        </p:sp>
+        <p:sp>
+          <p:nvSpPr>
+            <p:cNvPr id="10" name="TextBox 10"/>
+            <p:cNvSpPr txBox="1"/>
+            <p:nvPr/>
+          </p:nvSpPr>
+          <p:spPr>
+            <a:xfrm>
+              <a:off x="0" y="-95250"/>
+              <a:ext cx="1990982" cy="348329"/>
+            </a:xfrm>
+            <a:prstGeom prst="rect">
+              <a:avLst/>
+            </a:prstGeom>
+          </p:spPr>
+          <p:txBody>
+            <a:bodyPr lIns="50800" tIns="50800" rIns="50800" bIns="50800" rtlCol="0" anchor="ctr"/>
+            <a:lstStyle/>
+            <a:p>
+              <a:pPr algn="ctr">
+                <a:lnSpc>
+                  <a:spcPts val="3287"/>
+                </a:lnSpc>
+              </a:pPr>
+              <a:endParaRPr/>
+            </a:p>
+          </p:txBody>
+        </p:sp>
+      </p:grpSp>
+      <p:sp>
+        <p:nvSpPr>
+          <p:cNvPr id="11" name="TextBox 11"/>
+          <p:cNvSpPr txBox="1"/>
+          <p:nvPr/>
+        </p:nvSpPr>
+        <p:spPr>
+          <a:xfrm>
+            <a:off x="6595585" y="655739"/>
+            <a:ext cx="5096827" cy="679673"/>
+          </a:xfrm>
+          <a:prstGeom prst="rect">
+            <a:avLst/>
+          </a:prstGeom>
+        </p:spPr>
+        <p:txBody>
+          <a:bodyPr wrap="square" lIns="0" tIns="0" rIns="0" bIns="0" rtlCol="0" anchor="t">
+            <a:spAutoFit/>
+          </a:bodyPr>
+          <a:lstStyle/>
+          <a:p>
+            <a:pPr algn="ctr">
+              <a:lnSpc>
+                <a:spcPts val="5339"/>
+              </a:lnSpc>
+              <a:spcBef>
+                <a:spcPct val="0"/>
+              </a:spcBef>
+            </a:pPr>
+            <a:r>
+              <a:rPr lang="en-US" sz="3122" b="1" spc="171" dirty="0">
+                <a:solidFill>
+                  <a:srgbClr val="FFFFFF"/>
+                </a:solidFill>
+                <a:latin typeface="Nunito Bold"/>
+                <a:ea typeface="Nunito Bold"/>
+                <a:cs typeface="Nunito Bold"/>
+                <a:sym typeface="Nunito Bold"/>
+              </a:rPr>
+              <a:t>PROPOSED SOLUTION</a:t>
+            </a:r>
+          </a:p>
+        </p:txBody>
+      </p:sp>
+      <p:grpSp>
+        <p:nvGrpSpPr>
+          <p:cNvPr id="12" name="Group 12"/>
+          <p:cNvGrpSpPr/>
+          <p:nvPr/>
+        </p:nvGrpSpPr>
+        <p:grpSpPr>
+          <a:xfrm>
             <a:off x="423065" y="1926934"/>
             <a:ext cx="17441869" cy="7971820"/>
             <a:chOff x="0" y="0"/>
@@ -4092,12 +4948,12 @@
         </p:grpSpPr>
         <p:sp>
           <p:nvSpPr>
-            <p:cNvPr name="Freeform 5" id="5"/>
+            <p:cNvPr id="13" name="Freeform 13"/>
             <p:cNvSpPr/>
             <p:nvPr/>
           </p:nvSpPr>
           <p:spPr>
-            <a:xfrm flipH="false" flipV="false" rot="0">
+            <a:xfrm>
               <a:off x="0" y="0"/>
               <a:ext cx="4593743" cy="2099574"/>
             </a:xfrm>
@@ -4106,72 +4962,78 @@
               <a:gdLst/>
               <a:ahLst/>
               <a:cxnLst/>
-              <a:rect r="r" b="b" t="t" l="l"/>
+              <a:rect l="l" t="t" r="r" b="b"/>
               <a:pathLst>
-                <a:path h="2099574" w="4593743">
+                <a:path w="4593743" h="2099574">
                   <a:moveTo>
-                    <a:pt x="7546" y="0"/>
+                    <a:pt x="16867" y="0"/>
                   </a:moveTo>
                   <a:lnTo>
-                    <a:pt x="4586198" y="0"/>
+                    <a:pt x="4576876" y="0"/>
                   </a:lnTo>
                   <a:cubicBezTo>
-                    <a:pt x="4588199" y="0"/>
-                    <a:pt x="4590118" y="795"/>
-                    <a:pt x="4591533" y="2210"/>
-                  </a:cubicBezTo>
-                  <a:cubicBezTo>
-                    <a:pt x="4592948" y="3625"/>
-                    <a:pt x="4593743" y="5545"/>
-                    <a:pt x="4593743" y="7546"/>
+                    <a:pt x="4581349" y="0"/>
+                    <a:pt x="4585640" y="1777"/>
+                    <a:pt x="4588803" y="4940"/>
+                  </a:cubicBezTo>
+                  <a:cubicBezTo>
+                    <a:pt x="4591966" y="8103"/>
+                    <a:pt x="4593743" y="12394"/>
+                    <a:pt x="4593743" y="16867"/>
                   </a:cubicBezTo>
                   <a:lnTo>
-                    <a:pt x="4593743" y="2092028"/>
+                    <a:pt x="4593743" y="2082707"/>
                   </a:lnTo>
                   <a:cubicBezTo>
-                    <a:pt x="4593743" y="2096196"/>
-                    <a:pt x="4590365" y="2099574"/>
-                    <a:pt x="4586198" y="2099574"/>
+                    <a:pt x="4593743" y="2092022"/>
+                    <a:pt x="4586192" y="2099574"/>
+                    <a:pt x="4576876" y="2099574"/>
                   </a:cubicBezTo>
                   <a:lnTo>
-                    <a:pt x="7546" y="2099574"/>
+                    <a:pt x="16867" y="2099574"/>
                   </a:lnTo>
                   <a:cubicBezTo>
-                    <a:pt x="5545" y="2099574"/>
-                    <a:pt x="3625" y="2098779"/>
-                    <a:pt x="2210" y="2097364"/>
-                  </a:cubicBezTo>
-                  <a:cubicBezTo>
-                    <a:pt x="795" y="2095949"/>
-                    <a:pt x="0" y="2094030"/>
-                    <a:pt x="0" y="2092028"/>
+                    <a:pt x="12394" y="2099574"/>
+                    <a:pt x="8103" y="2097797"/>
+                    <a:pt x="4940" y="2094634"/>
+                  </a:cubicBezTo>
+                  <a:cubicBezTo>
+                    <a:pt x="1777" y="2091471"/>
+                    <a:pt x="0" y="2087180"/>
+                    <a:pt x="0" y="2082707"/>
                   </a:cubicBezTo>
                   <a:lnTo>
-                    <a:pt x="0" y="7546"/>
+                    <a:pt x="0" y="16867"/>
                   </a:lnTo>
                   <a:cubicBezTo>
-                    <a:pt x="0" y="5545"/>
-                    <a:pt x="795" y="3625"/>
-                    <a:pt x="2210" y="2210"/>
-                  </a:cubicBezTo>
-                  <a:cubicBezTo>
-                    <a:pt x="3625" y="795"/>
-                    <a:pt x="5545" y="0"/>
-                    <a:pt x="7546" y="0"/>
+                    <a:pt x="0" y="12394"/>
+                    <a:pt x="1777" y="8103"/>
+                    <a:pt x="4940" y="4940"/>
+                  </a:cubicBezTo>
+                  <a:cubicBezTo>
+                    <a:pt x="8103" y="1777"/>
+                    <a:pt x="12394" y="0"/>
+                    <a:pt x="16867" y="0"/>
                   </a:cubicBezTo>
                   <a:close/>
                 </a:path>
               </a:pathLst>
             </a:custGeom>
-            <a:solidFill>
-              <a:srgbClr val="E7E5E5"/>
-            </a:solidFill>
+            <a:ln w="76200" cap="rnd">
+              <a:solidFill>
+                <a:srgbClr val="D1D1D1">
+                  <a:alpha val="89804"/>
+                </a:srgbClr>
+              </a:solidFill>
+              <a:prstDash val="solid"/>
+              <a:round/>
+            </a:ln>
           </p:spPr>
         </p:sp>
         <p:sp>
           <p:nvSpPr>
-            <p:cNvPr name="TextBox 6" id="6"/>
-            <p:cNvSpPr txBox="true"/>
+            <p:cNvPr id="14" name="TextBox 14"/>
+            <p:cNvSpPr txBox="1"/>
             <p:nvPr/>
           </p:nvSpPr>
           <p:spPr>
@@ -4184,191 +5046,19 @@
             </a:prstGeom>
           </p:spPr>
           <p:txBody>
-            <a:bodyPr anchor="ctr" rtlCol="false" tIns="50800" lIns="50800" bIns="50800" rIns="50800"/>
+            <a:bodyPr lIns="50800" tIns="50800" rIns="50800" bIns="50800" rtlCol="0" anchor="ctr"/>
             <a:lstStyle/>
             <a:p>
-              <a:pPr algn="ctr">
+              <a:pPr algn="just">
                 <a:lnSpc>
                   <a:spcPts val="3287"/>
                 </a:lnSpc>
               </a:pPr>
+              <a:endParaRPr/>
             </a:p>
           </p:txBody>
         </p:sp>
       </p:grpSp>
-      <p:grpSp>
-        <p:nvGrpSpPr>
-          <p:cNvPr name="Group 7" id="7"/>
-          <p:cNvGrpSpPr/>
-          <p:nvPr/>
-        </p:nvGrpSpPr>
-        <p:grpSpPr>
-          <a:xfrm rot="0">
-            <a:off x="5440445" y="520122"/>
-            <a:ext cx="7559510" cy="960907"/>
-            <a:chOff x="0" y="0"/>
-            <a:chExt cx="1990982" cy="253079"/>
-          </a:xfrm>
-        </p:grpSpPr>
-        <p:sp>
-          <p:nvSpPr>
-            <p:cNvPr name="Freeform 8" id="8"/>
-            <p:cNvSpPr/>
-            <p:nvPr/>
-          </p:nvSpPr>
-          <p:spPr>
-            <a:xfrm flipH="false" flipV="false" rot="0">
-              <a:off x="0" y="0"/>
-              <a:ext cx="1990982" cy="253078"/>
-            </a:xfrm>
-            <a:custGeom>
-              <a:avLst/>
-              <a:gdLst/>
-              <a:ahLst/>
-              <a:cxnLst/>
-              <a:rect r="r" b="b" t="t" l="l"/>
-              <a:pathLst>
-                <a:path h="253078" w="1990982">
-                  <a:moveTo>
-                    <a:pt x="102413" y="0"/>
-                  </a:moveTo>
-                  <a:lnTo>
-                    <a:pt x="1888569" y="0"/>
-                  </a:lnTo>
-                  <a:cubicBezTo>
-                    <a:pt x="1945130" y="0"/>
-                    <a:pt x="1990982" y="45852"/>
-                    <a:pt x="1990982" y="102413"/>
-                  </a:cubicBezTo>
-                  <a:lnTo>
-                    <a:pt x="1990982" y="150666"/>
-                  </a:lnTo>
-                  <a:cubicBezTo>
-                    <a:pt x="1990982" y="177827"/>
-                    <a:pt x="1980192" y="203876"/>
-                    <a:pt x="1960986" y="223082"/>
-                  </a:cubicBezTo>
-                  <a:cubicBezTo>
-                    <a:pt x="1941780" y="242289"/>
-                    <a:pt x="1915731" y="253078"/>
-                    <a:pt x="1888569" y="253078"/>
-                  </a:cubicBezTo>
-                  <a:lnTo>
-                    <a:pt x="102413" y="253078"/>
-                  </a:lnTo>
-                  <a:cubicBezTo>
-                    <a:pt x="75251" y="253078"/>
-                    <a:pt x="49202" y="242289"/>
-                    <a:pt x="29996" y="223082"/>
-                  </a:cubicBezTo>
-                  <a:cubicBezTo>
-                    <a:pt x="10790" y="203876"/>
-                    <a:pt x="0" y="177827"/>
-                    <a:pt x="0" y="150666"/>
-                  </a:cubicBezTo>
-                  <a:lnTo>
-                    <a:pt x="0" y="102413"/>
-                  </a:lnTo>
-                  <a:cubicBezTo>
-                    <a:pt x="0" y="75251"/>
-                    <a:pt x="10790" y="49202"/>
-                    <a:pt x="29996" y="29996"/>
-                  </a:cubicBezTo>
-                  <a:cubicBezTo>
-                    <a:pt x="49202" y="10790"/>
-                    <a:pt x="75251" y="0"/>
-                    <a:pt x="102413" y="0"/>
-                  </a:cubicBezTo>
-                  <a:close/>
-                </a:path>
-              </a:pathLst>
-            </a:custGeom>
-            <a:solidFill>
-              <a:srgbClr val="000000">
-                <a:alpha val="0"/>
-              </a:srgbClr>
-            </a:solidFill>
-            <a:ln w="38100" cap="rnd">
-              <a:solidFill>
-                <a:srgbClr val="303870"/>
-              </a:solidFill>
-              <a:prstDash val="solid"/>
-              <a:round/>
-            </a:ln>
-          </p:spPr>
-        </p:sp>
-        <p:sp>
-          <p:nvSpPr>
-            <p:cNvPr name="TextBox 9" id="9"/>
-            <p:cNvSpPr txBox="true"/>
-            <p:nvPr/>
-          </p:nvSpPr>
-          <p:spPr>
-            <a:xfrm>
-              <a:off x="0" y="-95250"/>
-              <a:ext cx="1990982" cy="348329"/>
-            </a:xfrm>
-            <a:prstGeom prst="rect">
-              <a:avLst/>
-            </a:prstGeom>
-          </p:spPr>
-          <p:txBody>
-            <a:bodyPr anchor="ctr" rtlCol="false" tIns="50800" lIns="50800" bIns="50800" rIns="50800"/>
-            <a:lstStyle/>
-            <a:p>
-              <a:pPr algn="ctr">
-                <a:lnSpc>
-                  <a:spcPts val="3287"/>
-                </a:lnSpc>
-              </a:pPr>
-            </a:p>
-          </p:txBody>
-        </p:sp>
-      </p:grpSp>
-      <p:sp>
-        <p:nvSpPr>
-          <p:cNvPr name="TextBox 10" id="10"/>
-          <p:cNvSpPr txBox="true"/>
-          <p:nvPr/>
-        </p:nvSpPr>
-        <p:spPr>
-          <a:xfrm rot="0">
-            <a:off x="6866572" y="634784"/>
-            <a:ext cx="4707255" cy="620711"/>
-          </a:xfrm>
-          <a:prstGeom prst="rect">
-            <a:avLst/>
-          </a:prstGeom>
-        </p:spPr>
-        <p:txBody>
-          <a:bodyPr anchor="t" rtlCol="false" tIns="0" lIns="0" bIns="0" rIns="0">
-            <a:spAutoFit/>
-          </a:bodyPr>
-          <a:lstStyle/>
-          <a:p>
-            <a:pPr algn="ctr">
-              <a:lnSpc>
-                <a:spcPts val="5339"/>
-              </a:lnSpc>
-              <a:spcBef>
-                <a:spcPct val="0"/>
-              </a:spcBef>
-            </a:pPr>
-            <a:r>
-              <a:rPr lang="en-US" b="true" sz="3122" spc="171">
-                <a:solidFill>
-                  <a:srgbClr val="000000"/>
-                </a:solidFill>
-                <a:latin typeface="Nunito Bold"/>
-                <a:ea typeface="Nunito Bold"/>
-                <a:cs typeface="Nunito Bold"/>
-                <a:sym typeface="Nunito Bold"/>
-              </a:rPr>
-              <a:t>PROPOSED SOLUTION</a:t>
-            </a:r>
-          </a:p>
-        </p:txBody>
-      </p:sp>
     </p:spTree>
   </p:cSld>
   <p:clrMapOvr>
@@ -4378,13 +5068,14 @@
 </file>
 
 <file path=ppt/slides/slide4.xml><?xml version="1.0" encoding="utf-8"?>
-<p:sld xmlns:p="http://schemas.openxmlformats.org/presentationml/2006/main" xmlns:a="http://schemas.openxmlformats.org/drawingml/2006/main" xmlns:r="http://schemas.openxmlformats.org/officeDocument/2006/relationships">
+<p:sld xmlns:a="http://schemas.openxmlformats.org/drawingml/2006/main" xmlns:r="http://schemas.openxmlformats.org/officeDocument/2006/relationships" xmlns:p="http://schemas.openxmlformats.org/presentationml/2006/main">
   <p:cSld>
     <p:bg>
       <p:bgPr>
         <a:solidFill>
-          <a:srgbClr val="D1D1D1"/>
+          <a:srgbClr val="000000"/>
         </a:solidFill>
+        <a:effectLst/>
       </p:bgPr>
     </p:bg>
     <p:spTree>
@@ -4403,34 +5094,34 @@
       </p:grpSpPr>
       <p:sp>
         <p:nvSpPr>
-          <p:cNvPr name="Freeform 2" id="2"/>
+          <p:cNvPr id="2" name="Freeform 2"/>
           <p:cNvSpPr/>
           <p:nvPr/>
         </p:nvSpPr>
         <p:spPr>
-          <a:xfrm flipH="false" flipV="false" rot="0">
-            <a:off x="423065" y="520122"/>
-            <a:ext cx="3850017" cy="950908"/>
+          <a:xfrm>
+            <a:off x="-3383650" y="-2941320"/>
+            <a:ext cx="8824700" cy="8824700"/>
           </a:xfrm>
           <a:custGeom>
             <a:avLst/>
             <a:gdLst/>
             <a:ahLst/>
             <a:cxnLst/>
-            <a:rect r="r" b="b" t="t" l="l"/>
+            <a:rect l="l" t="t" r="r" b="b"/>
             <a:pathLst>
-              <a:path h="950908" w="3850017">
+              <a:path w="8824700" h="8824700">
                 <a:moveTo>
                   <a:pt x="0" y="0"/>
                 </a:moveTo>
                 <a:lnTo>
-                  <a:pt x="3850018" y="0"/>
-                </a:lnTo>
-                <a:lnTo>
-                  <a:pt x="3850018" y="950908"/>
-                </a:lnTo>
-                <a:lnTo>
-                  <a:pt x="0" y="950908"/>
+                  <a:pt x="8824700" y="0"/>
+                </a:lnTo>
+                <a:lnTo>
+                  <a:pt x="8824700" y="8824699"/>
+                </a:lnTo>
+                <a:lnTo>
+                  <a:pt x="0" y="8824699"/>
                 </a:lnTo>
                 <a:lnTo>
                   <a:pt x="0" y="0"/>
@@ -4442,41 +5133,179 @@
           <a:blipFill>
             <a:blip r:embed="rId2"/>
             <a:stretch>
-              <a:fillRect l="0" t="0" r="0" b="0"/>
+              <a:fillRect/>
             </a:stretch>
           </a:blipFill>
         </p:spPr>
       </p:sp>
       <p:sp>
         <p:nvSpPr>
-          <p:cNvPr name="Freeform 3" id="3"/>
+          <p:cNvPr id="3" name="Freeform 3"/>
           <p:cNvSpPr/>
           <p:nvPr/>
         </p:nvSpPr>
         <p:spPr>
-          <a:xfrm flipH="false" flipV="false" rot="0">
-            <a:off x="14974972" y="520122"/>
-            <a:ext cx="2889962" cy="1017157"/>
+          <a:xfrm>
+            <a:off x="11888339" y="2758109"/>
+            <a:ext cx="10156534" cy="10156534"/>
           </a:xfrm>
           <a:custGeom>
             <a:avLst/>
             <a:gdLst/>
             <a:ahLst/>
             <a:cxnLst/>
-            <a:rect r="r" b="b" t="t" l="l"/>
+            <a:rect l="l" t="t" r="r" b="b"/>
             <a:pathLst>
-              <a:path h="1017157" w="2889962">
+              <a:path w="10156534" h="10156534">
                 <a:moveTo>
                   <a:pt x="0" y="0"/>
                 </a:moveTo>
                 <a:lnTo>
-                  <a:pt x="2889963" y="0"/>
-                </a:lnTo>
-                <a:lnTo>
-                  <a:pt x="2889963" y="1017156"/>
-                </a:lnTo>
-                <a:lnTo>
-                  <a:pt x="0" y="1017156"/>
+                  <a:pt x="10156534" y="0"/>
+                </a:lnTo>
+                <a:lnTo>
+                  <a:pt x="10156534" y="10156534"/>
+                </a:lnTo>
+                <a:lnTo>
+                  <a:pt x="0" y="10156534"/>
+                </a:lnTo>
+                <a:lnTo>
+                  <a:pt x="0" y="0"/>
+                </a:lnTo>
+                <a:close/>
+              </a:path>
+            </a:pathLst>
+          </a:custGeom>
+          <a:blipFill>
+            <a:blip r:embed="rId2"/>
+            <a:stretch>
+              <a:fillRect/>
+            </a:stretch>
+          </a:blipFill>
+        </p:spPr>
+      </p:sp>
+      <p:sp>
+        <p:nvSpPr>
+          <p:cNvPr id="4" name="Freeform 4"/>
+          <p:cNvSpPr/>
+          <p:nvPr/>
+        </p:nvSpPr>
+        <p:spPr>
+          <a:xfrm>
+            <a:off x="14685065" y="-4472609"/>
+            <a:ext cx="8229600" cy="8229600"/>
+          </a:xfrm>
+          <a:custGeom>
+            <a:avLst/>
+            <a:gdLst/>
+            <a:ahLst/>
+            <a:cxnLst/>
+            <a:rect l="l" t="t" r="r" b="b"/>
+            <a:pathLst>
+              <a:path w="8229600" h="8229600">
+                <a:moveTo>
+                  <a:pt x="0" y="0"/>
+                </a:moveTo>
+                <a:lnTo>
+                  <a:pt x="8229600" y="0"/>
+                </a:lnTo>
+                <a:lnTo>
+                  <a:pt x="8229600" y="8229600"/>
+                </a:lnTo>
+                <a:lnTo>
+                  <a:pt x="0" y="8229600"/>
+                </a:lnTo>
+                <a:lnTo>
+                  <a:pt x="0" y="0"/>
+                </a:lnTo>
+                <a:close/>
+              </a:path>
+            </a:pathLst>
+          </a:custGeom>
+          <a:blipFill>
+            <a:blip r:embed="rId2"/>
+            <a:stretch>
+              <a:fillRect/>
+            </a:stretch>
+          </a:blipFill>
+        </p:spPr>
+      </p:sp>
+      <p:sp>
+        <p:nvSpPr>
+          <p:cNvPr id="5" name="Freeform 5"/>
+          <p:cNvSpPr/>
+          <p:nvPr/>
+        </p:nvSpPr>
+        <p:spPr>
+          <a:xfrm>
+            <a:off x="-3956517" y="6907696"/>
+            <a:ext cx="8229600" cy="8229600"/>
+          </a:xfrm>
+          <a:custGeom>
+            <a:avLst/>
+            <a:gdLst/>
+            <a:ahLst/>
+            <a:cxnLst/>
+            <a:rect l="l" t="t" r="r" b="b"/>
+            <a:pathLst>
+              <a:path w="8229600" h="8229600">
+                <a:moveTo>
+                  <a:pt x="0" y="0"/>
+                </a:moveTo>
+                <a:lnTo>
+                  <a:pt x="8229600" y="0"/>
+                </a:lnTo>
+                <a:lnTo>
+                  <a:pt x="8229600" y="8229600"/>
+                </a:lnTo>
+                <a:lnTo>
+                  <a:pt x="0" y="8229600"/>
+                </a:lnTo>
+                <a:lnTo>
+                  <a:pt x="0" y="0"/>
+                </a:lnTo>
+                <a:close/>
+              </a:path>
+            </a:pathLst>
+          </a:custGeom>
+          <a:blipFill>
+            <a:blip r:embed="rId2"/>
+            <a:stretch>
+              <a:fillRect/>
+            </a:stretch>
+          </a:blipFill>
+        </p:spPr>
+      </p:sp>
+      <p:sp>
+        <p:nvSpPr>
+          <p:cNvPr id="6" name="Freeform 6"/>
+          <p:cNvSpPr/>
+          <p:nvPr/>
+        </p:nvSpPr>
+        <p:spPr>
+          <a:xfrm>
+            <a:off x="423065" y="520122"/>
+            <a:ext cx="3850017" cy="950908"/>
+          </a:xfrm>
+          <a:custGeom>
+            <a:avLst/>
+            <a:gdLst/>
+            <a:ahLst/>
+            <a:cxnLst/>
+            <a:rect l="l" t="t" r="r" b="b"/>
+            <a:pathLst>
+              <a:path w="3850017" h="950908">
+                <a:moveTo>
+                  <a:pt x="0" y="0"/>
+                </a:moveTo>
+                <a:lnTo>
+                  <a:pt x="3850018" y="0"/>
+                </a:lnTo>
+                <a:lnTo>
+                  <a:pt x="3850018" y="950908"/>
+                </a:lnTo>
+                <a:lnTo>
+                  <a:pt x="0" y="950908"/>
                 </a:lnTo>
                 <a:lnTo>
                   <a:pt x="0" y="0"/>
@@ -4488,19 +5317,65 @@
           <a:blipFill>
             <a:blip r:embed="rId3"/>
             <a:stretch>
-              <a:fillRect l="0" t="0" r="0" b="0"/>
+              <a:fillRect/>
             </a:stretch>
           </a:blipFill>
         </p:spPr>
       </p:sp>
+      <p:sp>
+        <p:nvSpPr>
+          <p:cNvPr id="7" name="Freeform 7"/>
+          <p:cNvSpPr/>
+          <p:nvPr/>
+        </p:nvSpPr>
+        <p:spPr>
+          <a:xfrm>
+            <a:off x="14974972" y="520122"/>
+            <a:ext cx="2889962" cy="1017157"/>
+          </a:xfrm>
+          <a:custGeom>
+            <a:avLst/>
+            <a:gdLst/>
+            <a:ahLst/>
+            <a:cxnLst/>
+            <a:rect l="l" t="t" r="r" b="b"/>
+            <a:pathLst>
+              <a:path w="2889962" h="1017157">
+                <a:moveTo>
+                  <a:pt x="0" y="0"/>
+                </a:moveTo>
+                <a:lnTo>
+                  <a:pt x="2889963" y="0"/>
+                </a:lnTo>
+                <a:lnTo>
+                  <a:pt x="2889963" y="1017156"/>
+                </a:lnTo>
+                <a:lnTo>
+                  <a:pt x="0" y="1017156"/>
+                </a:lnTo>
+                <a:lnTo>
+                  <a:pt x="0" y="0"/>
+                </a:lnTo>
+                <a:close/>
+              </a:path>
+            </a:pathLst>
+          </a:custGeom>
+          <a:blipFill>
+            <a:blip r:embed="rId4"/>
+            <a:stretch>
+              <a:fillRect/>
+            </a:stretch>
+          </a:blipFill>
+        </p:spPr>
+      </p:sp>
       <p:grpSp>
         <p:nvGrpSpPr>
-          <p:cNvPr name="Group 4" id="4"/>
+          <p:cNvPr id="8" name="Group 8"/>
           <p:cNvGrpSpPr/>
           <p:nvPr/>
         </p:nvGrpSpPr>
         <p:grpSpPr>
-          <a:xfrm rot="0">
+          <a:xfrm>
             <a:off x="5440445" y="520122"/>
             <a:ext cx="7559510" cy="960907"/>
             <a:chOff x="0" y="0"/>
@@ -4509,12 +5384,12 @@
         </p:grpSpPr>
         <p:sp>
           <p:nvSpPr>
-            <p:cNvPr name="Freeform 5" id="5"/>
+            <p:cNvPr id="9" name="Freeform 9"/>
             <p:cNvSpPr/>
             <p:nvPr/>
           </p:nvSpPr>
           <p:spPr>
-            <a:xfrm flipH="false" flipV="false" rot="0">
+            <a:xfrm>
               <a:off x="0" y="0"/>
               <a:ext cx="1990982" cy="253078"/>
             </a:xfrm>
@@ -4523,9 +5398,9 @@
               <a:gdLst/>
               <a:ahLst/>
               <a:cxnLst/>
-              <a:rect r="r" b="b" t="t" l="l"/>
+              <a:rect l="l" t="t" r="r" b="b"/>
               <a:pathLst>
-                <a:path h="253078" w="1990982">
+                <a:path w="1990982" h="253078">
                   <a:moveTo>
                     <a:pt x="102413" y="0"/>
                   </a:moveTo>
@@ -4580,14 +5455,9 @@
                 </a:path>
               </a:pathLst>
             </a:custGeom>
-            <a:solidFill>
-              <a:srgbClr val="000000">
-                <a:alpha val="0"/>
-              </a:srgbClr>
-            </a:solidFill>
             <a:ln w="38100" cap="rnd">
               <a:solidFill>
-                <a:srgbClr val="303870"/>
+                <a:srgbClr val="FFFFFF"/>
               </a:solidFill>
               <a:prstDash val="solid"/>
               <a:round/>
@@ -4596,8 +5466,8 @@
         </p:sp>
         <p:sp>
           <p:nvSpPr>
-            <p:cNvPr name="TextBox 6" id="6"/>
-            <p:cNvSpPr txBox="true"/>
+            <p:cNvPr id="10" name="TextBox 10"/>
+            <p:cNvSpPr txBox="1"/>
             <p:nvPr/>
           </p:nvSpPr>
           <p:spPr>
@@ -4610,7 +5480,7 @@
             </a:prstGeom>
           </p:spPr>
           <p:txBody>
-            <a:bodyPr anchor="ctr" rtlCol="false" tIns="50800" lIns="50800" bIns="50800" rIns="50800"/>
+            <a:bodyPr lIns="50800" tIns="50800" rIns="50800" bIns="50800" rtlCol="0" anchor="ctr"/>
             <a:lstStyle/>
             <a:p>
               <a:pPr algn="ctr">
@@ -4618,27 +5488,28 @@
                   <a:spcPts val="3287"/>
                 </a:lnSpc>
               </a:pPr>
+              <a:endParaRPr/>
             </a:p>
           </p:txBody>
         </p:sp>
       </p:grpSp>
       <p:sp>
         <p:nvSpPr>
-          <p:cNvPr name="TextBox 7" id="7"/>
-          <p:cNvSpPr txBox="true"/>
+          <p:cNvPr id="11" name="TextBox 11"/>
+          <p:cNvSpPr txBox="1"/>
           <p:nvPr/>
         </p:nvSpPr>
         <p:spPr>
-          <a:xfrm rot="0">
-            <a:off x="6277451" y="634784"/>
-            <a:ext cx="5885498" cy="620711"/>
+          <a:xfrm>
+            <a:off x="6172200" y="634784"/>
+            <a:ext cx="5990749" cy="679673"/>
           </a:xfrm>
           <a:prstGeom prst="rect">
             <a:avLst/>
           </a:prstGeom>
         </p:spPr>
         <p:txBody>
-          <a:bodyPr anchor="t" rtlCol="false" tIns="0" lIns="0" bIns="0" rIns="0">
+          <a:bodyPr wrap="square" lIns="0" tIns="0" rIns="0" bIns="0" rtlCol="0" anchor="t">
             <a:spAutoFit/>
           </a:bodyPr>
           <a:lstStyle/>
@@ -4652,9 +5523,9 @@
               </a:spcBef>
             </a:pPr>
             <a:r>
-              <a:rPr lang="en-US" b="true" sz="3122" spc="171">
+              <a:rPr lang="en-US" sz="3122" b="1" spc="171" dirty="0">
                 <a:solidFill>
-                  <a:srgbClr val="000000"/>
+                  <a:srgbClr val="FFFFFF"/>
                 </a:solidFill>
                 <a:latin typeface="Nunito Bold"/>
                 <a:ea typeface="Nunito Bold"/>
@@ -4666,6 +5537,133 @@
           </a:p>
         </p:txBody>
       </p:sp>
+      <p:grpSp>
+        <p:nvGrpSpPr>
+          <p:cNvPr id="12" name="Group 12"/>
+          <p:cNvGrpSpPr/>
+          <p:nvPr/>
+        </p:nvGrpSpPr>
+        <p:grpSpPr>
+          <a:xfrm>
+            <a:off x="423065" y="1926934"/>
+            <a:ext cx="17441869" cy="7971820"/>
+            <a:chOff x="0" y="0"/>
+            <a:chExt cx="4593743" cy="2099574"/>
+          </a:xfrm>
+        </p:grpSpPr>
+        <p:sp>
+          <p:nvSpPr>
+            <p:cNvPr id="13" name="Freeform 13"/>
+            <p:cNvSpPr/>
+            <p:nvPr/>
+          </p:nvSpPr>
+          <p:spPr>
+            <a:xfrm>
+              <a:off x="0" y="0"/>
+              <a:ext cx="4593743" cy="2099574"/>
+            </a:xfrm>
+            <a:custGeom>
+              <a:avLst/>
+              <a:gdLst/>
+              <a:ahLst/>
+              <a:cxnLst/>
+              <a:rect l="l" t="t" r="r" b="b"/>
+              <a:pathLst>
+                <a:path w="4593743" h="2099574">
+                  <a:moveTo>
+                    <a:pt x="16867" y="0"/>
+                  </a:moveTo>
+                  <a:lnTo>
+                    <a:pt x="4576876" y="0"/>
+                  </a:lnTo>
+                  <a:cubicBezTo>
+                    <a:pt x="4581349" y="0"/>
+                    <a:pt x="4585640" y="1777"/>
+                    <a:pt x="4588803" y="4940"/>
+                  </a:cubicBezTo>
+                  <a:cubicBezTo>
+                    <a:pt x="4591966" y="8103"/>
+                    <a:pt x="4593743" y="12394"/>
+                    <a:pt x="4593743" y="16867"/>
+                  </a:cubicBezTo>
+                  <a:lnTo>
+                    <a:pt x="4593743" y="2082707"/>
+                  </a:lnTo>
+                  <a:cubicBezTo>
+                    <a:pt x="4593743" y="2092022"/>
+                    <a:pt x="4586192" y="2099574"/>
+                    <a:pt x="4576876" y="2099574"/>
+                  </a:cubicBezTo>
+                  <a:lnTo>
+                    <a:pt x="16867" y="2099574"/>
+                  </a:lnTo>
+                  <a:cubicBezTo>
+                    <a:pt x="12394" y="2099574"/>
+                    <a:pt x="8103" y="2097797"/>
+                    <a:pt x="4940" y="2094634"/>
+                  </a:cubicBezTo>
+                  <a:cubicBezTo>
+                    <a:pt x="1777" y="2091471"/>
+                    <a:pt x="0" y="2087180"/>
+                    <a:pt x="0" y="2082707"/>
+                  </a:cubicBezTo>
+                  <a:lnTo>
+                    <a:pt x="0" y="16867"/>
+                  </a:lnTo>
+                  <a:cubicBezTo>
+                    <a:pt x="0" y="12394"/>
+                    <a:pt x="1777" y="8103"/>
+                    <a:pt x="4940" y="4940"/>
+                  </a:cubicBezTo>
+                  <a:cubicBezTo>
+                    <a:pt x="8103" y="1777"/>
+                    <a:pt x="12394" y="0"/>
+                    <a:pt x="16867" y="0"/>
+                  </a:cubicBezTo>
+                  <a:close/>
+                </a:path>
+              </a:pathLst>
+            </a:custGeom>
+            <a:ln w="76200" cap="rnd">
+              <a:solidFill>
+                <a:srgbClr val="D1D1D1">
+                  <a:alpha val="89804"/>
+                </a:srgbClr>
+              </a:solidFill>
+              <a:prstDash val="solid"/>
+              <a:round/>
+            </a:ln>
+          </p:spPr>
+        </p:sp>
+        <p:sp>
+          <p:nvSpPr>
+            <p:cNvPr id="14" name="TextBox 14"/>
+            <p:cNvSpPr txBox="1"/>
+            <p:nvPr/>
+          </p:nvSpPr>
+          <p:spPr>
+            <a:xfrm>
+              <a:off x="0" y="-95250"/>
+              <a:ext cx="4593743" cy="2194824"/>
+            </a:xfrm>
+            <a:prstGeom prst="rect">
+              <a:avLst/>
+            </a:prstGeom>
+          </p:spPr>
+          <p:txBody>
+            <a:bodyPr lIns="50800" tIns="50800" rIns="50800" bIns="50800" rtlCol="0" anchor="ctr"/>
+            <a:lstStyle/>
+            <a:p>
+              <a:pPr algn="just">
+                <a:lnSpc>
+                  <a:spcPts val="3287"/>
+                </a:lnSpc>
+              </a:pPr>
+              <a:endParaRPr/>
+            </a:p>
+          </p:txBody>
+        </p:sp>
+      </p:grpSp>
     </p:spTree>
   </p:cSld>
   <p:clrMapOvr>
@@ -4675,13 +5673,14 @@
 </file>
 
 <file path=ppt/slides/slide5.xml><?xml version="1.0" encoding="utf-8"?>
-<p:sld xmlns:p="http://schemas.openxmlformats.org/presentationml/2006/main" xmlns:a="http://schemas.openxmlformats.org/drawingml/2006/main" xmlns:r="http://schemas.openxmlformats.org/officeDocument/2006/relationships">
+<p:sld xmlns:a="http://schemas.openxmlformats.org/drawingml/2006/main" xmlns:r="http://schemas.openxmlformats.org/officeDocument/2006/relationships" xmlns:p="http://schemas.openxmlformats.org/presentationml/2006/main">
   <p:cSld>
     <p:bg>
       <p:bgPr>
         <a:solidFill>
-          <a:srgbClr val="D1D1D1"/>
+          <a:srgbClr val="000000"/>
         </a:solidFill>
+        <a:effectLst/>
       </p:bgPr>
     </p:bg>
     <p:spTree>
@@ -4700,34 +5699,34 @@
       </p:grpSpPr>
       <p:sp>
         <p:nvSpPr>
-          <p:cNvPr name="Freeform 2" id="2"/>
+          <p:cNvPr id="2" name="Freeform 2"/>
           <p:cNvSpPr/>
           <p:nvPr/>
         </p:nvSpPr>
         <p:spPr>
-          <a:xfrm flipH="false" flipV="false" rot="0">
-            <a:off x="423065" y="520122"/>
-            <a:ext cx="3850017" cy="950908"/>
+          <a:xfrm>
+            <a:off x="-3383650" y="-2941320"/>
+            <a:ext cx="8824700" cy="8824700"/>
           </a:xfrm>
           <a:custGeom>
             <a:avLst/>
             <a:gdLst/>
             <a:ahLst/>
             <a:cxnLst/>
-            <a:rect r="r" b="b" t="t" l="l"/>
+            <a:rect l="l" t="t" r="r" b="b"/>
             <a:pathLst>
-              <a:path h="950908" w="3850017">
+              <a:path w="8824700" h="8824700">
                 <a:moveTo>
                   <a:pt x="0" y="0"/>
                 </a:moveTo>
                 <a:lnTo>
-                  <a:pt x="3850018" y="0"/>
-                </a:lnTo>
-                <a:lnTo>
-                  <a:pt x="3850018" y="950908"/>
-                </a:lnTo>
-                <a:lnTo>
-                  <a:pt x="0" y="950908"/>
+                  <a:pt x="8824700" y="0"/>
+                </a:lnTo>
+                <a:lnTo>
+                  <a:pt x="8824700" y="8824699"/>
+                </a:lnTo>
+                <a:lnTo>
+                  <a:pt x="0" y="8824699"/>
                 </a:lnTo>
                 <a:lnTo>
                   <a:pt x="0" y="0"/>
@@ -4739,41 +5738,179 @@
           <a:blipFill>
             <a:blip r:embed="rId2"/>
             <a:stretch>
-              <a:fillRect l="0" t="0" r="0" b="0"/>
+              <a:fillRect/>
             </a:stretch>
           </a:blipFill>
         </p:spPr>
       </p:sp>
       <p:sp>
         <p:nvSpPr>
-          <p:cNvPr name="Freeform 3" id="3"/>
+          <p:cNvPr id="3" name="Freeform 3"/>
           <p:cNvSpPr/>
           <p:nvPr/>
         </p:nvSpPr>
         <p:spPr>
-          <a:xfrm flipH="false" flipV="false" rot="0">
-            <a:off x="14974972" y="520122"/>
-            <a:ext cx="2889962" cy="1017157"/>
+          <a:xfrm>
+            <a:off x="11888339" y="2758109"/>
+            <a:ext cx="10156534" cy="10156534"/>
           </a:xfrm>
           <a:custGeom>
             <a:avLst/>
             <a:gdLst/>
             <a:ahLst/>
             <a:cxnLst/>
-            <a:rect r="r" b="b" t="t" l="l"/>
+            <a:rect l="l" t="t" r="r" b="b"/>
             <a:pathLst>
-              <a:path h="1017157" w="2889962">
+              <a:path w="10156534" h="10156534">
                 <a:moveTo>
                   <a:pt x="0" y="0"/>
                 </a:moveTo>
                 <a:lnTo>
-                  <a:pt x="2889963" y="0"/>
-                </a:lnTo>
-                <a:lnTo>
-                  <a:pt x="2889963" y="1017156"/>
-                </a:lnTo>
-                <a:lnTo>
-                  <a:pt x="0" y="1017156"/>
+                  <a:pt x="10156534" y="0"/>
+                </a:lnTo>
+                <a:lnTo>
+                  <a:pt x="10156534" y="10156534"/>
+                </a:lnTo>
+                <a:lnTo>
+                  <a:pt x="0" y="10156534"/>
+                </a:lnTo>
+                <a:lnTo>
+                  <a:pt x="0" y="0"/>
+                </a:lnTo>
+                <a:close/>
+              </a:path>
+            </a:pathLst>
+          </a:custGeom>
+          <a:blipFill>
+            <a:blip r:embed="rId2"/>
+            <a:stretch>
+              <a:fillRect/>
+            </a:stretch>
+          </a:blipFill>
+        </p:spPr>
+      </p:sp>
+      <p:sp>
+        <p:nvSpPr>
+          <p:cNvPr id="4" name="Freeform 4"/>
+          <p:cNvSpPr/>
+          <p:nvPr/>
+        </p:nvSpPr>
+        <p:spPr>
+          <a:xfrm>
+            <a:off x="14685065" y="-4472609"/>
+            <a:ext cx="8229600" cy="8229600"/>
+          </a:xfrm>
+          <a:custGeom>
+            <a:avLst/>
+            <a:gdLst/>
+            <a:ahLst/>
+            <a:cxnLst/>
+            <a:rect l="l" t="t" r="r" b="b"/>
+            <a:pathLst>
+              <a:path w="8229600" h="8229600">
+                <a:moveTo>
+                  <a:pt x="0" y="0"/>
+                </a:moveTo>
+                <a:lnTo>
+                  <a:pt x="8229600" y="0"/>
+                </a:lnTo>
+                <a:lnTo>
+                  <a:pt x="8229600" y="8229600"/>
+                </a:lnTo>
+                <a:lnTo>
+                  <a:pt x="0" y="8229600"/>
+                </a:lnTo>
+                <a:lnTo>
+                  <a:pt x="0" y="0"/>
+                </a:lnTo>
+                <a:close/>
+              </a:path>
+            </a:pathLst>
+          </a:custGeom>
+          <a:blipFill>
+            <a:blip r:embed="rId2"/>
+            <a:stretch>
+              <a:fillRect/>
+            </a:stretch>
+          </a:blipFill>
+        </p:spPr>
+      </p:sp>
+      <p:sp>
+        <p:nvSpPr>
+          <p:cNvPr id="5" name="Freeform 5"/>
+          <p:cNvSpPr/>
+          <p:nvPr/>
+        </p:nvSpPr>
+        <p:spPr>
+          <a:xfrm>
+            <a:off x="-3956517" y="6907696"/>
+            <a:ext cx="8229600" cy="8229600"/>
+          </a:xfrm>
+          <a:custGeom>
+            <a:avLst/>
+            <a:gdLst/>
+            <a:ahLst/>
+            <a:cxnLst/>
+            <a:rect l="l" t="t" r="r" b="b"/>
+            <a:pathLst>
+              <a:path w="8229600" h="8229600">
+                <a:moveTo>
+                  <a:pt x="0" y="0"/>
+                </a:moveTo>
+                <a:lnTo>
+                  <a:pt x="8229600" y="0"/>
+                </a:lnTo>
+                <a:lnTo>
+                  <a:pt x="8229600" y="8229600"/>
+                </a:lnTo>
+                <a:lnTo>
+                  <a:pt x="0" y="8229600"/>
+                </a:lnTo>
+                <a:lnTo>
+                  <a:pt x="0" y="0"/>
+                </a:lnTo>
+                <a:close/>
+              </a:path>
+            </a:pathLst>
+          </a:custGeom>
+          <a:blipFill>
+            <a:blip r:embed="rId2"/>
+            <a:stretch>
+              <a:fillRect/>
+            </a:stretch>
+          </a:blipFill>
+        </p:spPr>
+      </p:sp>
+      <p:sp>
+        <p:nvSpPr>
+          <p:cNvPr id="6" name="Freeform 6"/>
+          <p:cNvSpPr/>
+          <p:nvPr/>
+        </p:nvSpPr>
+        <p:spPr>
+          <a:xfrm>
+            <a:off x="423065" y="520122"/>
+            <a:ext cx="3850017" cy="950908"/>
+          </a:xfrm>
+          <a:custGeom>
+            <a:avLst/>
+            <a:gdLst/>
+            <a:ahLst/>
+            <a:cxnLst/>
+            <a:rect l="l" t="t" r="r" b="b"/>
+            <a:pathLst>
+              <a:path w="3850017" h="950908">
+                <a:moveTo>
+                  <a:pt x="0" y="0"/>
+                </a:moveTo>
+                <a:lnTo>
+                  <a:pt x="3850018" y="0"/>
+                </a:lnTo>
+                <a:lnTo>
+                  <a:pt x="3850018" y="950908"/>
+                </a:lnTo>
+                <a:lnTo>
+                  <a:pt x="0" y="950908"/>
                 </a:lnTo>
                 <a:lnTo>
                   <a:pt x="0" y="0"/>
@@ -4785,19 +5922,234 @@
           <a:blipFill>
             <a:blip r:embed="rId3"/>
             <a:stretch>
-              <a:fillRect l="0" t="0" r="0" b="0"/>
+              <a:fillRect/>
             </a:stretch>
           </a:blipFill>
         </p:spPr>
       </p:sp>
+      <p:sp>
+        <p:nvSpPr>
+          <p:cNvPr id="7" name="Freeform 7"/>
+          <p:cNvSpPr/>
+          <p:nvPr/>
+        </p:nvSpPr>
+        <p:spPr>
+          <a:xfrm>
+            <a:off x="14974972" y="520122"/>
+            <a:ext cx="2889962" cy="1017157"/>
+          </a:xfrm>
+          <a:custGeom>
+            <a:avLst/>
+            <a:gdLst/>
+            <a:ahLst/>
+            <a:cxnLst/>
+            <a:rect l="l" t="t" r="r" b="b"/>
+            <a:pathLst>
+              <a:path w="2889962" h="1017157">
+                <a:moveTo>
+                  <a:pt x="0" y="0"/>
+                </a:moveTo>
+                <a:lnTo>
+                  <a:pt x="2889963" y="0"/>
+                </a:lnTo>
+                <a:lnTo>
+                  <a:pt x="2889963" y="1017156"/>
+                </a:lnTo>
+                <a:lnTo>
+                  <a:pt x="0" y="1017156"/>
+                </a:lnTo>
+                <a:lnTo>
+                  <a:pt x="0" y="0"/>
+                </a:lnTo>
+                <a:close/>
+              </a:path>
+            </a:pathLst>
+          </a:custGeom>
+          <a:blipFill>
+            <a:blip r:embed="rId4"/>
+            <a:stretch>
+              <a:fillRect/>
+            </a:stretch>
+          </a:blipFill>
+        </p:spPr>
+      </p:sp>
       <p:grpSp>
         <p:nvGrpSpPr>
-          <p:cNvPr name="Group 4" id="4"/>
+          <p:cNvPr id="8" name="Group 8"/>
           <p:cNvGrpSpPr/>
           <p:nvPr/>
         </p:nvGrpSpPr>
         <p:grpSpPr>
-          <a:xfrm rot="0">
+          <a:xfrm>
+            <a:off x="5440445" y="520122"/>
+            <a:ext cx="7559510" cy="960907"/>
+            <a:chOff x="0" y="0"/>
+            <a:chExt cx="1990982" cy="253079"/>
+          </a:xfrm>
+        </p:grpSpPr>
+        <p:sp>
+          <p:nvSpPr>
+            <p:cNvPr id="9" name="Freeform 9"/>
+            <p:cNvSpPr/>
+            <p:nvPr/>
+          </p:nvSpPr>
+          <p:spPr>
+            <a:xfrm>
+              <a:off x="0" y="0"/>
+              <a:ext cx="1990982" cy="253078"/>
+            </a:xfrm>
+            <a:custGeom>
+              <a:avLst/>
+              <a:gdLst/>
+              <a:ahLst/>
+              <a:cxnLst/>
+              <a:rect l="l" t="t" r="r" b="b"/>
+              <a:pathLst>
+                <a:path w="1990982" h="253078">
+                  <a:moveTo>
+                    <a:pt x="102413" y="0"/>
+                  </a:moveTo>
+                  <a:lnTo>
+                    <a:pt x="1888569" y="0"/>
+                  </a:lnTo>
+                  <a:cubicBezTo>
+                    <a:pt x="1945130" y="0"/>
+                    <a:pt x="1990982" y="45852"/>
+                    <a:pt x="1990982" y="102413"/>
+                  </a:cubicBezTo>
+                  <a:lnTo>
+                    <a:pt x="1990982" y="150666"/>
+                  </a:lnTo>
+                  <a:cubicBezTo>
+                    <a:pt x="1990982" y="177827"/>
+                    <a:pt x="1980192" y="203876"/>
+                    <a:pt x="1960986" y="223082"/>
+                  </a:cubicBezTo>
+                  <a:cubicBezTo>
+                    <a:pt x="1941780" y="242289"/>
+                    <a:pt x="1915731" y="253078"/>
+                    <a:pt x="1888569" y="253078"/>
+                  </a:cubicBezTo>
+                  <a:lnTo>
+                    <a:pt x="102413" y="253078"/>
+                  </a:lnTo>
+                  <a:cubicBezTo>
+                    <a:pt x="75251" y="253078"/>
+                    <a:pt x="49202" y="242289"/>
+                    <a:pt x="29996" y="223082"/>
+                  </a:cubicBezTo>
+                  <a:cubicBezTo>
+                    <a:pt x="10790" y="203876"/>
+                    <a:pt x="0" y="177827"/>
+                    <a:pt x="0" y="150666"/>
+                  </a:cubicBezTo>
+                  <a:lnTo>
+                    <a:pt x="0" y="102413"/>
+                  </a:lnTo>
+                  <a:cubicBezTo>
+                    <a:pt x="0" y="75251"/>
+                    <a:pt x="10790" y="49202"/>
+                    <a:pt x="29996" y="29996"/>
+                  </a:cubicBezTo>
+                  <a:cubicBezTo>
+                    <a:pt x="49202" y="10790"/>
+                    <a:pt x="75251" y="0"/>
+                    <a:pt x="102413" y="0"/>
+                  </a:cubicBezTo>
+                  <a:close/>
+                </a:path>
+              </a:pathLst>
+            </a:custGeom>
+            <a:ln w="38100" cap="rnd">
+              <a:solidFill>
+                <a:srgbClr val="FFFFFF"/>
+              </a:solidFill>
+              <a:prstDash val="solid"/>
+              <a:round/>
+            </a:ln>
+          </p:spPr>
+        </p:sp>
+        <p:sp>
+          <p:nvSpPr>
+            <p:cNvPr id="10" name="TextBox 10"/>
+            <p:cNvSpPr txBox="1"/>
+            <p:nvPr/>
+          </p:nvSpPr>
+          <p:spPr>
+            <a:xfrm>
+              <a:off x="0" y="-95250"/>
+              <a:ext cx="1990982" cy="348329"/>
+            </a:xfrm>
+            <a:prstGeom prst="rect">
+              <a:avLst/>
+            </a:prstGeom>
+          </p:spPr>
+          <p:txBody>
+            <a:bodyPr lIns="50800" tIns="50800" rIns="50800" bIns="50800" rtlCol="0" anchor="ctr"/>
+            <a:lstStyle/>
+            <a:p>
+              <a:pPr algn="ctr">
+                <a:lnSpc>
+                  <a:spcPts val="3287"/>
+                </a:lnSpc>
+              </a:pPr>
+              <a:endParaRPr/>
+            </a:p>
+          </p:txBody>
+        </p:sp>
+      </p:grpSp>
+      <p:sp>
+        <p:nvSpPr>
+          <p:cNvPr id="11" name="TextBox 11"/>
+          <p:cNvSpPr txBox="1"/>
+          <p:nvPr/>
+        </p:nvSpPr>
+        <p:spPr>
+          <a:xfrm>
+            <a:off x="5958192" y="634784"/>
+            <a:ext cx="6444599" cy="679673"/>
+          </a:xfrm>
+          <a:prstGeom prst="rect">
+            <a:avLst/>
+          </a:prstGeom>
+        </p:spPr>
+        <p:txBody>
+          <a:bodyPr wrap="square" lIns="0" tIns="0" rIns="0" bIns="0" rtlCol="0" anchor="t">
+            <a:spAutoFit/>
+          </a:bodyPr>
+          <a:lstStyle/>
+          <a:p>
+            <a:pPr algn="ctr">
+              <a:lnSpc>
+                <a:spcPts val="5339"/>
+              </a:lnSpc>
+              <a:spcBef>
+                <a:spcPct val="0"/>
+              </a:spcBef>
+            </a:pPr>
+            <a:r>
+              <a:rPr lang="en-US" sz="3122" b="1" spc="171" dirty="0">
+                <a:solidFill>
+                  <a:srgbClr val="FFFFFF"/>
+                </a:solidFill>
+                <a:latin typeface="Nunito Bold"/>
+                <a:ea typeface="Nunito Bold"/>
+                <a:cs typeface="Nunito Bold"/>
+                <a:sym typeface="Nunito Bold"/>
+              </a:rPr>
+              <a:t>UNIQUE SELLING POINT [USP]</a:t>
+            </a:r>
+          </a:p>
+        </p:txBody>
+      </p:sp>
+      <p:grpSp>
+        <p:nvGrpSpPr>
+          <p:cNvPr id="12" name="Group 12"/>
+          <p:cNvGrpSpPr/>
+          <p:nvPr/>
+        </p:nvGrpSpPr>
+        <p:grpSpPr>
+          <a:xfrm>
             <a:off x="423065" y="1926934"/>
             <a:ext cx="17441869" cy="7971820"/>
             <a:chOff x="0" y="0"/>
@@ -4806,12 +6158,12 @@
         </p:grpSpPr>
         <p:sp>
           <p:nvSpPr>
-            <p:cNvPr name="Freeform 5" id="5"/>
+            <p:cNvPr id="13" name="Freeform 13"/>
             <p:cNvSpPr/>
             <p:nvPr/>
           </p:nvSpPr>
           <p:spPr>
-            <a:xfrm flipH="false" flipV="false" rot="0">
+            <a:xfrm>
               <a:off x="0" y="0"/>
               <a:ext cx="4593743" cy="2099574"/>
             </a:xfrm>
@@ -4820,72 +6172,78 @@
               <a:gdLst/>
               <a:ahLst/>
               <a:cxnLst/>
-              <a:rect r="r" b="b" t="t" l="l"/>
+              <a:rect l="l" t="t" r="r" b="b"/>
               <a:pathLst>
-                <a:path h="2099574" w="4593743">
+                <a:path w="4593743" h="2099574">
                   <a:moveTo>
-                    <a:pt x="7546" y="0"/>
+                    <a:pt x="16867" y="0"/>
                   </a:moveTo>
                   <a:lnTo>
-                    <a:pt x="4586198" y="0"/>
+                    <a:pt x="4576876" y="0"/>
                   </a:lnTo>
                   <a:cubicBezTo>
-                    <a:pt x="4588199" y="0"/>
-                    <a:pt x="4590118" y="795"/>
-                    <a:pt x="4591533" y="2210"/>
-                  </a:cubicBezTo>
-                  <a:cubicBezTo>
-                    <a:pt x="4592948" y="3625"/>
-                    <a:pt x="4593743" y="5545"/>
-                    <a:pt x="4593743" y="7546"/>
+                    <a:pt x="4581349" y="0"/>
+                    <a:pt x="4585640" y="1777"/>
+                    <a:pt x="4588803" y="4940"/>
+                  </a:cubicBezTo>
+                  <a:cubicBezTo>
+                    <a:pt x="4591966" y="8103"/>
+                    <a:pt x="4593743" y="12394"/>
+                    <a:pt x="4593743" y="16867"/>
                   </a:cubicBezTo>
                   <a:lnTo>
-                    <a:pt x="4593743" y="2092028"/>
+                    <a:pt x="4593743" y="2082707"/>
                   </a:lnTo>
                   <a:cubicBezTo>
-                    <a:pt x="4593743" y="2096196"/>
-                    <a:pt x="4590365" y="2099574"/>
-                    <a:pt x="4586198" y="2099574"/>
+                    <a:pt x="4593743" y="2092022"/>
+                    <a:pt x="4586192" y="2099574"/>
+                    <a:pt x="4576876" y="2099574"/>
                   </a:cubicBezTo>
                   <a:lnTo>
-                    <a:pt x="7546" y="2099574"/>
+                    <a:pt x="16867" y="2099574"/>
                   </a:lnTo>
                   <a:cubicBezTo>
-                    <a:pt x="5545" y="2099574"/>
-                    <a:pt x="3625" y="2098779"/>
-                    <a:pt x="2210" y="2097364"/>
-                  </a:cubicBezTo>
-                  <a:cubicBezTo>
-                    <a:pt x="795" y="2095949"/>
-                    <a:pt x="0" y="2094030"/>
-                    <a:pt x="0" y="2092028"/>
+                    <a:pt x="12394" y="2099574"/>
+                    <a:pt x="8103" y="2097797"/>
+                    <a:pt x="4940" y="2094634"/>
+                  </a:cubicBezTo>
+                  <a:cubicBezTo>
+                    <a:pt x="1777" y="2091471"/>
+                    <a:pt x="0" y="2087180"/>
+                    <a:pt x="0" y="2082707"/>
                   </a:cubicBezTo>
                   <a:lnTo>
-                    <a:pt x="0" y="7546"/>
+                    <a:pt x="0" y="16867"/>
                   </a:lnTo>
                   <a:cubicBezTo>
-                    <a:pt x="0" y="5545"/>
-                    <a:pt x="795" y="3625"/>
-                    <a:pt x="2210" y="2210"/>
-                  </a:cubicBezTo>
-                  <a:cubicBezTo>
-                    <a:pt x="3625" y="795"/>
-                    <a:pt x="5545" y="0"/>
-                    <a:pt x="7546" y="0"/>
+                    <a:pt x="0" y="12394"/>
+                    <a:pt x="1777" y="8103"/>
+                    <a:pt x="4940" y="4940"/>
+                  </a:cubicBezTo>
+                  <a:cubicBezTo>
+                    <a:pt x="8103" y="1777"/>
+                    <a:pt x="12394" y="0"/>
+                    <a:pt x="16867" y="0"/>
                   </a:cubicBezTo>
                   <a:close/>
                 </a:path>
               </a:pathLst>
             </a:custGeom>
-            <a:solidFill>
-              <a:srgbClr val="E7E5E5"/>
-            </a:solidFill>
+            <a:ln w="76200" cap="rnd">
+              <a:solidFill>
+                <a:srgbClr val="D1D1D1">
+                  <a:alpha val="89804"/>
+                </a:srgbClr>
+              </a:solidFill>
+              <a:prstDash val="solid"/>
+              <a:round/>
+            </a:ln>
           </p:spPr>
         </p:sp>
         <p:sp>
           <p:nvSpPr>
-            <p:cNvPr name="TextBox 6" id="6"/>
-            <p:cNvSpPr txBox="true"/>
+            <p:cNvPr id="14" name="TextBox 14"/>
+            <p:cNvSpPr txBox="1"/>
             <p:nvPr/>
           </p:nvSpPr>
           <p:spPr>
@@ -4898,191 +6256,19 @@
             </a:prstGeom>
           </p:spPr>
           <p:txBody>
-            <a:bodyPr anchor="ctr" rtlCol="false" tIns="50800" lIns="50800" bIns="50800" rIns="50800"/>
+            <a:bodyPr lIns="50800" tIns="50800" rIns="50800" bIns="50800" rtlCol="0" anchor="ctr"/>
             <a:lstStyle/>
             <a:p>
-              <a:pPr algn="ctr">
+              <a:pPr algn="just">
                 <a:lnSpc>
                   <a:spcPts val="3287"/>
                 </a:lnSpc>
               </a:pPr>
+              <a:endParaRPr/>
             </a:p>
           </p:txBody>
         </p:sp>
       </p:grpSp>
-      <p:grpSp>
-        <p:nvGrpSpPr>
-          <p:cNvPr name="Group 7" id="7"/>
-          <p:cNvGrpSpPr/>
-          <p:nvPr/>
-        </p:nvGrpSpPr>
-        <p:grpSpPr>
-          <a:xfrm rot="0">
-            <a:off x="5440445" y="520122"/>
-            <a:ext cx="7559510" cy="960907"/>
-            <a:chOff x="0" y="0"/>
-            <a:chExt cx="1990982" cy="253079"/>
-          </a:xfrm>
-        </p:grpSpPr>
-        <p:sp>
-          <p:nvSpPr>
-            <p:cNvPr name="Freeform 8" id="8"/>
-            <p:cNvSpPr/>
-            <p:nvPr/>
-          </p:nvSpPr>
-          <p:spPr>
-            <a:xfrm flipH="false" flipV="false" rot="0">
-              <a:off x="0" y="0"/>
-              <a:ext cx="1990982" cy="253078"/>
-            </a:xfrm>
-            <a:custGeom>
-              <a:avLst/>
-              <a:gdLst/>
-              <a:ahLst/>
-              <a:cxnLst/>
-              <a:rect r="r" b="b" t="t" l="l"/>
-              <a:pathLst>
-                <a:path h="253078" w="1990982">
-                  <a:moveTo>
-                    <a:pt x="102413" y="0"/>
-                  </a:moveTo>
-                  <a:lnTo>
-                    <a:pt x="1888569" y="0"/>
-                  </a:lnTo>
-                  <a:cubicBezTo>
-                    <a:pt x="1945130" y="0"/>
-                    <a:pt x="1990982" y="45852"/>
-                    <a:pt x="1990982" y="102413"/>
-                  </a:cubicBezTo>
-                  <a:lnTo>
-                    <a:pt x="1990982" y="150666"/>
-                  </a:lnTo>
-                  <a:cubicBezTo>
-                    <a:pt x="1990982" y="177827"/>
-                    <a:pt x="1980192" y="203876"/>
-                    <a:pt x="1960986" y="223082"/>
-                  </a:cubicBezTo>
-                  <a:cubicBezTo>
-                    <a:pt x="1941780" y="242289"/>
-                    <a:pt x="1915731" y="253078"/>
-                    <a:pt x="1888569" y="253078"/>
-                  </a:cubicBezTo>
-                  <a:lnTo>
-                    <a:pt x="102413" y="253078"/>
-                  </a:lnTo>
-                  <a:cubicBezTo>
-                    <a:pt x="75251" y="253078"/>
-                    <a:pt x="49202" y="242289"/>
-                    <a:pt x="29996" y="223082"/>
-                  </a:cubicBezTo>
-                  <a:cubicBezTo>
-                    <a:pt x="10790" y="203876"/>
-                    <a:pt x="0" y="177827"/>
-                    <a:pt x="0" y="150666"/>
-                  </a:cubicBezTo>
-                  <a:lnTo>
-                    <a:pt x="0" y="102413"/>
-                  </a:lnTo>
-                  <a:cubicBezTo>
-                    <a:pt x="0" y="75251"/>
-                    <a:pt x="10790" y="49202"/>
-                    <a:pt x="29996" y="29996"/>
-                  </a:cubicBezTo>
-                  <a:cubicBezTo>
-                    <a:pt x="49202" y="10790"/>
-                    <a:pt x="75251" y="0"/>
-                    <a:pt x="102413" y="0"/>
-                  </a:cubicBezTo>
-                  <a:close/>
-                </a:path>
-              </a:pathLst>
-            </a:custGeom>
-            <a:solidFill>
-              <a:srgbClr val="000000">
-                <a:alpha val="0"/>
-              </a:srgbClr>
-            </a:solidFill>
-            <a:ln w="38100" cap="rnd">
-              <a:solidFill>
-                <a:srgbClr val="303870"/>
-              </a:solidFill>
-              <a:prstDash val="solid"/>
-              <a:round/>
-            </a:ln>
-          </p:spPr>
-        </p:sp>
-        <p:sp>
-          <p:nvSpPr>
-            <p:cNvPr name="TextBox 9" id="9"/>
-            <p:cNvSpPr txBox="true"/>
-            <p:nvPr/>
-          </p:nvSpPr>
-          <p:spPr>
-            <a:xfrm>
-              <a:off x="0" y="-95250"/>
-              <a:ext cx="1990982" cy="348329"/>
-            </a:xfrm>
-            <a:prstGeom prst="rect">
-              <a:avLst/>
-            </a:prstGeom>
-          </p:spPr>
-          <p:txBody>
-            <a:bodyPr anchor="ctr" rtlCol="false" tIns="50800" lIns="50800" bIns="50800" rIns="50800"/>
-            <a:lstStyle/>
-            <a:p>
-              <a:pPr algn="ctr">
-                <a:lnSpc>
-                  <a:spcPts val="3287"/>
-                </a:lnSpc>
-              </a:pPr>
-            </a:p>
-          </p:txBody>
-        </p:sp>
-      </p:grpSp>
-      <p:sp>
-        <p:nvSpPr>
-          <p:cNvPr name="TextBox 10" id="10"/>
-          <p:cNvSpPr txBox="true"/>
-          <p:nvPr/>
-        </p:nvSpPr>
-        <p:spPr>
-          <a:xfrm rot="0">
-            <a:off x="6450568" y="634784"/>
-            <a:ext cx="5539264" cy="620711"/>
-          </a:xfrm>
-          <a:prstGeom prst="rect">
-            <a:avLst/>
-          </a:prstGeom>
-        </p:spPr>
-        <p:txBody>
-          <a:bodyPr anchor="t" rtlCol="false" tIns="0" lIns="0" bIns="0" rIns="0">
-            <a:spAutoFit/>
-          </a:bodyPr>
-          <a:lstStyle/>
-          <a:p>
-            <a:pPr algn="ctr">
-              <a:lnSpc>
-                <a:spcPts val="5339"/>
-              </a:lnSpc>
-              <a:spcBef>
-                <a:spcPct val="0"/>
-              </a:spcBef>
-            </a:pPr>
-            <a:r>
-              <a:rPr lang="en-US" b="true" sz="3122" spc="171">
-                <a:solidFill>
-                  <a:srgbClr val="000000"/>
-                </a:solidFill>
-                <a:latin typeface="Nunito Bold"/>
-                <a:ea typeface="Nunito Bold"/>
-                <a:cs typeface="Nunito Bold"/>
-                <a:sym typeface="Nunito Bold"/>
-              </a:rPr>
-              <a:t>DEVELOPMENT LIFECYCLE</a:t>
-            </a:r>
-          </a:p>
-        </p:txBody>
-      </p:sp>
     </p:spTree>
   </p:cSld>
   <p:clrMapOvr>
@@ -5092,13 +6278,14 @@
 </file>
 
 <file path=ppt/slides/slide6.xml><?xml version="1.0" encoding="utf-8"?>
-<p:sld xmlns:p="http://schemas.openxmlformats.org/presentationml/2006/main" xmlns:a="http://schemas.openxmlformats.org/drawingml/2006/main" xmlns:r="http://schemas.openxmlformats.org/officeDocument/2006/relationships">
+<p:sld xmlns:a="http://schemas.openxmlformats.org/drawingml/2006/main" xmlns:r="http://schemas.openxmlformats.org/officeDocument/2006/relationships" xmlns:p="http://schemas.openxmlformats.org/presentationml/2006/main">
   <p:cSld>
     <p:bg>
       <p:bgPr>
         <a:solidFill>
-          <a:srgbClr val="D1D1D1"/>
+          <a:srgbClr val="000000"/>
         </a:solidFill>
+        <a:effectLst/>
       </p:bgPr>
     </p:bg>
     <p:spTree>
@@ -5117,34 +6304,34 @@
       </p:grpSpPr>
       <p:sp>
         <p:nvSpPr>
-          <p:cNvPr name="Freeform 2" id="2"/>
+          <p:cNvPr id="2" name="Freeform 2"/>
           <p:cNvSpPr/>
           <p:nvPr/>
         </p:nvSpPr>
         <p:spPr>
-          <a:xfrm flipH="false" flipV="false" rot="0">
-            <a:off x="423065" y="520122"/>
-            <a:ext cx="3850017" cy="950908"/>
+          <a:xfrm>
+            <a:off x="-3383650" y="-2941320"/>
+            <a:ext cx="8824700" cy="8824700"/>
           </a:xfrm>
           <a:custGeom>
             <a:avLst/>
             <a:gdLst/>
             <a:ahLst/>
             <a:cxnLst/>
-            <a:rect r="r" b="b" t="t" l="l"/>
+            <a:rect l="l" t="t" r="r" b="b"/>
             <a:pathLst>
-              <a:path h="950908" w="3850017">
+              <a:path w="8824700" h="8824700">
                 <a:moveTo>
                   <a:pt x="0" y="0"/>
                 </a:moveTo>
                 <a:lnTo>
-                  <a:pt x="3850018" y="0"/>
-                </a:lnTo>
-                <a:lnTo>
-                  <a:pt x="3850018" y="950908"/>
-                </a:lnTo>
-                <a:lnTo>
-                  <a:pt x="0" y="950908"/>
+                  <a:pt x="8824700" y="0"/>
+                </a:lnTo>
+                <a:lnTo>
+                  <a:pt x="8824700" y="8824699"/>
+                </a:lnTo>
+                <a:lnTo>
+                  <a:pt x="0" y="8824699"/>
                 </a:lnTo>
                 <a:lnTo>
                   <a:pt x="0" y="0"/>
@@ -5156,41 +6343,41 @@
           <a:blipFill>
             <a:blip r:embed="rId2"/>
             <a:stretch>
-              <a:fillRect l="0" t="0" r="0" b="0"/>
+              <a:fillRect/>
             </a:stretch>
           </a:blipFill>
         </p:spPr>
       </p:sp>
       <p:sp>
         <p:nvSpPr>
-          <p:cNvPr name="Freeform 3" id="3"/>
+          <p:cNvPr id="3" name="Freeform 3"/>
           <p:cNvSpPr/>
           <p:nvPr/>
         </p:nvSpPr>
         <p:spPr>
-          <a:xfrm flipH="false" flipV="false" rot="0">
-            <a:off x="14974972" y="520122"/>
-            <a:ext cx="2889962" cy="1017157"/>
+          <a:xfrm>
+            <a:off x="11888339" y="2758109"/>
+            <a:ext cx="10156534" cy="10156534"/>
           </a:xfrm>
           <a:custGeom>
             <a:avLst/>
             <a:gdLst/>
             <a:ahLst/>
             <a:cxnLst/>
-            <a:rect r="r" b="b" t="t" l="l"/>
+            <a:rect l="l" t="t" r="r" b="b"/>
             <a:pathLst>
-              <a:path h="1017157" w="2889962">
+              <a:path w="10156534" h="10156534">
                 <a:moveTo>
                   <a:pt x="0" y="0"/>
                 </a:moveTo>
                 <a:lnTo>
-                  <a:pt x="2889963" y="0"/>
-                </a:lnTo>
-                <a:lnTo>
-                  <a:pt x="2889963" y="1017156"/>
-                </a:lnTo>
-                <a:lnTo>
-                  <a:pt x="0" y="1017156"/>
+                  <a:pt x="10156534" y="0"/>
+                </a:lnTo>
+                <a:lnTo>
+                  <a:pt x="10156534" y="10156534"/>
+                </a:lnTo>
+                <a:lnTo>
+                  <a:pt x="0" y="10156534"/>
                 </a:lnTo>
                 <a:lnTo>
                   <a:pt x="0" y="0"/>
@@ -5200,21 +6387,113 @@
             </a:pathLst>
           </a:custGeom>
           <a:blipFill>
-            <a:blip r:embed="rId3"/>
+            <a:blip r:embed="rId2"/>
             <a:stretch>
-              <a:fillRect l="0" t="0" r="0" b="0"/>
+              <a:fillRect/>
             </a:stretch>
           </a:blipFill>
         </p:spPr>
       </p:sp>
+      <p:sp>
+        <p:nvSpPr>
+          <p:cNvPr id="4" name="Freeform 4"/>
+          <p:cNvSpPr/>
+          <p:nvPr/>
+        </p:nvSpPr>
+        <p:spPr>
+          <a:xfrm>
+            <a:off x="14685065" y="-4472609"/>
+            <a:ext cx="8229600" cy="8229600"/>
+          </a:xfrm>
+          <a:custGeom>
+            <a:avLst/>
+            <a:gdLst/>
+            <a:ahLst/>
+            <a:cxnLst/>
+            <a:rect l="l" t="t" r="r" b="b"/>
+            <a:pathLst>
+              <a:path w="8229600" h="8229600">
+                <a:moveTo>
+                  <a:pt x="0" y="0"/>
+                </a:moveTo>
+                <a:lnTo>
+                  <a:pt x="8229600" y="0"/>
+                </a:lnTo>
+                <a:lnTo>
+                  <a:pt x="8229600" y="8229600"/>
+                </a:lnTo>
+                <a:lnTo>
+                  <a:pt x="0" y="8229600"/>
+                </a:lnTo>
+                <a:lnTo>
+                  <a:pt x="0" y="0"/>
+                </a:lnTo>
+                <a:close/>
+              </a:path>
+            </a:pathLst>
+          </a:custGeom>
+          <a:blipFill>
+            <a:blip r:embed="rId2"/>
+            <a:stretch>
+              <a:fillRect/>
+            </a:stretch>
+          </a:blipFill>
+        </p:spPr>
+      </p:sp>
+      <p:sp>
+        <p:nvSpPr>
+          <p:cNvPr id="5" name="Freeform 5"/>
+          <p:cNvSpPr/>
+          <p:nvPr/>
+        </p:nvSpPr>
+        <p:spPr>
+          <a:xfrm>
+            <a:off x="-3956517" y="6907696"/>
+            <a:ext cx="8229600" cy="8229600"/>
+          </a:xfrm>
+          <a:custGeom>
+            <a:avLst/>
+            <a:gdLst/>
+            <a:ahLst/>
+            <a:cxnLst/>
+            <a:rect l="l" t="t" r="r" b="b"/>
+            <a:pathLst>
+              <a:path w="8229600" h="8229600">
+                <a:moveTo>
+                  <a:pt x="0" y="0"/>
+                </a:moveTo>
+                <a:lnTo>
+                  <a:pt x="8229600" y="0"/>
+                </a:lnTo>
+                <a:lnTo>
+                  <a:pt x="8229600" y="8229600"/>
+                </a:lnTo>
+                <a:lnTo>
+                  <a:pt x="0" y="8229600"/>
+                </a:lnTo>
+                <a:lnTo>
+                  <a:pt x="0" y="0"/>
+                </a:lnTo>
+                <a:close/>
+              </a:path>
+            </a:pathLst>
+          </a:custGeom>
+          <a:blipFill>
+            <a:blip r:embed="rId2"/>
+            <a:stretch>
+              <a:fillRect/>
+            </a:stretch>
+          </a:blipFill>
+        </p:spPr>
+      </p:sp>
       <p:grpSp>
         <p:nvGrpSpPr>
-          <p:cNvPr name="Group 4" id="4"/>
+          <p:cNvPr id="6" name="Group 6"/>
           <p:cNvGrpSpPr/>
           <p:nvPr/>
         </p:nvGrpSpPr>
         <p:grpSpPr>
-          <a:xfrm rot="0">
+          <a:xfrm>
             <a:off x="423065" y="1926934"/>
             <a:ext cx="17441869" cy="7971820"/>
             <a:chOff x="0" y="0"/>
@@ -5223,12 +6502,12 @@
         </p:grpSpPr>
         <p:sp>
           <p:nvSpPr>
-            <p:cNvPr name="Freeform 5" id="5"/>
+            <p:cNvPr id="7" name="Freeform 7"/>
             <p:cNvSpPr/>
             <p:nvPr/>
           </p:nvSpPr>
           <p:spPr>
-            <a:xfrm flipH="false" flipV="false" rot="0">
+            <a:xfrm>
               <a:off x="0" y="0"/>
               <a:ext cx="4593743" cy="2099574"/>
             </a:xfrm>
@@ -5237,72 +6516,78 @@
               <a:gdLst/>
               <a:ahLst/>
               <a:cxnLst/>
-              <a:rect r="r" b="b" t="t" l="l"/>
+              <a:rect l="l" t="t" r="r" b="b"/>
               <a:pathLst>
-                <a:path h="2099574" w="4593743">
+                <a:path w="4593743" h="2099574">
                   <a:moveTo>
-                    <a:pt x="7546" y="0"/>
+                    <a:pt x="16867" y="0"/>
                   </a:moveTo>
                   <a:lnTo>
-                    <a:pt x="4586198" y="0"/>
+                    <a:pt x="4576876" y="0"/>
                   </a:lnTo>
                   <a:cubicBezTo>
-                    <a:pt x="4588199" y="0"/>
-                    <a:pt x="4590118" y="795"/>
-                    <a:pt x="4591533" y="2210"/>
-                  </a:cubicBezTo>
-                  <a:cubicBezTo>
-                    <a:pt x="4592948" y="3625"/>
-                    <a:pt x="4593743" y="5545"/>
-                    <a:pt x="4593743" y="7546"/>
+                    <a:pt x="4581349" y="0"/>
+                    <a:pt x="4585640" y="1777"/>
+                    <a:pt x="4588803" y="4940"/>
+                  </a:cubicBezTo>
+                  <a:cubicBezTo>
+                    <a:pt x="4591966" y="8103"/>
+                    <a:pt x="4593743" y="12394"/>
+                    <a:pt x="4593743" y="16867"/>
                   </a:cubicBezTo>
                   <a:lnTo>
-                    <a:pt x="4593743" y="2092028"/>
+                    <a:pt x="4593743" y="2082707"/>
                   </a:lnTo>
                   <a:cubicBezTo>
-                    <a:pt x="4593743" y="2096196"/>
-                    <a:pt x="4590365" y="2099574"/>
-                    <a:pt x="4586198" y="2099574"/>
+                    <a:pt x="4593743" y="2092022"/>
+                    <a:pt x="4586192" y="2099574"/>
+                    <a:pt x="4576876" y="2099574"/>
                   </a:cubicBezTo>
                   <a:lnTo>
-                    <a:pt x="7546" y="2099574"/>
+                    <a:pt x="16867" y="2099574"/>
                   </a:lnTo>
                   <a:cubicBezTo>
-                    <a:pt x="5545" y="2099574"/>
-                    <a:pt x="3625" y="2098779"/>
-                    <a:pt x="2210" y="2097364"/>
-                  </a:cubicBezTo>
-                  <a:cubicBezTo>
-                    <a:pt x="795" y="2095949"/>
-                    <a:pt x="0" y="2094030"/>
-                    <a:pt x="0" y="2092028"/>
+                    <a:pt x="12394" y="2099574"/>
+                    <a:pt x="8103" y="2097797"/>
+                    <a:pt x="4940" y="2094634"/>
+                  </a:cubicBezTo>
+                  <a:cubicBezTo>
+                    <a:pt x="1777" y="2091471"/>
+                    <a:pt x="0" y="2087180"/>
+                    <a:pt x="0" y="2082707"/>
                   </a:cubicBezTo>
                   <a:lnTo>
-                    <a:pt x="0" y="7546"/>
+                    <a:pt x="0" y="16867"/>
                   </a:lnTo>
                   <a:cubicBezTo>
-                    <a:pt x="0" y="5545"/>
-                    <a:pt x="795" y="3625"/>
-                    <a:pt x="2210" y="2210"/>
-                  </a:cubicBezTo>
-                  <a:cubicBezTo>
-                    <a:pt x="3625" y="795"/>
-                    <a:pt x="5545" y="0"/>
-                    <a:pt x="7546" y="0"/>
+                    <a:pt x="0" y="12394"/>
+                    <a:pt x="1777" y="8103"/>
+                    <a:pt x="4940" y="4940"/>
+                  </a:cubicBezTo>
+                  <a:cubicBezTo>
+                    <a:pt x="8103" y="1777"/>
+                    <a:pt x="12394" y="0"/>
+                    <a:pt x="16867" y="0"/>
                   </a:cubicBezTo>
                   <a:close/>
                 </a:path>
               </a:pathLst>
             </a:custGeom>
-            <a:solidFill>
-              <a:srgbClr val="E7E5E5"/>
-            </a:solidFill>
+            <a:ln w="76200" cap="rnd">
+              <a:solidFill>
+                <a:srgbClr val="D1D1D1">
+                  <a:alpha val="89804"/>
+                </a:srgbClr>
+              </a:solidFill>
+              <a:prstDash val="solid"/>
+              <a:round/>
+            </a:ln>
           </p:spPr>
         </p:sp>
         <p:sp>
           <p:nvSpPr>
-            <p:cNvPr name="TextBox 6" id="6"/>
-            <p:cNvSpPr txBox="true"/>
+            <p:cNvPr id="8" name="TextBox 8"/>
+            <p:cNvSpPr txBox="1"/>
             <p:nvPr/>
           </p:nvSpPr>
           <p:spPr>
@@ -5315,26 +6600,119 @@
             </a:prstGeom>
           </p:spPr>
           <p:txBody>
-            <a:bodyPr anchor="ctr" rtlCol="false" tIns="50800" lIns="50800" bIns="50800" rIns="50800"/>
+            <a:bodyPr lIns="50800" tIns="50800" rIns="50800" bIns="50800" rtlCol="0" anchor="ctr"/>
             <a:lstStyle/>
             <a:p>
-              <a:pPr algn="ctr">
+              <a:pPr algn="just">
                 <a:lnSpc>
                   <a:spcPts val="3287"/>
                 </a:lnSpc>
               </a:pPr>
+              <a:endParaRPr/>
             </a:p>
           </p:txBody>
         </p:sp>
       </p:grpSp>
+      <p:sp>
+        <p:nvSpPr>
+          <p:cNvPr id="9" name="Freeform 9"/>
+          <p:cNvSpPr/>
+          <p:nvPr/>
+        </p:nvSpPr>
+        <p:spPr>
+          <a:xfrm>
+            <a:off x="423065" y="520122"/>
+            <a:ext cx="3850017" cy="950908"/>
+          </a:xfrm>
+          <a:custGeom>
+            <a:avLst/>
+            <a:gdLst/>
+            <a:ahLst/>
+            <a:cxnLst/>
+            <a:rect l="l" t="t" r="r" b="b"/>
+            <a:pathLst>
+              <a:path w="3850017" h="950908">
+                <a:moveTo>
+                  <a:pt x="0" y="0"/>
+                </a:moveTo>
+                <a:lnTo>
+                  <a:pt x="3850018" y="0"/>
+                </a:lnTo>
+                <a:lnTo>
+                  <a:pt x="3850018" y="950908"/>
+                </a:lnTo>
+                <a:lnTo>
+                  <a:pt x="0" y="950908"/>
+                </a:lnTo>
+                <a:lnTo>
+                  <a:pt x="0" y="0"/>
+                </a:lnTo>
+                <a:close/>
+              </a:path>
+            </a:pathLst>
+          </a:custGeom>
+          <a:blipFill>
+            <a:blip r:embed="rId3"/>
+            <a:stretch>
+              <a:fillRect/>
+            </a:stretch>
+          </a:blipFill>
+        </p:spPr>
+      </p:sp>
+      <p:sp>
+        <p:nvSpPr>
+          <p:cNvPr id="10" name="Freeform 10"/>
+          <p:cNvSpPr/>
+          <p:nvPr/>
+        </p:nvSpPr>
+        <p:spPr>
+          <a:xfrm>
+            <a:off x="14974972" y="520122"/>
+            <a:ext cx="2889962" cy="1017157"/>
+          </a:xfrm>
+          <a:custGeom>
+            <a:avLst/>
+            <a:gdLst/>
+            <a:ahLst/>
+            <a:cxnLst/>
+            <a:rect l="l" t="t" r="r" b="b"/>
+            <a:pathLst>
+              <a:path w="2889962" h="1017157">
+                <a:moveTo>
+                  <a:pt x="0" y="0"/>
+                </a:moveTo>
+                <a:lnTo>
+                  <a:pt x="2889963" y="0"/>
+                </a:lnTo>
+                <a:lnTo>
+                  <a:pt x="2889963" y="1017156"/>
+                </a:lnTo>
+                <a:lnTo>
+                  <a:pt x="0" y="1017156"/>
+                </a:lnTo>
+                <a:lnTo>
+                  <a:pt x="0" y="0"/>
+                </a:lnTo>
+                <a:close/>
+              </a:path>
+            </a:pathLst>
+          </a:custGeom>
+          <a:blipFill>
+            <a:blip r:embed="rId4"/>
+            <a:stretch>
+              <a:fillRect/>
+            </a:stretch>
+          </a:blipFill>
+        </p:spPr>
+      </p:sp>
       <p:grpSp>
         <p:nvGrpSpPr>
-          <p:cNvPr name="Group 7" id="7"/>
+          <p:cNvPr id="11" name="Group 11"/>
           <p:cNvGrpSpPr/>
           <p:nvPr/>
         </p:nvGrpSpPr>
         <p:grpSpPr>
-          <a:xfrm rot="0">
+          <a:xfrm>
             <a:off x="5440445" y="520122"/>
             <a:ext cx="7559510" cy="960907"/>
             <a:chOff x="0" y="0"/>
@@ -5343,12 +6721,12 @@
         </p:grpSpPr>
         <p:sp>
           <p:nvSpPr>
-            <p:cNvPr name="Freeform 8" id="8"/>
+            <p:cNvPr id="12" name="Freeform 12"/>
             <p:cNvSpPr/>
             <p:nvPr/>
           </p:nvSpPr>
           <p:spPr>
-            <a:xfrm flipH="false" flipV="false" rot="0">
+            <a:xfrm>
               <a:off x="0" y="0"/>
               <a:ext cx="1990982" cy="253078"/>
             </a:xfrm>
@@ -5357,9 +6735,9 @@
               <a:gdLst/>
               <a:ahLst/>
               <a:cxnLst/>
-              <a:rect r="r" b="b" t="t" l="l"/>
+              <a:rect l="l" t="t" r="r" b="b"/>
               <a:pathLst>
-                <a:path h="253078" w="1990982">
+                <a:path w="1990982" h="253078">
                   <a:moveTo>
                     <a:pt x="102413" y="0"/>
                   </a:moveTo>
@@ -5414,14 +6792,9 @@
                 </a:path>
               </a:pathLst>
             </a:custGeom>
-            <a:solidFill>
-              <a:srgbClr val="000000">
-                <a:alpha val="0"/>
-              </a:srgbClr>
-            </a:solidFill>
             <a:ln w="38100" cap="rnd">
               <a:solidFill>
-                <a:srgbClr val="303870"/>
+                <a:srgbClr val="FFFFFF"/>
               </a:solidFill>
               <a:prstDash val="solid"/>
               <a:round/>
@@ -5430,8 +6803,8 @@
         </p:sp>
         <p:sp>
           <p:nvSpPr>
-            <p:cNvPr name="TextBox 9" id="9"/>
-            <p:cNvSpPr txBox="true"/>
+            <p:cNvPr id="13" name="TextBox 13"/>
+            <p:cNvSpPr txBox="1"/>
             <p:nvPr/>
           </p:nvSpPr>
           <p:spPr>
@@ -5444,7 +6817,7 @@
             </a:prstGeom>
           </p:spPr>
           <p:txBody>
-            <a:bodyPr anchor="ctr" rtlCol="false" tIns="50800" lIns="50800" bIns="50800" rIns="50800"/>
+            <a:bodyPr lIns="50800" tIns="50800" rIns="50800" bIns="50800" rtlCol="0" anchor="ctr"/>
             <a:lstStyle/>
             <a:p>
               <a:pPr algn="ctr">
@@ -5452,27 +6825,28 @@
                   <a:spcPts val="3287"/>
                 </a:lnSpc>
               </a:pPr>
+              <a:endParaRPr/>
             </a:p>
           </p:txBody>
         </p:sp>
       </p:grpSp>
       <p:sp>
         <p:nvSpPr>
-          <p:cNvPr name="TextBox 10" id="10"/>
-          <p:cNvSpPr txBox="true"/>
+          <p:cNvPr id="14" name="TextBox 14"/>
+          <p:cNvSpPr txBox="1"/>
           <p:nvPr/>
         </p:nvSpPr>
         <p:spPr>
-          <a:xfrm rot="0">
-            <a:off x="6830675" y="634784"/>
-            <a:ext cx="4779050" cy="620711"/>
+          <a:xfrm>
+            <a:off x="6608413" y="634784"/>
+            <a:ext cx="5001312" cy="679673"/>
           </a:xfrm>
           <a:prstGeom prst="rect">
             <a:avLst/>
           </a:prstGeom>
         </p:spPr>
         <p:txBody>
-          <a:bodyPr anchor="t" rtlCol="false" tIns="0" lIns="0" bIns="0" rIns="0">
+          <a:bodyPr wrap="square" lIns="0" tIns="0" rIns="0" bIns="0" rtlCol="0" anchor="t">
             <a:spAutoFit/>
           </a:bodyPr>
           <a:lstStyle/>
@@ -5486,9 +6860,9 @@
               </a:spcBef>
             </a:pPr>
             <a:r>
-              <a:rPr lang="en-US" b="true" sz="3122" spc="171">
+              <a:rPr lang="en-US" sz="3122" b="1" spc="171" dirty="0">
                 <a:solidFill>
-                  <a:srgbClr val="000000"/>
+                  <a:srgbClr val="FFFFFF"/>
                 </a:solidFill>
                 <a:latin typeface="Nunito Bold"/>
                 <a:ea typeface="Nunito Bold"/>

--- a/public/Copy of PPT Template_1.pptx
+++ b/public/Copy of PPT Template_1.pptx
@@ -20,15 +20,23 @@
       <p:regular r:id="rId8"/>
     </p:embeddedFont>
     <p:embeddedFont>
-      <p:font typeface="Calibri" panose="020F0502020204030204" pitchFamily="34" charset="0"/>
+      <p:font typeface="Poppins" panose="020B0604020202020204" charset="0"/>
       <p:regular r:id="rId9"/>
-      <p:bold r:id="rId10"/>
-      <p:italic r:id="rId11"/>
-      <p:boldItalic r:id="rId12"/>
     </p:embeddedFont>
     <p:embeddedFont>
       <p:font typeface="Nunito" panose="020B0604020202020204" charset="0"/>
-      <p:regular r:id="rId13"/>
+      <p:regular r:id="rId10"/>
+    </p:embeddedFont>
+    <p:embeddedFont>
+      <p:font typeface="Calibri" panose="020F0502020204030204" pitchFamily="34" charset="0"/>
+      <p:regular r:id="rId11"/>
+      <p:bold r:id="rId12"/>
+      <p:italic r:id="rId13"/>
+      <p:boldItalic r:id="rId14"/>
+    </p:embeddedFont>
+    <p:embeddedFont>
+      <p:font typeface="Anonymous Pro" panose="020B0604020202020204" charset="0"/>
+      <p:regular r:id="rId15"/>
     </p:embeddedFont>
   </p:embeddedFontLst>
   <p:defaultTextStyle>
@@ -327,7 +335,7 @@
             <a:fld id="{1D8BD707-D9CF-40AE-B4C6-C98DA3205C09}" type="datetimeFigureOut">
               <a:rPr lang="en-US" smtClean="0"/>
               <a:pPr/>
-              <a:t>2/18/2026</a:t>
+              <a:t>2/20/2026</a:t>
             </a:fld>
             <a:endParaRPr lang="en-US"/>
           </a:p>
@@ -494,7 +502,7 @@
             <a:fld id="{1D8BD707-D9CF-40AE-B4C6-C98DA3205C09}" type="datetimeFigureOut">
               <a:rPr lang="en-US" smtClean="0"/>
               <a:pPr/>
-              <a:t>2/18/2026</a:t>
+              <a:t>2/20/2026</a:t>
             </a:fld>
             <a:endParaRPr lang="en-US"/>
           </a:p>
@@ -671,7 +679,7 @@
             <a:fld id="{1D8BD707-D9CF-40AE-B4C6-C98DA3205C09}" type="datetimeFigureOut">
               <a:rPr lang="en-US" smtClean="0"/>
               <a:pPr/>
-              <a:t>2/18/2026</a:t>
+              <a:t>2/20/2026</a:t>
             </a:fld>
             <a:endParaRPr lang="en-US"/>
           </a:p>
@@ -838,7 +846,7 @@
             <a:fld id="{1D8BD707-D9CF-40AE-B4C6-C98DA3205C09}" type="datetimeFigureOut">
               <a:rPr lang="en-US" smtClean="0"/>
               <a:pPr/>
-              <a:t>2/18/2026</a:t>
+              <a:t>2/20/2026</a:t>
             </a:fld>
             <a:endParaRPr lang="en-US"/>
           </a:p>
@@ -1081,7 +1089,7 @@
             <a:fld id="{1D8BD707-D9CF-40AE-B4C6-C98DA3205C09}" type="datetimeFigureOut">
               <a:rPr lang="en-US" smtClean="0"/>
               <a:pPr/>
-              <a:t>2/18/2026</a:t>
+              <a:t>2/20/2026</a:t>
             </a:fld>
             <a:endParaRPr lang="en-US"/>
           </a:p>
@@ -1366,7 +1374,7 @@
             <a:fld id="{1D8BD707-D9CF-40AE-B4C6-C98DA3205C09}" type="datetimeFigureOut">
               <a:rPr lang="en-US" smtClean="0"/>
               <a:pPr/>
-              <a:t>2/18/2026</a:t>
+              <a:t>2/20/2026</a:t>
             </a:fld>
             <a:endParaRPr lang="en-US"/>
           </a:p>
@@ -1785,7 +1793,7 @@
             <a:fld id="{1D8BD707-D9CF-40AE-B4C6-C98DA3205C09}" type="datetimeFigureOut">
               <a:rPr lang="en-US" smtClean="0"/>
               <a:pPr/>
-              <a:t>2/18/2026</a:t>
+              <a:t>2/20/2026</a:t>
             </a:fld>
             <a:endParaRPr lang="en-US"/>
           </a:p>
@@ -1900,7 +1908,7 @@
             <a:fld id="{1D8BD707-D9CF-40AE-B4C6-C98DA3205C09}" type="datetimeFigureOut">
               <a:rPr lang="en-US" smtClean="0"/>
               <a:pPr/>
-              <a:t>2/18/2026</a:t>
+              <a:t>2/20/2026</a:t>
             </a:fld>
             <a:endParaRPr lang="en-US"/>
           </a:p>
@@ -1992,7 +2000,7 @@
             <a:fld id="{1D8BD707-D9CF-40AE-B4C6-C98DA3205C09}" type="datetimeFigureOut">
               <a:rPr lang="en-US" smtClean="0"/>
               <a:pPr/>
-              <a:t>2/18/2026</a:t>
+              <a:t>2/20/2026</a:t>
             </a:fld>
             <a:endParaRPr lang="en-US"/>
           </a:p>
@@ -2266,7 +2274,7 @@
             <a:fld id="{1D8BD707-D9CF-40AE-B4C6-C98DA3205C09}" type="datetimeFigureOut">
               <a:rPr lang="en-US" smtClean="0"/>
               <a:pPr/>
-              <a:t>2/18/2026</a:t>
+              <a:t>2/20/2026</a:t>
             </a:fld>
             <a:endParaRPr lang="en-US"/>
           </a:p>
@@ -2516,7 +2524,7 @@
             <a:fld id="{1D8BD707-D9CF-40AE-B4C6-C98DA3205C09}" type="datetimeFigureOut">
               <a:rPr lang="en-US" smtClean="0"/>
               <a:pPr/>
-              <a:t>2/18/2026</a:t>
+              <a:t>2/20/2026</a:t>
             </a:fld>
             <a:endParaRPr lang="en-US"/>
           </a:p>
@@ -2726,7 +2734,7 @@
             <a:fld id="{1D8BD707-D9CF-40AE-B4C6-C98DA3205C09}" type="datetimeFigureOut">
               <a:rPr lang="en-US" smtClean="0"/>
               <a:pPr/>
-              <a:t>2/18/2026</a:t>
+              <a:t>2/20/2026</a:t>
             </a:fld>
             <a:endParaRPr lang="en-US"/>
           </a:p>
@@ -3083,14 +3091,6 @@
 <file path=ppt/slides/slide1.xml><?xml version="1.0" encoding="utf-8"?>
 <p:sld xmlns:a="http://schemas.openxmlformats.org/drawingml/2006/main" xmlns:r="http://schemas.openxmlformats.org/officeDocument/2006/relationships" xmlns:p="http://schemas.openxmlformats.org/presentationml/2006/main">
   <p:cSld>
-    <p:bg>
-      <p:bgPr>
-        <a:solidFill>
-          <a:srgbClr val="000000"/>
-        </a:solidFill>
-        <a:effectLst/>
-      </p:bgPr>
-    </p:bg>
     <p:spTree>
       <p:nvGrpSpPr>
         <p:cNvPr id="1" name=""/>
@@ -3113,8 +3113,8 @@
         </p:nvSpPr>
         <p:spPr>
           <a:xfrm>
-            <a:off x="-3383650" y="-2941320"/>
-            <a:ext cx="8824700" cy="8824700"/>
+            <a:off x="0" y="0"/>
+            <a:ext cx="18288000" cy="10287000"/>
           </a:xfrm>
           <a:custGeom>
             <a:avLst/>
@@ -3123,18 +3123,18 @@
             <a:cxnLst/>
             <a:rect l="l" t="t" r="r" b="b"/>
             <a:pathLst>
-              <a:path w="8824700" h="8824700">
+              <a:path w="18288000" h="10287000">
                 <a:moveTo>
                   <a:pt x="0" y="0"/>
                 </a:moveTo>
                 <a:lnTo>
-                  <a:pt x="8824700" y="0"/>
-                </a:lnTo>
-                <a:lnTo>
-                  <a:pt x="8824700" y="8824699"/>
-                </a:lnTo>
-                <a:lnTo>
-                  <a:pt x="0" y="8824699"/>
+                  <a:pt x="18288000" y="0"/>
+                </a:lnTo>
+                <a:lnTo>
+                  <a:pt x="18288000" y="10287000"/>
+                </a:lnTo>
+                <a:lnTo>
+                  <a:pt x="0" y="10287000"/>
                 </a:lnTo>
                 <a:lnTo>
                   <a:pt x="0" y="0"/>
@@ -3146,149 +3146,148 @@
           <a:blipFill>
             <a:blip r:embed="rId2"/>
             <a:stretch>
-              <a:fillRect/>
+              <a:fillRect t="-10929" b="-10929"/>
             </a:stretch>
           </a:blipFill>
         </p:spPr>
       </p:sp>
-      <p:sp>
-        <p:nvSpPr>
-          <p:cNvPr id="3" name="Freeform 3"/>
-          <p:cNvSpPr/>
+      <p:grpSp>
+        <p:nvGrpSpPr>
+          <p:cNvPr id="3" name="Group 3"/>
+          <p:cNvGrpSpPr/>
           <p:nvPr/>
-        </p:nvSpPr>
-        <p:spPr>
+        </p:nvGrpSpPr>
+        <p:grpSpPr>
           <a:xfrm>
-            <a:off x="11888339" y="2758109"/>
-            <a:ext cx="10156534" cy="10156534"/>
+            <a:off x="423065" y="2473586"/>
+            <a:ext cx="17441869" cy="7425168"/>
+            <a:chOff x="0" y="0"/>
+            <a:chExt cx="4593743" cy="1955600"/>
           </a:xfrm>
-          <a:custGeom>
-            <a:avLst/>
-            <a:gdLst/>
-            <a:ahLst/>
-            <a:cxnLst/>
-            <a:rect l="l" t="t" r="r" b="b"/>
-            <a:pathLst>
-              <a:path w="10156534" h="10156534">
-                <a:moveTo>
-                  <a:pt x="0" y="0"/>
-                </a:moveTo>
-                <a:lnTo>
-                  <a:pt x="10156534" y="0"/>
-                </a:lnTo>
-                <a:lnTo>
-                  <a:pt x="10156534" y="10156534"/>
-                </a:lnTo>
-                <a:lnTo>
-                  <a:pt x="0" y="10156534"/>
-                </a:lnTo>
-                <a:lnTo>
-                  <a:pt x="0" y="0"/>
-                </a:lnTo>
-                <a:close/>
-              </a:path>
-            </a:pathLst>
-          </a:custGeom>
-          <a:blipFill>
-            <a:blip r:embed="rId2"/>
-            <a:stretch>
-              <a:fillRect/>
-            </a:stretch>
-          </a:blipFill>
-        </p:spPr>
-      </p:sp>
-      <p:sp>
-        <p:nvSpPr>
-          <p:cNvPr id="4" name="Freeform 4"/>
-          <p:cNvSpPr/>
-          <p:nvPr/>
-        </p:nvSpPr>
-        <p:spPr>
-          <a:xfrm>
-            <a:off x="14685065" y="-4472609"/>
-            <a:ext cx="8229600" cy="8229600"/>
-          </a:xfrm>
-          <a:custGeom>
-            <a:avLst/>
-            <a:gdLst/>
-            <a:ahLst/>
-            <a:cxnLst/>
-            <a:rect l="l" t="t" r="r" b="b"/>
-            <a:pathLst>
-              <a:path w="8229600" h="8229600">
-                <a:moveTo>
-                  <a:pt x="0" y="0"/>
-                </a:moveTo>
-                <a:lnTo>
-                  <a:pt x="8229600" y="0"/>
-                </a:lnTo>
-                <a:lnTo>
-                  <a:pt x="8229600" y="8229600"/>
-                </a:lnTo>
-                <a:lnTo>
-                  <a:pt x="0" y="8229600"/>
-                </a:lnTo>
-                <a:lnTo>
-                  <a:pt x="0" y="0"/>
-                </a:lnTo>
-                <a:close/>
-              </a:path>
-            </a:pathLst>
-          </a:custGeom>
-          <a:blipFill>
-            <a:blip r:embed="rId2"/>
-            <a:stretch>
-              <a:fillRect/>
-            </a:stretch>
-          </a:blipFill>
-        </p:spPr>
-      </p:sp>
-      <p:sp>
-        <p:nvSpPr>
-          <p:cNvPr id="5" name="Freeform 5"/>
-          <p:cNvSpPr/>
-          <p:nvPr/>
-        </p:nvSpPr>
-        <p:spPr>
-          <a:xfrm>
-            <a:off x="-3956517" y="6907696"/>
-            <a:ext cx="8229600" cy="8229600"/>
-          </a:xfrm>
-          <a:custGeom>
-            <a:avLst/>
-            <a:gdLst/>
-            <a:ahLst/>
-            <a:cxnLst/>
-            <a:rect l="l" t="t" r="r" b="b"/>
-            <a:pathLst>
-              <a:path w="8229600" h="8229600">
-                <a:moveTo>
-                  <a:pt x="0" y="0"/>
-                </a:moveTo>
-                <a:lnTo>
-                  <a:pt x="8229600" y="0"/>
-                </a:lnTo>
-                <a:lnTo>
-                  <a:pt x="8229600" y="8229600"/>
-                </a:lnTo>
-                <a:lnTo>
-                  <a:pt x="0" y="8229600"/>
-                </a:lnTo>
-                <a:lnTo>
-                  <a:pt x="0" y="0"/>
-                </a:lnTo>
-                <a:close/>
-              </a:path>
-            </a:pathLst>
-          </a:custGeom>
-          <a:blipFill>
-            <a:blip r:embed="rId2"/>
-            <a:stretch>
-              <a:fillRect/>
-            </a:stretch>
-          </a:blipFill>
-        </p:spPr>
-      </p:sp>
+        </p:grpSpPr>
+        <p:sp>
+          <p:nvSpPr>
+            <p:cNvPr id="4" name="Freeform 4"/>
+            <p:cNvSpPr/>
+            <p:nvPr/>
+          </p:nvSpPr>
+          <p:spPr>
+            <a:xfrm>
+              <a:off x="0" y="0"/>
+              <a:ext cx="4593743" cy="1955600"/>
+            </a:xfrm>
+            <a:custGeom>
+              <a:avLst/>
+              <a:gdLst/>
+              <a:ahLst/>
+              <a:cxnLst/>
+              <a:rect l="l" t="t" r="r" b="b"/>
+              <a:pathLst>
+                <a:path w="4593743" h="1955600">
+                  <a:moveTo>
+                    <a:pt x="7546" y="0"/>
+                  </a:moveTo>
+                  <a:lnTo>
+                    <a:pt x="4586198" y="0"/>
+                  </a:lnTo>
+                  <a:cubicBezTo>
+                    <a:pt x="4588199" y="0"/>
+                    <a:pt x="4590118" y="795"/>
+                    <a:pt x="4591533" y="2210"/>
+                  </a:cubicBezTo>
+                  <a:cubicBezTo>
+                    <a:pt x="4592948" y="3625"/>
+                    <a:pt x="4593743" y="5545"/>
+                    <a:pt x="4593743" y="7546"/>
+                  </a:cubicBezTo>
+                  <a:lnTo>
+                    <a:pt x="4593743" y="1948054"/>
+                  </a:lnTo>
+                  <a:cubicBezTo>
+                    <a:pt x="4593743" y="1950055"/>
+                    <a:pt x="4592948" y="1951975"/>
+                    <a:pt x="4591533" y="1953390"/>
+                  </a:cubicBezTo>
+                  <a:cubicBezTo>
+                    <a:pt x="4590118" y="1954805"/>
+                    <a:pt x="4588199" y="1955600"/>
+                    <a:pt x="4586198" y="1955600"/>
+                  </a:cubicBezTo>
+                  <a:lnTo>
+                    <a:pt x="7546" y="1955600"/>
+                  </a:lnTo>
+                  <a:cubicBezTo>
+                    <a:pt x="5545" y="1955600"/>
+                    <a:pt x="3625" y="1954805"/>
+                    <a:pt x="2210" y="1953390"/>
+                  </a:cubicBezTo>
+                  <a:cubicBezTo>
+                    <a:pt x="795" y="1951975"/>
+                    <a:pt x="0" y="1950055"/>
+                    <a:pt x="0" y="1948054"/>
+                  </a:cubicBezTo>
+                  <a:lnTo>
+                    <a:pt x="0" y="7546"/>
+                  </a:lnTo>
+                  <a:cubicBezTo>
+                    <a:pt x="0" y="5545"/>
+                    <a:pt x="795" y="3625"/>
+                    <a:pt x="2210" y="2210"/>
+                  </a:cubicBezTo>
+                  <a:cubicBezTo>
+                    <a:pt x="3625" y="795"/>
+                    <a:pt x="5545" y="0"/>
+                    <a:pt x="7546" y="0"/>
+                  </a:cubicBezTo>
+                  <a:close/>
+                </a:path>
+              </a:pathLst>
+            </a:custGeom>
+            <a:solidFill>
+              <a:srgbClr val="7B7B7B">
+                <a:alpha val="89804"/>
+              </a:srgbClr>
+            </a:solidFill>
+            <a:ln w="38100" cap="sq">
+              <a:solidFill>
+                <a:srgbClr val="D1D1D1">
+                  <a:alpha val="89804"/>
+                </a:srgbClr>
+              </a:solidFill>
+              <a:prstDash val="solid"/>
+              <a:miter/>
+            </a:ln>
+          </p:spPr>
+        </p:sp>
+        <p:sp>
+          <p:nvSpPr>
+            <p:cNvPr id="5" name="TextBox 5"/>
+            <p:cNvSpPr txBox="1"/>
+            <p:nvPr/>
+          </p:nvSpPr>
+          <p:spPr>
+            <a:xfrm>
+              <a:off x="0" y="-95250"/>
+              <a:ext cx="4593743" cy="2050850"/>
+            </a:xfrm>
+            <a:prstGeom prst="rect">
+              <a:avLst/>
+            </a:prstGeom>
+          </p:spPr>
+          <p:txBody>
+            <a:bodyPr lIns="50800" tIns="50800" rIns="50800" bIns="50800" rtlCol="0" anchor="ctr"/>
+            <a:lstStyle/>
+            <a:p>
+              <a:pPr algn="just">
+                <a:lnSpc>
+                  <a:spcPts val="3287"/>
+                </a:lnSpc>
+              </a:pPr>
+              <a:endParaRPr/>
+            </a:p>
+          </p:txBody>
+        </p:sp>
+      </p:grpSp>
       <p:sp>
         <p:nvSpPr>
           <p:cNvPr id="6" name="Freeform 6"/>
@@ -3297,7 +3296,7 @@
         </p:nvSpPr>
         <p:spPr>
           <a:xfrm>
-            <a:off x="423065" y="520122"/>
+            <a:off x="14014917" y="553246"/>
             <a:ext cx="3850017" cy="950908"/>
           </a:xfrm>
           <a:custGeom>
@@ -3343,8 +3342,8 @@
         </p:nvSpPr>
         <p:spPr>
           <a:xfrm>
-            <a:off x="6449961" y="202204"/>
-            <a:ext cx="5905938" cy="2078665"/>
+            <a:off x="6404340" y="323042"/>
+            <a:ext cx="5479320" cy="1928512"/>
           </a:xfrm>
           <a:custGeom>
             <a:avLst/>
@@ -3353,18 +3352,18 @@
             <a:cxnLst/>
             <a:rect l="l" t="t" r="r" b="b"/>
             <a:pathLst>
-              <a:path w="5905938" h="2078665">
+              <a:path w="5479320" h="1928512">
                 <a:moveTo>
                   <a:pt x="0" y="0"/>
                 </a:moveTo>
                 <a:lnTo>
-                  <a:pt x="5905938" y="0"/>
-                </a:lnTo>
-                <a:lnTo>
-                  <a:pt x="5905938" y="2078665"/>
-                </a:lnTo>
-                <a:lnTo>
-                  <a:pt x="0" y="2078665"/>
+                  <a:pt x="5479320" y="0"/>
+                </a:lnTo>
+                <a:lnTo>
+                  <a:pt x="5479320" y="1928512"/>
+                </a:lnTo>
+                <a:lnTo>
+                  <a:pt x="0" y="1928512"/>
                 </a:lnTo>
                 <a:lnTo>
                   <a:pt x="0" y="0"/>
@@ -3389,8 +3388,8 @@
         </p:nvSpPr>
         <p:spPr>
           <a:xfrm>
-            <a:off x="722728" y="2468089"/>
-            <a:ext cx="9340329" cy="7848302"/>
+            <a:off x="646696" y="2565354"/>
+            <a:ext cx="11850104" cy="7848302"/>
           </a:xfrm>
           <a:prstGeom prst="rect">
             <a:avLst/>
@@ -3640,16 +3639,163 @@
           </a:p>
         </p:txBody>
       </p:sp>
-      <p:sp>
-        <p:nvSpPr>
-          <p:cNvPr id="9" name="Freeform 9"/>
+      <p:grpSp>
+        <p:nvGrpSpPr>
+          <p:cNvPr id="9" name="Group 9"/>
+          <p:cNvGrpSpPr/>
+          <p:nvPr/>
+        </p:nvGrpSpPr>
+        <p:grpSpPr>
+          <a:xfrm>
+            <a:off x="423065" y="402611"/>
+            <a:ext cx="5306204" cy="1252179"/>
+            <a:chOff x="0" y="0"/>
+            <a:chExt cx="7074938" cy="1669572"/>
+          </a:xfrm>
+        </p:grpSpPr>
+        <p:sp>
+          <p:nvSpPr>
+            <p:cNvPr id="10" name="TextBox 10"/>
+            <p:cNvSpPr txBox="1"/>
+            <p:nvPr/>
+          </p:nvSpPr>
+          <p:spPr>
+            <a:xfrm>
+              <a:off x="0" y="-238125"/>
+              <a:ext cx="1841576" cy="1907697"/>
+            </a:xfrm>
+            <a:prstGeom prst="rect">
+              <a:avLst/>
+            </a:prstGeom>
+          </p:spPr>
+          <p:txBody>
+            <a:bodyPr lIns="0" tIns="0" rIns="0" bIns="0" rtlCol="0" anchor="t">
+              <a:spAutoFit/>
+            </a:bodyPr>
+            <a:lstStyle/>
+            <a:p>
+              <a:pPr algn="just">
+                <a:lnSpc>
+                  <a:spcPts val="11519"/>
+                </a:lnSpc>
+                <a:spcBef>
+                  <a:spcPct val="0"/>
+                </a:spcBef>
+              </a:pPr>
+              <a:r>
+                <a:rPr lang="en-US" sz="8227">
+                  <a:solidFill>
+                    <a:srgbClr val="EFEBEB"/>
+                  </a:solidFill>
+                  <a:latin typeface="Poppins"/>
+                  <a:ea typeface="Poppins"/>
+                  <a:cs typeface="Poppins"/>
+                  <a:sym typeface="Poppins"/>
+                </a:rPr>
+                <a:t>&lt;&gt;</a:t>
+              </a:r>
+            </a:p>
+          </p:txBody>
+        </p:sp>
+        <p:sp>
+          <p:nvSpPr>
+            <p:cNvPr id="11" name="TextBox 11"/>
+            <p:cNvSpPr txBox="1"/>
+            <p:nvPr/>
+          </p:nvSpPr>
+          <p:spPr>
+            <a:xfrm>
+              <a:off x="1580373" y="367870"/>
+              <a:ext cx="5494565" cy="886207"/>
+            </a:xfrm>
+            <a:prstGeom prst="rect">
+              <a:avLst/>
+            </a:prstGeom>
+          </p:spPr>
+          <p:txBody>
+            <a:bodyPr lIns="0" tIns="0" rIns="0" bIns="0" rtlCol="0" anchor="t">
+              <a:spAutoFit/>
+            </a:bodyPr>
+            <a:lstStyle/>
+            <a:p>
+              <a:pPr algn="just">
+                <a:lnSpc>
+                  <a:spcPts val="2663"/>
+                </a:lnSpc>
+              </a:pPr>
+              <a:r>
+                <a:rPr lang="en-US" sz="1902">
+                  <a:solidFill>
+                    <a:srgbClr val="EFEBEB"/>
+                  </a:solidFill>
+                  <a:latin typeface="Anonymous Pro"/>
+                  <a:ea typeface="Anonymous Pro"/>
+                  <a:cs typeface="Anonymous Pro"/>
+                  <a:sym typeface="Anonymous Pro"/>
+                </a:rPr>
+                <a:t>Developer Student Community</a:t>
+              </a:r>
+            </a:p>
+            <a:p>
+              <a:pPr algn="just">
+                <a:lnSpc>
+                  <a:spcPts val="2714"/>
+                </a:lnSpc>
+                <a:spcBef>
+                  <a:spcPct val="0"/>
+                </a:spcBef>
+              </a:pPr>
+              <a:r>
+                <a:rPr lang="en-US" sz="1938">
+                  <a:solidFill>
+                    <a:srgbClr val="EFEBEB"/>
+                  </a:solidFill>
+                  <a:latin typeface="Anonymous Pro"/>
+                  <a:ea typeface="Anonymous Pro"/>
+                  <a:cs typeface="Anonymous Pro"/>
+                  <a:sym typeface="Anonymous Pro"/>
+                </a:rPr>
+                <a:t>SVCE</a:t>
+              </a:r>
+            </a:p>
+          </p:txBody>
+        </p:sp>
+      </p:grpSp>
+    </p:spTree>
+  </p:cSld>
+  <p:clrMapOvr>
+    <a:masterClrMapping/>
+  </p:clrMapOvr>
+</p:sld>
+</file>
+
+<file path=ppt/slides/slide2.xml><?xml version="1.0" encoding="utf-8"?>
+<p:sld xmlns:a="http://schemas.openxmlformats.org/drawingml/2006/main" xmlns:r="http://schemas.openxmlformats.org/officeDocument/2006/relationships" xmlns:p="http://schemas.openxmlformats.org/presentationml/2006/main">
+  <p:cSld>
+    <p:spTree>
+      <p:nvGrpSpPr>
+        <p:cNvPr id="1" name=""/>
+        <p:cNvGrpSpPr/>
+        <p:nvPr/>
+      </p:nvGrpSpPr>
+      <p:grpSpPr>
+        <a:xfrm>
+          <a:off x="0" y="0"/>
+          <a:ext cx="0" cy="0"/>
+          <a:chOff x="0" y="0"/>
+          <a:chExt cx="0" cy="0"/>
+        </a:xfrm>
+      </p:grpSpPr>
+      <p:sp>
+        <p:nvSpPr>
+          <p:cNvPr id="2" name="Freeform 2"/>
           <p:cNvSpPr/>
           <p:nvPr/>
         </p:nvSpPr>
         <p:spPr>
           <a:xfrm>
-            <a:off x="14045835" y="335805"/>
-            <a:ext cx="3680010" cy="1030450"/>
+            <a:off x="0" y="0"/>
+            <a:ext cx="18288000" cy="10287000"/>
           </a:xfrm>
           <a:custGeom>
             <a:avLst/>
@@ -3658,18 +3804,18 @@
             <a:cxnLst/>
             <a:rect l="l" t="t" r="r" b="b"/>
             <a:pathLst>
-              <a:path w="3680010" h="1030450">
+              <a:path w="18288000" h="10287000">
                 <a:moveTo>
                   <a:pt x="0" y="0"/>
                 </a:moveTo>
                 <a:lnTo>
-                  <a:pt x="3680010" y="0"/>
-                </a:lnTo>
-                <a:lnTo>
-                  <a:pt x="3680010" y="1030450"/>
-                </a:lnTo>
-                <a:lnTo>
-                  <a:pt x="0" y="1030450"/>
+                  <a:pt x="18288000" y="0"/>
+                </a:lnTo>
+                <a:lnTo>
+                  <a:pt x="18288000" y="10287000"/>
+                </a:lnTo>
+                <a:lnTo>
+                  <a:pt x="0" y="10287000"/>
                 </a:lnTo>
                 <a:lnTo>
                   <a:pt x="0" y="0"/>
@@ -3679,73 +3825,22 @@
             </a:pathLst>
           </a:custGeom>
           <a:blipFill>
-            <a:blip r:embed="rId5"/>
+            <a:blip r:embed="rId2"/>
             <a:stretch>
-              <a:fillRect l="-5824" t="-119570" r="-642" b="-160652"/>
-            </a:stretch>
-          </a:blipFill>
-          <a:ln cap="sq">
-            <a:noFill/>
-            <a:prstDash val="solid"/>
-            <a:miter/>
-          </a:ln>
-        </p:spPr>
-      </p:sp>
-      <p:sp>
-        <p:nvSpPr>
-          <p:cNvPr id="10" name="Freeform 10"/>
-          <p:cNvSpPr/>
-          <p:nvPr/>
-        </p:nvSpPr>
-        <p:spPr>
-          <a:xfrm>
-            <a:off x="14017260" y="1154195"/>
-            <a:ext cx="3821029" cy="633670"/>
-          </a:xfrm>
-          <a:custGeom>
-            <a:avLst/>
-            <a:gdLst/>
-            <a:ahLst/>
-            <a:cxnLst/>
-            <a:rect l="l" t="t" r="r" b="b"/>
-            <a:pathLst>
-              <a:path w="3821029" h="633670">
-                <a:moveTo>
-                  <a:pt x="0" y="0"/>
-                </a:moveTo>
-                <a:lnTo>
-                  <a:pt x="3821029" y="0"/>
-                </a:lnTo>
-                <a:lnTo>
-                  <a:pt x="3821029" y="633669"/>
-                </a:lnTo>
-                <a:lnTo>
-                  <a:pt x="0" y="633669"/>
-                </a:lnTo>
-                <a:lnTo>
-                  <a:pt x="0" y="0"/>
-                </a:lnTo>
-                <a:close/>
-              </a:path>
-            </a:pathLst>
-          </a:custGeom>
-          <a:blipFill>
-            <a:blip r:embed="rId5"/>
-            <a:stretch>
-              <a:fillRect l="-4000" t="-343124" b="-184000"/>
+              <a:fillRect t="-10929" b="-10929"/>
             </a:stretch>
           </a:blipFill>
         </p:spPr>
       </p:sp>
       <p:grpSp>
         <p:nvGrpSpPr>
-          <p:cNvPr id="11" name="Group 11"/>
+          <p:cNvPr id="3" name="Group 3"/>
           <p:cNvGrpSpPr/>
           <p:nvPr/>
         </p:nvGrpSpPr>
         <p:grpSpPr>
           <a:xfrm>
-            <a:off x="413540" y="2174584"/>
+            <a:off x="423065" y="1926934"/>
             <a:ext cx="17441869" cy="7971820"/>
             <a:chOff x="0" y="0"/>
             <a:chExt cx="4593743" cy="2099574"/>
@@ -3753,7 +3848,7 @@
         </p:grpSpPr>
         <p:sp>
           <p:nvSpPr>
-            <p:cNvPr id="12" name="Freeform 12"/>
+            <p:cNvPr id="4" name="Freeform 4"/>
             <p:cNvSpPr/>
             <p:nvPr/>
           </p:nvSpPr>
@@ -3771,73 +3866,78 @@
               <a:pathLst>
                 <a:path w="4593743" h="2099574">
                   <a:moveTo>
-                    <a:pt x="16867" y="0"/>
+                    <a:pt x="7546" y="0"/>
                   </a:moveTo>
                   <a:lnTo>
-                    <a:pt x="4576876" y="0"/>
+                    <a:pt x="4586198" y="0"/>
                   </a:lnTo>
                   <a:cubicBezTo>
-                    <a:pt x="4581349" y="0"/>
-                    <a:pt x="4585640" y="1777"/>
-                    <a:pt x="4588803" y="4940"/>
-                  </a:cubicBezTo>
-                  <a:cubicBezTo>
-                    <a:pt x="4591966" y="8103"/>
-                    <a:pt x="4593743" y="12394"/>
-                    <a:pt x="4593743" y="16867"/>
+                    <a:pt x="4588199" y="0"/>
+                    <a:pt x="4590118" y="795"/>
+                    <a:pt x="4591533" y="2210"/>
+                  </a:cubicBezTo>
+                  <a:cubicBezTo>
+                    <a:pt x="4592948" y="3625"/>
+                    <a:pt x="4593743" y="5545"/>
+                    <a:pt x="4593743" y="7546"/>
                   </a:cubicBezTo>
                   <a:lnTo>
-                    <a:pt x="4593743" y="2082707"/>
+                    <a:pt x="4593743" y="2092028"/>
                   </a:lnTo>
                   <a:cubicBezTo>
-                    <a:pt x="4593743" y="2092022"/>
-                    <a:pt x="4586192" y="2099574"/>
-                    <a:pt x="4576876" y="2099574"/>
+                    <a:pt x="4593743" y="2096196"/>
+                    <a:pt x="4590365" y="2099574"/>
+                    <a:pt x="4586198" y="2099574"/>
                   </a:cubicBezTo>
                   <a:lnTo>
-                    <a:pt x="16867" y="2099574"/>
+                    <a:pt x="7546" y="2099574"/>
                   </a:lnTo>
                   <a:cubicBezTo>
-                    <a:pt x="12394" y="2099574"/>
-                    <a:pt x="8103" y="2097797"/>
-                    <a:pt x="4940" y="2094634"/>
-                  </a:cubicBezTo>
-                  <a:cubicBezTo>
-                    <a:pt x="1777" y="2091471"/>
-                    <a:pt x="0" y="2087180"/>
-                    <a:pt x="0" y="2082707"/>
+                    <a:pt x="5545" y="2099574"/>
+                    <a:pt x="3625" y="2098779"/>
+                    <a:pt x="2210" y="2097364"/>
+                  </a:cubicBezTo>
+                  <a:cubicBezTo>
+                    <a:pt x="795" y="2095949"/>
+                    <a:pt x="0" y="2094030"/>
+                    <a:pt x="0" y="2092028"/>
                   </a:cubicBezTo>
                   <a:lnTo>
-                    <a:pt x="0" y="16867"/>
+                    <a:pt x="0" y="7546"/>
                   </a:lnTo>
                   <a:cubicBezTo>
-                    <a:pt x="0" y="12394"/>
-                    <a:pt x="1777" y="8103"/>
-                    <a:pt x="4940" y="4940"/>
-                  </a:cubicBezTo>
-                  <a:cubicBezTo>
-                    <a:pt x="8103" y="1777"/>
-                    <a:pt x="12394" y="0"/>
-                    <a:pt x="16867" y="0"/>
+                    <a:pt x="0" y="5545"/>
+                    <a:pt x="795" y="3625"/>
+                    <a:pt x="2210" y="2210"/>
+                  </a:cubicBezTo>
+                  <a:cubicBezTo>
+                    <a:pt x="3625" y="795"/>
+                    <a:pt x="5545" y="0"/>
+                    <a:pt x="7546" y="0"/>
                   </a:cubicBezTo>
                   <a:close/>
                 </a:path>
               </a:pathLst>
             </a:custGeom>
-            <a:ln w="76200" cap="rnd">
+            <a:solidFill>
+              <a:srgbClr val="7B7B7B">
+                <a:alpha val="89804"/>
+              </a:srgbClr>
+            </a:solidFill>
+            <a:ln w="38100" cap="sq">
               <a:solidFill>
                 <a:srgbClr val="D1D1D1">
                   <a:alpha val="89804"/>
                 </a:srgbClr>
               </a:solidFill>
               <a:prstDash val="solid"/>
-              <a:round/>
+              <a:miter/>
             </a:ln>
           </p:spPr>
         </p:sp>
         <p:sp>
           <p:nvSpPr>
-            <p:cNvPr id="13" name="TextBox 13"/>
+            <p:cNvPr id="5" name="TextBox 5"/>
             <p:cNvSpPr txBox="1"/>
             <p:nvPr/>
           </p:nvSpPr>
@@ -3864,223 +3964,6 @@
           </p:txBody>
         </p:sp>
       </p:grpSp>
-    </p:spTree>
-  </p:cSld>
-  <p:clrMapOvr>
-    <a:masterClrMapping/>
-  </p:clrMapOvr>
-</p:sld>
-</file>
-
-<file path=ppt/slides/slide2.xml><?xml version="1.0" encoding="utf-8"?>
-<p:sld xmlns:a="http://schemas.openxmlformats.org/drawingml/2006/main" xmlns:r="http://schemas.openxmlformats.org/officeDocument/2006/relationships" xmlns:p="http://schemas.openxmlformats.org/presentationml/2006/main">
-  <p:cSld>
-    <p:bg>
-      <p:bgPr>
-        <a:solidFill>
-          <a:srgbClr val="000000"/>
-        </a:solidFill>
-        <a:effectLst/>
-      </p:bgPr>
-    </p:bg>
-    <p:spTree>
-      <p:nvGrpSpPr>
-        <p:cNvPr id="1" name=""/>
-        <p:cNvGrpSpPr/>
-        <p:nvPr/>
-      </p:nvGrpSpPr>
-      <p:grpSpPr>
-        <a:xfrm>
-          <a:off x="0" y="0"/>
-          <a:ext cx="0" cy="0"/>
-          <a:chOff x="0" y="0"/>
-          <a:chExt cx="0" cy="0"/>
-        </a:xfrm>
-      </p:grpSpPr>
-      <p:sp>
-        <p:nvSpPr>
-          <p:cNvPr id="2" name="Freeform 2"/>
-          <p:cNvSpPr/>
-          <p:nvPr/>
-        </p:nvSpPr>
-        <p:spPr>
-          <a:xfrm>
-            <a:off x="-3383650" y="-2941320"/>
-            <a:ext cx="8824700" cy="8824700"/>
-          </a:xfrm>
-          <a:custGeom>
-            <a:avLst/>
-            <a:gdLst/>
-            <a:ahLst/>
-            <a:cxnLst/>
-            <a:rect l="l" t="t" r="r" b="b"/>
-            <a:pathLst>
-              <a:path w="8824700" h="8824700">
-                <a:moveTo>
-                  <a:pt x="0" y="0"/>
-                </a:moveTo>
-                <a:lnTo>
-                  <a:pt x="8824700" y="0"/>
-                </a:lnTo>
-                <a:lnTo>
-                  <a:pt x="8824700" y="8824699"/>
-                </a:lnTo>
-                <a:lnTo>
-                  <a:pt x="0" y="8824699"/>
-                </a:lnTo>
-                <a:lnTo>
-                  <a:pt x="0" y="0"/>
-                </a:lnTo>
-                <a:close/>
-              </a:path>
-            </a:pathLst>
-          </a:custGeom>
-          <a:blipFill>
-            <a:blip r:embed="rId2"/>
-            <a:stretch>
-              <a:fillRect/>
-            </a:stretch>
-          </a:blipFill>
-        </p:spPr>
-      </p:sp>
-      <p:sp>
-        <p:nvSpPr>
-          <p:cNvPr id="3" name="Freeform 3"/>
-          <p:cNvSpPr/>
-          <p:nvPr/>
-        </p:nvSpPr>
-        <p:spPr>
-          <a:xfrm>
-            <a:off x="11888339" y="2758109"/>
-            <a:ext cx="10156534" cy="10156534"/>
-          </a:xfrm>
-          <a:custGeom>
-            <a:avLst/>
-            <a:gdLst/>
-            <a:ahLst/>
-            <a:cxnLst/>
-            <a:rect l="l" t="t" r="r" b="b"/>
-            <a:pathLst>
-              <a:path w="10156534" h="10156534">
-                <a:moveTo>
-                  <a:pt x="0" y="0"/>
-                </a:moveTo>
-                <a:lnTo>
-                  <a:pt x="10156534" y="0"/>
-                </a:lnTo>
-                <a:lnTo>
-                  <a:pt x="10156534" y="10156534"/>
-                </a:lnTo>
-                <a:lnTo>
-                  <a:pt x="0" y="10156534"/>
-                </a:lnTo>
-                <a:lnTo>
-                  <a:pt x="0" y="0"/>
-                </a:lnTo>
-                <a:close/>
-              </a:path>
-            </a:pathLst>
-          </a:custGeom>
-          <a:blipFill>
-            <a:blip r:embed="rId2"/>
-            <a:stretch>
-              <a:fillRect/>
-            </a:stretch>
-          </a:blipFill>
-        </p:spPr>
-      </p:sp>
-      <p:sp>
-        <p:nvSpPr>
-          <p:cNvPr id="4" name="Freeform 4"/>
-          <p:cNvSpPr/>
-          <p:nvPr/>
-        </p:nvSpPr>
-        <p:spPr>
-          <a:xfrm>
-            <a:off x="14685065" y="-4472609"/>
-            <a:ext cx="8229600" cy="8229600"/>
-          </a:xfrm>
-          <a:custGeom>
-            <a:avLst/>
-            <a:gdLst/>
-            <a:ahLst/>
-            <a:cxnLst/>
-            <a:rect l="l" t="t" r="r" b="b"/>
-            <a:pathLst>
-              <a:path w="8229600" h="8229600">
-                <a:moveTo>
-                  <a:pt x="0" y="0"/>
-                </a:moveTo>
-                <a:lnTo>
-                  <a:pt x="8229600" y="0"/>
-                </a:lnTo>
-                <a:lnTo>
-                  <a:pt x="8229600" y="8229600"/>
-                </a:lnTo>
-                <a:lnTo>
-                  <a:pt x="0" y="8229600"/>
-                </a:lnTo>
-                <a:lnTo>
-                  <a:pt x="0" y="0"/>
-                </a:lnTo>
-                <a:close/>
-              </a:path>
-            </a:pathLst>
-          </a:custGeom>
-          <a:blipFill>
-            <a:blip r:embed="rId2"/>
-            <a:stretch>
-              <a:fillRect/>
-            </a:stretch>
-          </a:blipFill>
-        </p:spPr>
-      </p:sp>
-      <p:sp>
-        <p:nvSpPr>
-          <p:cNvPr id="5" name="Freeform 5"/>
-          <p:cNvSpPr/>
-          <p:nvPr/>
-        </p:nvSpPr>
-        <p:spPr>
-          <a:xfrm>
-            <a:off x="-3956517" y="6907696"/>
-            <a:ext cx="8229600" cy="8229600"/>
-          </a:xfrm>
-          <a:custGeom>
-            <a:avLst/>
-            <a:gdLst/>
-            <a:ahLst/>
-            <a:cxnLst/>
-            <a:rect l="l" t="t" r="r" b="b"/>
-            <a:pathLst>
-              <a:path w="8229600" h="8229600">
-                <a:moveTo>
-                  <a:pt x="0" y="0"/>
-                </a:moveTo>
-                <a:lnTo>
-                  <a:pt x="8229600" y="0"/>
-                </a:lnTo>
-                <a:lnTo>
-                  <a:pt x="8229600" y="8229600"/>
-                </a:lnTo>
-                <a:lnTo>
-                  <a:pt x="0" y="8229600"/>
-                </a:lnTo>
-                <a:lnTo>
-                  <a:pt x="0" y="0"/>
-                </a:lnTo>
-                <a:close/>
-              </a:path>
-            </a:pathLst>
-          </a:custGeom>
-          <a:blipFill>
-            <a:blip r:embed="rId2"/>
-            <a:stretch>
-              <a:fillRect/>
-            </a:stretch>
-          </a:blipFill>
-        </p:spPr>
-      </p:sp>
       <p:sp>
         <p:nvSpPr>
           <p:cNvPr id="6" name="Freeform 6"/>
@@ -4181,10 +4064,10 @@
         </p:nvGrpSpPr>
         <p:grpSpPr>
           <a:xfrm>
-            <a:off x="5092575" y="520122"/>
-            <a:ext cx="8329793" cy="960907"/>
+            <a:off x="5042880" y="520122"/>
+            <a:ext cx="8304945" cy="960907"/>
             <a:chOff x="0" y="0"/>
-            <a:chExt cx="2193855" cy="253079"/>
+            <a:chExt cx="2187311" cy="253079"/>
           </a:xfrm>
         </p:grpSpPr>
         <p:sp>
@@ -4196,7 +4079,7 @@
           <p:spPr>
             <a:xfrm>
               <a:off x="0" y="0"/>
-              <a:ext cx="2193855" cy="253078"/>
+              <a:ext cx="2187311" cy="253078"/>
             </a:xfrm>
             <a:custGeom>
               <a:avLst/>
@@ -4205,41 +4088,61 @@
               <a:cxnLst/>
               <a:rect l="l" t="t" r="r" b="b"/>
               <a:pathLst>
-                <a:path w="2193855" h="253078">
+                <a:path w="2187311" h="253078">
                   <a:moveTo>
-                    <a:pt x="92943" y="0"/>
+                    <a:pt x="93221" y="0"/>
                   </a:moveTo>
                   <a:lnTo>
-                    <a:pt x="2100912" y="0"/>
+                    <a:pt x="2094090" y="0"/>
                   </a:lnTo>
                   <a:cubicBezTo>
-                    <a:pt x="2152243" y="0"/>
-                    <a:pt x="2193855" y="41612"/>
-                    <a:pt x="2193855" y="92943"/>
+                    <a:pt x="2118814" y="0"/>
+                    <a:pt x="2142525" y="9821"/>
+                    <a:pt x="2160007" y="27304"/>
+                  </a:cubicBezTo>
+                  <a:cubicBezTo>
+                    <a:pt x="2177489" y="44786"/>
+                    <a:pt x="2187311" y="68497"/>
+                    <a:pt x="2187311" y="93221"/>
                   </a:cubicBezTo>
                   <a:lnTo>
-                    <a:pt x="2193855" y="160136"/>
+                    <a:pt x="2187311" y="159858"/>
                   </a:lnTo>
                   <a:cubicBezTo>
-                    <a:pt x="2193855" y="211467"/>
-                    <a:pt x="2152243" y="253078"/>
-                    <a:pt x="2100912" y="253078"/>
+                    <a:pt x="2187311" y="184582"/>
+                    <a:pt x="2177489" y="208293"/>
+                    <a:pt x="2160007" y="225775"/>
+                  </a:cubicBezTo>
+                  <a:cubicBezTo>
+                    <a:pt x="2142525" y="243257"/>
+                    <a:pt x="2118814" y="253078"/>
+                    <a:pt x="2094090" y="253078"/>
                   </a:cubicBezTo>
                   <a:lnTo>
-                    <a:pt x="92943" y="253078"/>
+                    <a:pt x="93221" y="253078"/>
                   </a:lnTo>
                   <a:cubicBezTo>
-                    <a:pt x="41612" y="253078"/>
-                    <a:pt x="0" y="211467"/>
-                    <a:pt x="0" y="160136"/>
+                    <a:pt x="68497" y="253078"/>
+                    <a:pt x="44786" y="243257"/>
+                    <a:pt x="27304" y="225775"/>
+                  </a:cubicBezTo>
+                  <a:cubicBezTo>
+                    <a:pt x="9821" y="208293"/>
+                    <a:pt x="0" y="184582"/>
+                    <a:pt x="0" y="159858"/>
                   </a:cubicBezTo>
                   <a:lnTo>
-                    <a:pt x="0" y="92943"/>
+                    <a:pt x="0" y="93221"/>
                   </a:lnTo>
                   <a:cubicBezTo>
-                    <a:pt x="0" y="41612"/>
-                    <a:pt x="41612" y="0"/>
-                    <a:pt x="92943" y="0"/>
+                    <a:pt x="0" y="68497"/>
+                    <a:pt x="9821" y="44786"/>
+                    <a:pt x="27304" y="27304"/>
+                  </a:cubicBezTo>
+                  <a:cubicBezTo>
+                    <a:pt x="44786" y="9821"/>
+                    <a:pt x="68497" y="0"/>
+                    <a:pt x="93221" y="0"/>
                   </a:cubicBezTo>
                   <a:close/>
                 </a:path>
@@ -4263,7 +4166,7 @@
           <p:spPr>
             <a:xfrm>
               <a:off x="0" y="-95250"/>
-              <a:ext cx="2193855" cy="348329"/>
+              <a:ext cx="2187311" cy="348329"/>
             </a:xfrm>
             <a:prstGeom prst="rect">
               <a:avLst/>
@@ -4291,8 +4194,8 @@
         </p:nvSpPr>
         <p:spPr>
           <a:xfrm>
-            <a:off x="5147504" y="688863"/>
-            <a:ext cx="7992989" cy="679673"/>
+            <a:off x="5329988" y="623094"/>
+            <a:ext cx="7928812" cy="679673"/>
           </a:xfrm>
           <a:prstGeom prst="rect">
             <a:avLst/>
@@ -4327,9 +4230,80 @@
           </a:p>
         </p:txBody>
       </p:sp>
+    </p:spTree>
+  </p:cSld>
+  <p:clrMapOvr>
+    <a:masterClrMapping/>
+  </p:clrMapOvr>
+</p:sld>
+</file>
+
+<file path=ppt/slides/slide3.xml><?xml version="1.0" encoding="utf-8"?>
+<p:sld xmlns:a="http://schemas.openxmlformats.org/drawingml/2006/main" xmlns:r="http://schemas.openxmlformats.org/officeDocument/2006/relationships" xmlns:p="http://schemas.openxmlformats.org/presentationml/2006/main">
+  <p:cSld>
+    <p:spTree>
+      <p:nvGrpSpPr>
+        <p:cNvPr id="1" name=""/>
+        <p:cNvGrpSpPr/>
+        <p:nvPr/>
+      </p:nvGrpSpPr>
+      <p:grpSpPr>
+        <a:xfrm>
+          <a:off x="0" y="0"/>
+          <a:ext cx="0" cy="0"/>
+          <a:chOff x="0" y="0"/>
+          <a:chExt cx="0" cy="0"/>
+        </a:xfrm>
+      </p:grpSpPr>
+      <p:sp>
+        <p:nvSpPr>
+          <p:cNvPr id="2" name="Freeform 2"/>
+          <p:cNvSpPr/>
+          <p:nvPr/>
+        </p:nvSpPr>
+        <p:spPr>
+          <a:xfrm>
+            <a:off x="0" y="0"/>
+            <a:ext cx="18288000" cy="10287000"/>
+          </a:xfrm>
+          <a:custGeom>
+            <a:avLst/>
+            <a:gdLst/>
+            <a:ahLst/>
+            <a:cxnLst/>
+            <a:rect l="l" t="t" r="r" b="b"/>
+            <a:pathLst>
+              <a:path w="18288000" h="10287000">
+                <a:moveTo>
+                  <a:pt x="0" y="0"/>
+                </a:moveTo>
+                <a:lnTo>
+                  <a:pt x="18288000" y="0"/>
+                </a:lnTo>
+                <a:lnTo>
+                  <a:pt x="18288000" y="10287000"/>
+                </a:lnTo>
+                <a:lnTo>
+                  <a:pt x="0" y="10287000"/>
+                </a:lnTo>
+                <a:lnTo>
+                  <a:pt x="0" y="0"/>
+                </a:lnTo>
+                <a:close/>
+              </a:path>
+            </a:pathLst>
+          </a:custGeom>
+          <a:blipFill>
+            <a:blip r:embed="rId2"/>
+            <a:stretch>
+              <a:fillRect t="-10929" b="-10929"/>
+            </a:stretch>
+          </a:blipFill>
+        </p:spPr>
+      </p:sp>
       <p:grpSp>
         <p:nvGrpSpPr>
-          <p:cNvPr id="12" name="Group 12"/>
+          <p:cNvPr id="3" name="Group 3"/>
           <p:cNvGrpSpPr/>
           <p:nvPr/>
         </p:nvGrpSpPr>
@@ -4343,7 +4317,7 @@
         </p:grpSpPr>
         <p:sp>
           <p:nvSpPr>
-            <p:cNvPr id="13" name="Freeform 13"/>
+            <p:cNvPr id="4" name="Freeform 4"/>
             <p:cNvSpPr/>
             <p:nvPr/>
           </p:nvSpPr>
@@ -4361,73 +4335,78 @@
               <a:pathLst>
                 <a:path w="4593743" h="2099574">
                   <a:moveTo>
-                    <a:pt x="16867" y="0"/>
+                    <a:pt x="7546" y="0"/>
                   </a:moveTo>
                   <a:lnTo>
-                    <a:pt x="4576876" y="0"/>
+                    <a:pt x="4586198" y="0"/>
                   </a:lnTo>
                   <a:cubicBezTo>
-                    <a:pt x="4581349" y="0"/>
-                    <a:pt x="4585640" y="1777"/>
-                    <a:pt x="4588803" y="4940"/>
-                  </a:cubicBezTo>
-                  <a:cubicBezTo>
-                    <a:pt x="4591966" y="8103"/>
-                    <a:pt x="4593743" y="12394"/>
-                    <a:pt x="4593743" y="16867"/>
+                    <a:pt x="4588199" y="0"/>
+                    <a:pt x="4590118" y="795"/>
+                    <a:pt x="4591533" y="2210"/>
+                  </a:cubicBezTo>
+                  <a:cubicBezTo>
+                    <a:pt x="4592948" y="3625"/>
+                    <a:pt x="4593743" y="5545"/>
+                    <a:pt x="4593743" y="7546"/>
                   </a:cubicBezTo>
                   <a:lnTo>
-                    <a:pt x="4593743" y="2082707"/>
+                    <a:pt x="4593743" y="2092028"/>
                   </a:lnTo>
                   <a:cubicBezTo>
-                    <a:pt x="4593743" y="2092022"/>
-                    <a:pt x="4586192" y="2099574"/>
-                    <a:pt x="4576876" y="2099574"/>
+                    <a:pt x="4593743" y="2096196"/>
+                    <a:pt x="4590365" y="2099574"/>
+                    <a:pt x="4586198" y="2099574"/>
                   </a:cubicBezTo>
                   <a:lnTo>
-                    <a:pt x="16867" y="2099574"/>
+                    <a:pt x="7546" y="2099574"/>
                   </a:lnTo>
                   <a:cubicBezTo>
-                    <a:pt x="12394" y="2099574"/>
-                    <a:pt x="8103" y="2097797"/>
-                    <a:pt x="4940" y="2094634"/>
-                  </a:cubicBezTo>
-                  <a:cubicBezTo>
-                    <a:pt x="1777" y="2091471"/>
-                    <a:pt x="0" y="2087180"/>
-                    <a:pt x="0" y="2082707"/>
+                    <a:pt x="5545" y="2099574"/>
+                    <a:pt x="3625" y="2098779"/>
+                    <a:pt x="2210" y="2097364"/>
+                  </a:cubicBezTo>
+                  <a:cubicBezTo>
+                    <a:pt x="795" y="2095949"/>
+                    <a:pt x="0" y="2094030"/>
+                    <a:pt x="0" y="2092028"/>
                   </a:cubicBezTo>
                   <a:lnTo>
-                    <a:pt x="0" y="16867"/>
+                    <a:pt x="0" y="7546"/>
                   </a:lnTo>
                   <a:cubicBezTo>
-                    <a:pt x="0" y="12394"/>
-                    <a:pt x="1777" y="8103"/>
-                    <a:pt x="4940" y="4940"/>
-                  </a:cubicBezTo>
-                  <a:cubicBezTo>
-                    <a:pt x="8103" y="1777"/>
-                    <a:pt x="12394" y="0"/>
-                    <a:pt x="16867" y="0"/>
+                    <a:pt x="0" y="5545"/>
+                    <a:pt x="795" y="3625"/>
+                    <a:pt x="2210" y="2210"/>
+                  </a:cubicBezTo>
+                  <a:cubicBezTo>
+                    <a:pt x="3625" y="795"/>
+                    <a:pt x="5545" y="0"/>
+                    <a:pt x="7546" y="0"/>
                   </a:cubicBezTo>
                   <a:close/>
                 </a:path>
               </a:pathLst>
             </a:custGeom>
-            <a:ln w="76200" cap="rnd">
+            <a:solidFill>
+              <a:srgbClr val="7B7B7B">
+                <a:alpha val="89804"/>
+              </a:srgbClr>
+            </a:solidFill>
+            <a:ln w="38100" cap="sq">
               <a:solidFill>
                 <a:srgbClr val="D1D1D1">
                   <a:alpha val="89804"/>
                 </a:srgbClr>
               </a:solidFill>
               <a:prstDash val="solid"/>
-              <a:round/>
+              <a:miter/>
             </a:ln>
           </p:spPr>
         </p:sp>
         <p:sp>
           <p:nvSpPr>
-            <p:cNvPr id="14" name="TextBox 14"/>
+            <p:cNvPr id="5" name="TextBox 5"/>
             <p:cNvSpPr txBox="1"/>
             <p:nvPr/>
           </p:nvSpPr>
@@ -4454,223 +4433,6 @@
           </p:txBody>
         </p:sp>
       </p:grpSp>
-    </p:spTree>
-  </p:cSld>
-  <p:clrMapOvr>
-    <a:masterClrMapping/>
-  </p:clrMapOvr>
-</p:sld>
-</file>
-
-<file path=ppt/slides/slide3.xml><?xml version="1.0" encoding="utf-8"?>
-<p:sld xmlns:a="http://schemas.openxmlformats.org/drawingml/2006/main" xmlns:r="http://schemas.openxmlformats.org/officeDocument/2006/relationships" xmlns:p="http://schemas.openxmlformats.org/presentationml/2006/main">
-  <p:cSld>
-    <p:bg>
-      <p:bgPr>
-        <a:solidFill>
-          <a:srgbClr val="000000"/>
-        </a:solidFill>
-        <a:effectLst/>
-      </p:bgPr>
-    </p:bg>
-    <p:spTree>
-      <p:nvGrpSpPr>
-        <p:cNvPr id="1" name=""/>
-        <p:cNvGrpSpPr/>
-        <p:nvPr/>
-      </p:nvGrpSpPr>
-      <p:grpSpPr>
-        <a:xfrm>
-          <a:off x="0" y="0"/>
-          <a:ext cx="0" cy="0"/>
-          <a:chOff x="0" y="0"/>
-          <a:chExt cx="0" cy="0"/>
-        </a:xfrm>
-      </p:grpSpPr>
-      <p:sp>
-        <p:nvSpPr>
-          <p:cNvPr id="2" name="Freeform 2"/>
-          <p:cNvSpPr/>
-          <p:nvPr/>
-        </p:nvSpPr>
-        <p:spPr>
-          <a:xfrm>
-            <a:off x="-3383650" y="-2941320"/>
-            <a:ext cx="8824700" cy="8824700"/>
-          </a:xfrm>
-          <a:custGeom>
-            <a:avLst/>
-            <a:gdLst/>
-            <a:ahLst/>
-            <a:cxnLst/>
-            <a:rect l="l" t="t" r="r" b="b"/>
-            <a:pathLst>
-              <a:path w="8824700" h="8824700">
-                <a:moveTo>
-                  <a:pt x="0" y="0"/>
-                </a:moveTo>
-                <a:lnTo>
-                  <a:pt x="8824700" y="0"/>
-                </a:lnTo>
-                <a:lnTo>
-                  <a:pt x="8824700" y="8824699"/>
-                </a:lnTo>
-                <a:lnTo>
-                  <a:pt x="0" y="8824699"/>
-                </a:lnTo>
-                <a:lnTo>
-                  <a:pt x="0" y="0"/>
-                </a:lnTo>
-                <a:close/>
-              </a:path>
-            </a:pathLst>
-          </a:custGeom>
-          <a:blipFill>
-            <a:blip r:embed="rId2"/>
-            <a:stretch>
-              <a:fillRect/>
-            </a:stretch>
-          </a:blipFill>
-        </p:spPr>
-      </p:sp>
-      <p:sp>
-        <p:nvSpPr>
-          <p:cNvPr id="3" name="Freeform 3"/>
-          <p:cNvSpPr/>
-          <p:nvPr/>
-        </p:nvSpPr>
-        <p:spPr>
-          <a:xfrm>
-            <a:off x="11888339" y="2758109"/>
-            <a:ext cx="10156534" cy="10156534"/>
-          </a:xfrm>
-          <a:custGeom>
-            <a:avLst/>
-            <a:gdLst/>
-            <a:ahLst/>
-            <a:cxnLst/>
-            <a:rect l="l" t="t" r="r" b="b"/>
-            <a:pathLst>
-              <a:path w="10156534" h="10156534">
-                <a:moveTo>
-                  <a:pt x="0" y="0"/>
-                </a:moveTo>
-                <a:lnTo>
-                  <a:pt x="10156534" y="0"/>
-                </a:lnTo>
-                <a:lnTo>
-                  <a:pt x="10156534" y="10156534"/>
-                </a:lnTo>
-                <a:lnTo>
-                  <a:pt x="0" y="10156534"/>
-                </a:lnTo>
-                <a:lnTo>
-                  <a:pt x="0" y="0"/>
-                </a:lnTo>
-                <a:close/>
-              </a:path>
-            </a:pathLst>
-          </a:custGeom>
-          <a:blipFill>
-            <a:blip r:embed="rId2"/>
-            <a:stretch>
-              <a:fillRect/>
-            </a:stretch>
-          </a:blipFill>
-        </p:spPr>
-      </p:sp>
-      <p:sp>
-        <p:nvSpPr>
-          <p:cNvPr id="4" name="Freeform 4"/>
-          <p:cNvSpPr/>
-          <p:nvPr/>
-        </p:nvSpPr>
-        <p:spPr>
-          <a:xfrm>
-            <a:off x="14685065" y="-4472609"/>
-            <a:ext cx="8229600" cy="8229600"/>
-          </a:xfrm>
-          <a:custGeom>
-            <a:avLst/>
-            <a:gdLst/>
-            <a:ahLst/>
-            <a:cxnLst/>
-            <a:rect l="l" t="t" r="r" b="b"/>
-            <a:pathLst>
-              <a:path w="8229600" h="8229600">
-                <a:moveTo>
-                  <a:pt x="0" y="0"/>
-                </a:moveTo>
-                <a:lnTo>
-                  <a:pt x="8229600" y="0"/>
-                </a:lnTo>
-                <a:lnTo>
-                  <a:pt x="8229600" y="8229600"/>
-                </a:lnTo>
-                <a:lnTo>
-                  <a:pt x="0" y="8229600"/>
-                </a:lnTo>
-                <a:lnTo>
-                  <a:pt x="0" y="0"/>
-                </a:lnTo>
-                <a:close/>
-              </a:path>
-            </a:pathLst>
-          </a:custGeom>
-          <a:blipFill>
-            <a:blip r:embed="rId2"/>
-            <a:stretch>
-              <a:fillRect/>
-            </a:stretch>
-          </a:blipFill>
-        </p:spPr>
-      </p:sp>
-      <p:sp>
-        <p:nvSpPr>
-          <p:cNvPr id="5" name="Freeform 5"/>
-          <p:cNvSpPr/>
-          <p:nvPr/>
-        </p:nvSpPr>
-        <p:spPr>
-          <a:xfrm>
-            <a:off x="-3956517" y="6907696"/>
-            <a:ext cx="8229600" cy="8229600"/>
-          </a:xfrm>
-          <a:custGeom>
-            <a:avLst/>
-            <a:gdLst/>
-            <a:ahLst/>
-            <a:cxnLst/>
-            <a:rect l="l" t="t" r="r" b="b"/>
-            <a:pathLst>
-              <a:path w="8229600" h="8229600">
-                <a:moveTo>
-                  <a:pt x="0" y="0"/>
-                </a:moveTo>
-                <a:lnTo>
-                  <a:pt x="8229600" y="0"/>
-                </a:lnTo>
-                <a:lnTo>
-                  <a:pt x="8229600" y="8229600"/>
-                </a:lnTo>
-                <a:lnTo>
-                  <a:pt x="0" y="8229600"/>
-                </a:lnTo>
-                <a:lnTo>
-                  <a:pt x="0" y="0"/>
-                </a:lnTo>
-                <a:close/>
-              </a:path>
-            </a:pathLst>
-          </a:custGeom>
-          <a:blipFill>
-            <a:blip r:embed="rId2"/>
-            <a:stretch>
-              <a:fillRect/>
-            </a:stretch>
-          </a:blipFill>
-        </p:spPr>
-      </p:sp>
       <p:sp>
         <p:nvSpPr>
           <p:cNvPr id="6" name="Freeform 6"/>
@@ -4896,8 +4658,8 @@
         </p:nvSpPr>
         <p:spPr>
           <a:xfrm>
-            <a:off x="6595585" y="655739"/>
-            <a:ext cx="5096827" cy="679673"/>
+            <a:off x="6866572" y="634784"/>
+            <a:ext cx="5249228" cy="679673"/>
           </a:xfrm>
           <a:prstGeom prst="rect">
             <a:avLst/>
@@ -4932,9 +4694,80 @@
           </a:p>
         </p:txBody>
       </p:sp>
+    </p:spTree>
+  </p:cSld>
+  <p:clrMapOvr>
+    <a:masterClrMapping/>
+  </p:clrMapOvr>
+</p:sld>
+</file>
+
+<file path=ppt/slides/slide4.xml><?xml version="1.0" encoding="utf-8"?>
+<p:sld xmlns:a="http://schemas.openxmlformats.org/drawingml/2006/main" xmlns:r="http://schemas.openxmlformats.org/officeDocument/2006/relationships" xmlns:p="http://schemas.openxmlformats.org/presentationml/2006/main">
+  <p:cSld>
+    <p:spTree>
+      <p:nvGrpSpPr>
+        <p:cNvPr id="1" name=""/>
+        <p:cNvGrpSpPr/>
+        <p:nvPr/>
+      </p:nvGrpSpPr>
+      <p:grpSpPr>
+        <a:xfrm>
+          <a:off x="0" y="0"/>
+          <a:ext cx="0" cy="0"/>
+          <a:chOff x="0" y="0"/>
+          <a:chExt cx="0" cy="0"/>
+        </a:xfrm>
+      </p:grpSpPr>
+      <p:sp>
+        <p:nvSpPr>
+          <p:cNvPr id="2" name="Freeform 2"/>
+          <p:cNvSpPr/>
+          <p:nvPr/>
+        </p:nvSpPr>
+        <p:spPr>
+          <a:xfrm>
+            <a:off x="0" y="0"/>
+            <a:ext cx="18288000" cy="10287000"/>
+          </a:xfrm>
+          <a:custGeom>
+            <a:avLst/>
+            <a:gdLst/>
+            <a:ahLst/>
+            <a:cxnLst/>
+            <a:rect l="l" t="t" r="r" b="b"/>
+            <a:pathLst>
+              <a:path w="18288000" h="10287000">
+                <a:moveTo>
+                  <a:pt x="0" y="0"/>
+                </a:moveTo>
+                <a:lnTo>
+                  <a:pt x="18288000" y="0"/>
+                </a:lnTo>
+                <a:lnTo>
+                  <a:pt x="18288000" y="10287000"/>
+                </a:lnTo>
+                <a:lnTo>
+                  <a:pt x="0" y="10287000"/>
+                </a:lnTo>
+                <a:lnTo>
+                  <a:pt x="0" y="0"/>
+                </a:lnTo>
+                <a:close/>
+              </a:path>
+            </a:pathLst>
+          </a:custGeom>
+          <a:blipFill>
+            <a:blip r:embed="rId2"/>
+            <a:stretch>
+              <a:fillRect t="-10929" b="-10929"/>
+            </a:stretch>
+          </a:blipFill>
+        </p:spPr>
+      </p:sp>
       <p:grpSp>
         <p:nvGrpSpPr>
-          <p:cNvPr id="12" name="Group 12"/>
+          <p:cNvPr id="3" name="Group 3"/>
           <p:cNvGrpSpPr/>
           <p:nvPr/>
         </p:nvGrpSpPr>
@@ -4948,7 +4781,7 @@
         </p:grpSpPr>
         <p:sp>
           <p:nvSpPr>
-            <p:cNvPr id="13" name="Freeform 13"/>
+            <p:cNvPr id="4" name="Freeform 4"/>
             <p:cNvSpPr/>
             <p:nvPr/>
           </p:nvSpPr>
@@ -4966,73 +4799,78 @@
               <a:pathLst>
                 <a:path w="4593743" h="2099574">
                   <a:moveTo>
-                    <a:pt x="16867" y="0"/>
+                    <a:pt x="7546" y="0"/>
                   </a:moveTo>
                   <a:lnTo>
-                    <a:pt x="4576876" y="0"/>
+                    <a:pt x="4586198" y="0"/>
                   </a:lnTo>
                   <a:cubicBezTo>
-                    <a:pt x="4581349" y="0"/>
-                    <a:pt x="4585640" y="1777"/>
-                    <a:pt x="4588803" y="4940"/>
-                  </a:cubicBezTo>
-                  <a:cubicBezTo>
-                    <a:pt x="4591966" y="8103"/>
-                    <a:pt x="4593743" y="12394"/>
-                    <a:pt x="4593743" y="16867"/>
+                    <a:pt x="4588199" y="0"/>
+                    <a:pt x="4590118" y="795"/>
+                    <a:pt x="4591533" y="2210"/>
+                  </a:cubicBezTo>
+                  <a:cubicBezTo>
+                    <a:pt x="4592948" y="3625"/>
+                    <a:pt x="4593743" y="5545"/>
+                    <a:pt x="4593743" y="7546"/>
                   </a:cubicBezTo>
                   <a:lnTo>
-                    <a:pt x="4593743" y="2082707"/>
+                    <a:pt x="4593743" y="2092028"/>
                   </a:lnTo>
                   <a:cubicBezTo>
-                    <a:pt x="4593743" y="2092022"/>
-                    <a:pt x="4586192" y="2099574"/>
-                    <a:pt x="4576876" y="2099574"/>
+                    <a:pt x="4593743" y="2096196"/>
+                    <a:pt x="4590365" y="2099574"/>
+                    <a:pt x="4586198" y="2099574"/>
                   </a:cubicBezTo>
                   <a:lnTo>
-                    <a:pt x="16867" y="2099574"/>
+                    <a:pt x="7546" y="2099574"/>
                   </a:lnTo>
                   <a:cubicBezTo>
-                    <a:pt x="12394" y="2099574"/>
-                    <a:pt x="8103" y="2097797"/>
-                    <a:pt x="4940" y="2094634"/>
-                  </a:cubicBezTo>
-                  <a:cubicBezTo>
-                    <a:pt x="1777" y="2091471"/>
-                    <a:pt x="0" y="2087180"/>
-                    <a:pt x="0" y="2082707"/>
+                    <a:pt x="5545" y="2099574"/>
+                    <a:pt x="3625" y="2098779"/>
+                    <a:pt x="2210" y="2097364"/>
+                  </a:cubicBezTo>
+                  <a:cubicBezTo>
+                    <a:pt x="795" y="2095949"/>
+                    <a:pt x="0" y="2094030"/>
+                    <a:pt x="0" y="2092028"/>
                   </a:cubicBezTo>
                   <a:lnTo>
-                    <a:pt x="0" y="16867"/>
+                    <a:pt x="0" y="7546"/>
                   </a:lnTo>
                   <a:cubicBezTo>
-                    <a:pt x="0" y="12394"/>
-                    <a:pt x="1777" y="8103"/>
-                    <a:pt x="4940" y="4940"/>
-                  </a:cubicBezTo>
-                  <a:cubicBezTo>
-                    <a:pt x="8103" y="1777"/>
-                    <a:pt x="12394" y="0"/>
-                    <a:pt x="16867" y="0"/>
+                    <a:pt x="0" y="5545"/>
+                    <a:pt x="795" y="3625"/>
+                    <a:pt x="2210" y="2210"/>
+                  </a:cubicBezTo>
+                  <a:cubicBezTo>
+                    <a:pt x="3625" y="795"/>
+                    <a:pt x="5545" y="0"/>
+                    <a:pt x="7546" y="0"/>
                   </a:cubicBezTo>
                   <a:close/>
                 </a:path>
               </a:pathLst>
             </a:custGeom>
-            <a:ln w="76200" cap="rnd">
+            <a:solidFill>
+              <a:srgbClr val="7B7B7B">
+                <a:alpha val="89804"/>
+              </a:srgbClr>
+            </a:solidFill>
+            <a:ln w="38100" cap="sq">
               <a:solidFill>
                 <a:srgbClr val="D1D1D1">
                   <a:alpha val="89804"/>
                 </a:srgbClr>
               </a:solidFill>
               <a:prstDash val="solid"/>
-              <a:round/>
+              <a:miter/>
             </a:ln>
           </p:spPr>
         </p:sp>
         <p:sp>
           <p:nvSpPr>
-            <p:cNvPr id="14" name="TextBox 14"/>
+            <p:cNvPr id="5" name="TextBox 5"/>
             <p:cNvSpPr txBox="1"/>
             <p:nvPr/>
           </p:nvSpPr>
@@ -5059,223 +4897,6 @@
           </p:txBody>
         </p:sp>
       </p:grpSp>
-    </p:spTree>
-  </p:cSld>
-  <p:clrMapOvr>
-    <a:masterClrMapping/>
-  </p:clrMapOvr>
-</p:sld>
-</file>
-
-<file path=ppt/slides/slide4.xml><?xml version="1.0" encoding="utf-8"?>
-<p:sld xmlns:a="http://schemas.openxmlformats.org/drawingml/2006/main" xmlns:r="http://schemas.openxmlformats.org/officeDocument/2006/relationships" xmlns:p="http://schemas.openxmlformats.org/presentationml/2006/main">
-  <p:cSld>
-    <p:bg>
-      <p:bgPr>
-        <a:solidFill>
-          <a:srgbClr val="000000"/>
-        </a:solidFill>
-        <a:effectLst/>
-      </p:bgPr>
-    </p:bg>
-    <p:spTree>
-      <p:nvGrpSpPr>
-        <p:cNvPr id="1" name=""/>
-        <p:cNvGrpSpPr/>
-        <p:nvPr/>
-      </p:nvGrpSpPr>
-      <p:grpSpPr>
-        <a:xfrm>
-          <a:off x="0" y="0"/>
-          <a:ext cx="0" cy="0"/>
-          <a:chOff x="0" y="0"/>
-          <a:chExt cx="0" cy="0"/>
-        </a:xfrm>
-      </p:grpSpPr>
-      <p:sp>
-        <p:nvSpPr>
-          <p:cNvPr id="2" name="Freeform 2"/>
-          <p:cNvSpPr/>
-          <p:nvPr/>
-        </p:nvSpPr>
-        <p:spPr>
-          <a:xfrm>
-            <a:off x="-3383650" y="-2941320"/>
-            <a:ext cx="8824700" cy="8824700"/>
-          </a:xfrm>
-          <a:custGeom>
-            <a:avLst/>
-            <a:gdLst/>
-            <a:ahLst/>
-            <a:cxnLst/>
-            <a:rect l="l" t="t" r="r" b="b"/>
-            <a:pathLst>
-              <a:path w="8824700" h="8824700">
-                <a:moveTo>
-                  <a:pt x="0" y="0"/>
-                </a:moveTo>
-                <a:lnTo>
-                  <a:pt x="8824700" y="0"/>
-                </a:lnTo>
-                <a:lnTo>
-                  <a:pt x="8824700" y="8824699"/>
-                </a:lnTo>
-                <a:lnTo>
-                  <a:pt x="0" y="8824699"/>
-                </a:lnTo>
-                <a:lnTo>
-                  <a:pt x="0" y="0"/>
-                </a:lnTo>
-                <a:close/>
-              </a:path>
-            </a:pathLst>
-          </a:custGeom>
-          <a:blipFill>
-            <a:blip r:embed="rId2"/>
-            <a:stretch>
-              <a:fillRect/>
-            </a:stretch>
-          </a:blipFill>
-        </p:spPr>
-      </p:sp>
-      <p:sp>
-        <p:nvSpPr>
-          <p:cNvPr id="3" name="Freeform 3"/>
-          <p:cNvSpPr/>
-          <p:nvPr/>
-        </p:nvSpPr>
-        <p:spPr>
-          <a:xfrm>
-            <a:off x="11888339" y="2758109"/>
-            <a:ext cx="10156534" cy="10156534"/>
-          </a:xfrm>
-          <a:custGeom>
-            <a:avLst/>
-            <a:gdLst/>
-            <a:ahLst/>
-            <a:cxnLst/>
-            <a:rect l="l" t="t" r="r" b="b"/>
-            <a:pathLst>
-              <a:path w="10156534" h="10156534">
-                <a:moveTo>
-                  <a:pt x="0" y="0"/>
-                </a:moveTo>
-                <a:lnTo>
-                  <a:pt x="10156534" y="0"/>
-                </a:lnTo>
-                <a:lnTo>
-                  <a:pt x="10156534" y="10156534"/>
-                </a:lnTo>
-                <a:lnTo>
-                  <a:pt x="0" y="10156534"/>
-                </a:lnTo>
-                <a:lnTo>
-                  <a:pt x="0" y="0"/>
-                </a:lnTo>
-                <a:close/>
-              </a:path>
-            </a:pathLst>
-          </a:custGeom>
-          <a:blipFill>
-            <a:blip r:embed="rId2"/>
-            <a:stretch>
-              <a:fillRect/>
-            </a:stretch>
-          </a:blipFill>
-        </p:spPr>
-      </p:sp>
-      <p:sp>
-        <p:nvSpPr>
-          <p:cNvPr id="4" name="Freeform 4"/>
-          <p:cNvSpPr/>
-          <p:nvPr/>
-        </p:nvSpPr>
-        <p:spPr>
-          <a:xfrm>
-            <a:off x="14685065" y="-4472609"/>
-            <a:ext cx="8229600" cy="8229600"/>
-          </a:xfrm>
-          <a:custGeom>
-            <a:avLst/>
-            <a:gdLst/>
-            <a:ahLst/>
-            <a:cxnLst/>
-            <a:rect l="l" t="t" r="r" b="b"/>
-            <a:pathLst>
-              <a:path w="8229600" h="8229600">
-                <a:moveTo>
-                  <a:pt x="0" y="0"/>
-                </a:moveTo>
-                <a:lnTo>
-                  <a:pt x="8229600" y="0"/>
-                </a:lnTo>
-                <a:lnTo>
-                  <a:pt x="8229600" y="8229600"/>
-                </a:lnTo>
-                <a:lnTo>
-                  <a:pt x="0" y="8229600"/>
-                </a:lnTo>
-                <a:lnTo>
-                  <a:pt x="0" y="0"/>
-                </a:lnTo>
-                <a:close/>
-              </a:path>
-            </a:pathLst>
-          </a:custGeom>
-          <a:blipFill>
-            <a:blip r:embed="rId2"/>
-            <a:stretch>
-              <a:fillRect/>
-            </a:stretch>
-          </a:blipFill>
-        </p:spPr>
-      </p:sp>
-      <p:sp>
-        <p:nvSpPr>
-          <p:cNvPr id="5" name="Freeform 5"/>
-          <p:cNvSpPr/>
-          <p:nvPr/>
-        </p:nvSpPr>
-        <p:spPr>
-          <a:xfrm>
-            <a:off x="-3956517" y="6907696"/>
-            <a:ext cx="8229600" cy="8229600"/>
-          </a:xfrm>
-          <a:custGeom>
-            <a:avLst/>
-            <a:gdLst/>
-            <a:ahLst/>
-            <a:cxnLst/>
-            <a:rect l="l" t="t" r="r" b="b"/>
-            <a:pathLst>
-              <a:path w="8229600" h="8229600">
-                <a:moveTo>
-                  <a:pt x="0" y="0"/>
-                </a:moveTo>
-                <a:lnTo>
-                  <a:pt x="8229600" y="0"/>
-                </a:lnTo>
-                <a:lnTo>
-                  <a:pt x="8229600" y="8229600"/>
-                </a:lnTo>
-                <a:lnTo>
-                  <a:pt x="0" y="8229600"/>
-                </a:lnTo>
-                <a:lnTo>
-                  <a:pt x="0" y="0"/>
-                </a:lnTo>
-                <a:close/>
-              </a:path>
-            </a:pathLst>
-          </a:custGeom>
-          <a:blipFill>
-            <a:blip r:embed="rId2"/>
-            <a:stretch>
-              <a:fillRect/>
-            </a:stretch>
-          </a:blipFill>
-        </p:spPr>
-      </p:sp>
       <p:sp>
         <p:nvSpPr>
           <p:cNvPr id="6" name="Freeform 6"/>
@@ -5501,8 +5122,8 @@
         </p:nvSpPr>
         <p:spPr>
           <a:xfrm>
-            <a:off x="6172200" y="634784"/>
-            <a:ext cx="5990749" cy="679673"/>
+            <a:off x="6248099" y="634784"/>
+            <a:ext cx="5914850" cy="679673"/>
           </a:xfrm>
           <a:prstGeom prst="rect">
             <a:avLst/>
@@ -5537,9 +5158,80 @@
           </a:p>
         </p:txBody>
       </p:sp>
+    </p:spTree>
+  </p:cSld>
+  <p:clrMapOvr>
+    <a:masterClrMapping/>
+  </p:clrMapOvr>
+</p:sld>
+</file>
+
+<file path=ppt/slides/slide5.xml><?xml version="1.0" encoding="utf-8"?>
+<p:sld xmlns:a="http://schemas.openxmlformats.org/drawingml/2006/main" xmlns:r="http://schemas.openxmlformats.org/officeDocument/2006/relationships" xmlns:p="http://schemas.openxmlformats.org/presentationml/2006/main">
+  <p:cSld>
+    <p:spTree>
+      <p:nvGrpSpPr>
+        <p:cNvPr id="1" name=""/>
+        <p:cNvGrpSpPr/>
+        <p:nvPr/>
+      </p:nvGrpSpPr>
+      <p:grpSpPr>
+        <a:xfrm>
+          <a:off x="0" y="0"/>
+          <a:ext cx="0" cy="0"/>
+          <a:chOff x="0" y="0"/>
+          <a:chExt cx="0" cy="0"/>
+        </a:xfrm>
+      </p:grpSpPr>
+      <p:sp>
+        <p:nvSpPr>
+          <p:cNvPr id="2" name="Freeform 2"/>
+          <p:cNvSpPr/>
+          <p:nvPr/>
+        </p:nvSpPr>
+        <p:spPr>
+          <a:xfrm>
+            <a:off x="0" y="0"/>
+            <a:ext cx="18288000" cy="10287000"/>
+          </a:xfrm>
+          <a:custGeom>
+            <a:avLst/>
+            <a:gdLst/>
+            <a:ahLst/>
+            <a:cxnLst/>
+            <a:rect l="l" t="t" r="r" b="b"/>
+            <a:pathLst>
+              <a:path w="18288000" h="10287000">
+                <a:moveTo>
+                  <a:pt x="0" y="0"/>
+                </a:moveTo>
+                <a:lnTo>
+                  <a:pt x="18288000" y="0"/>
+                </a:lnTo>
+                <a:lnTo>
+                  <a:pt x="18288000" y="10287000"/>
+                </a:lnTo>
+                <a:lnTo>
+                  <a:pt x="0" y="10287000"/>
+                </a:lnTo>
+                <a:lnTo>
+                  <a:pt x="0" y="0"/>
+                </a:lnTo>
+                <a:close/>
+              </a:path>
+            </a:pathLst>
+          </a:custGeom>
+          <a:blipFill>
+            <a:blip r:embed="rId2"/>
+            <a:stretch>
+              <a:fillRect t="-10929" b="-10929"/>
+            </a:stretch>
+          </a:blipFill>
+        </p:spPr>
+      </p:sp>
       <p:grpSp>
         <p:nvGrpSpPr>
-          <p:cNvPr id="12" name="Group 12"/>
+          <p:cNvPr id="3" name="Group 3"/>
           <p:cNvGrpSpPr/>
           <p:nvPr/>
         </p:nvGrpSpPr>
@@ -5553,7 +5245,7 @@
         </p:grpSpPr>
         <p:sp>
           <p:nvSpPr>
-            <p:cNvPr id="13" name="Freeform 13"/>
+            <p:cNvPr id="4" name="Freeform 4"/>
             <p:cNvSpPr/>
             <p:nvPr/>
           </p:nvSpPr>
@@ -5571,73 +5263,78 @@
               <a:pathLst>
                 <a:path w="4593743" h="2099574">
                   <a:moveTo>
-                    <a:pt x="16867" y="0"/>
+                    <a:pt x="7546" y="0"/>
                   </a:moveTo>
                   <a:lnTo>
-                    <a:pt x="4576876" y="0"/>
+                    <a:pt x="4586198" y="0"/>
                   </a:lnTo>
                   <a:cubicBezTo>
-                    <a:pt x="4581349" y="0"/>
-                    <a:pt x="4585640" y="1777"/>
-                    <a:pt x="4588803" y="4940"/>
-                  </a:cubicBezTo>
-                  <a:cubicBezTo>
-                    <a:pt x="4591966" y="8103"/>
-                    <a:pt x="4593743" y="12394"/>
-                    <a:pt x="4593743" y="16867"/>
+                    <a:pt x="4588199" y="0"/>
+                    <a:pt x="4590118" y="795"/>
+                    <a:pt x="4591533" y="2210"/>
+                  </a:cubicBezTo>
+                  <a:cubicBezTo>
+                    <a:pt x="4592948" y="3625"/>
+                    <a:pt x="4593743" y="5545"/>
+                    <a:pt x="4593743" y="7546"/>
                   </a:cubicBezTo>
                   <a:lnTo>
-                    <a:pt x="4593743" y="2082707"/>
+                    <a:pt x="4593743" y="2092028"/>
                   </a:lnTo>
                   <a:cubicBezTo>
-                    <a:pt x="4593743" y="2092022"/>
-                    <a:pt x="4586192" y="2099574"/>
-                    <a:pt x="4576876" y="2099574"/>
+                    <a:pt x="4593743" y="2096196"/>
+                    <a:pt x="4590365" y="2099574"/>
+                    <a:pt x="4586198" y="2099574"/>
                   </a:cubicBezTo>
                   <a:lnTo>
-                    <a:pt x="16867" y="2099574"/>
+                    <a:pt x="7546" y="2099574"/>
                   </a:lnTo>
                   <a:cubicBezTo>
-                    <a:pt x="12394" y="2099574"/>
-                    <a:pt x="8103" y="2097797"/>
-                    <a:pt x="4940" y="2094634"/>
-                  </a:cubicBezTo>
-                  <a:cubicBezTo>
-                    <a:pt x="1777" y="2091471"/>
-                    <a:pt x="0" y="2087180"/>
-                    <a:pt x="0" y="2082707"/>
+                    <a:pt x="5545" y="2099574"/>
+                    <a:pt x="3625" y="2098779"/>
+                    <a:pt x="2210" y="2097364"/>
+                  </a:cubicBezTo>
+                  <a:cubicBezTo>
+                    <a:pt x="795" y="2095949"/>
+                    <a:pt x="0" y="2094030"/>
+                    <a:pt x="0" y="2092028"/>
                   </a:cubicBezTo>
                   <a:lnTo>
-                    <a:pt x="0" y="16867"/>
+                    <a:pt x="0" y="7546"/>
                   </a:lnTo>
                   <a:cubicBezTo>
-                    <a:pt x="0" y="12394"/>
-                    <a:pt x="1777" y="8103"/>
-                    <a:pt x="4940" y="4940"/>
-                  </a:cubicBezTo>
-                  <a:cubicBezTo>
-                    <a:pt x="8103" y="1777"/>
-                    <a:pt x="12394" y="0"/>
-                    <a:pt x="16867" y="0"/>
+                    <a:pt x="0" y="5545"/>
+                    <a:pt x="795" y="3625"/>
+                    <a:pt x="2210" y="2210"/>
+                  </a:cubicBezTo>
+                  <a:cubicBezTo>
+                    <a:pt x="3625" y="795"/>
+                    <a:pt x="5545" y="0"/>
+                    <a:pt x="7546" y="0"/>
                   </a:cubicBezTo>
                   <a:close/>
                 </a:path>
               </a:pathLst>
             </a:custGeom>
-            <a:ln w="76200" cap="rnd">
+            <a:solidFill>
+              <a:srgbClr val="7B7B7B">
+                <a:alpha val="89804"/>
+              </a:srgbClr>
+            </a:solidFill>
+            <a:ln w="38100" cap="sq">
               <a:solidFill>
                 <a:srgbClr val="D1D1D1">
                   <a:alpha val="89804"/>
                 </a:srgbClr>
               </a:solidFill>
               <a:prstDash val="solid"/>
-              <a:round/>
+              <a:miter/>
             </a:ln>
           </p:spPr>
         </p:sp>
         <p:sp>
           <p:nvSpPr>
-            <p:cNvPr id="14" name="TextBox 14"/>
+            <p:cNvPr id="5" name="TextBox 5"/>
             <p:cNvSpPr txBox="1"/>
             <p:nvPr/>
           </p:nvSpPr>
@@ -5664,223 +5361,6 @@
           </p:txBody>
         </p:sp>
       </p:grpSp>
-    </p:spTree>
-  </p:cSld>
-  <p:clrMapOvr>
-    <a:masterClrMapping/>
-  </p:clrMapOvr>
-</p:sld>
-</file>
-
-<file path=ppt/slides/slide5.xml><?xml version="1.0" encoding="utf-8"?>
-<p:sld xmlns:a="http://schemas.openxmlformats.org/drawingml/2006/main" xmlns:r="http://schemas.openxmlformats.org/officeDocument/2006/relationships" xmlns:p="http://schemas.openxmlformats.org/presentationml/2006/main">
-  <p:cSld>
-    <p:bg>
-      <p:bgPr>
-        <a:solidFill>
-          <a:srgbClr val="000000"/>
-        </a:solidFill>
-        <a:effectLst/>
-      </p:bgPr>
-    </p:bg>
-    <p:spTree>
-      <p:nvGrpSpPr>
-        <p:cNvPr id="1" name=""/>
-        <p:cNvGrpSpPr/>
-        <p:nvPr/>
-      </p:nvGrpSpPr>
-      <p:grpSpPr>
-        <a:xfrm>
-          <a:off x="0" y="0"/>
-          <a:ext cx="0" cy="0"/>
-          <a:chOff x="0" y="0"/>
-          <a:chExt cx="0" cy="0"/>
-        </a:xfrm>
-      </p:grpSpPr>
-      <p:sp>
-        <p:nvSpPr>
-          <p:cNvPr id="2" name="Freeform 2"/>
-          <p:cNvSpPr/>
-          <p:nvPr/>
-        </p:nvSpPr>
-        <p:spPr>
-          <a:xfrm>
-            <a:off x="-3383650" y="-2941320"/>
-            <a:ext cx="8824700" cy="8824700"/>
-          </a:xfrm>
-          <a:custGeom>
-            <a:avLst/>
-            <a:gdLst/>
-            <a:ahLst/>
-            <a:cxnLst/>
-            <a:rect l="l" t="t" r="r" b="b"/>
-            <a:pathLst>
-              <a:path w="8824700" h="8824700">
-                <a:moveTo>
-                  <a:pt x="0" y="0"/>
-                </a:moveTo>
-                <a:lnTo>
-                  <a:pt x="8824700" y="0"/>
-                </a:lnTo>
-                <a:lnTo>
-                  <a:pt x="8824700" y="8824699"/>
-                </a:lnTo>
-                <a:lnTo>
-                  <a:pt x="0" y="8824699"/>
-                </a:lnTo>
-                <a:lnTo>
-                  <a:pt x="0" y="0"/>
-                </a:lnTo>
-                <a:close/>
-              </a:path>
-            </a:pathLst>
-          </a:custGeom>
-          <a:blipFill>
-            <a:blip r:embed="rId2"/>
-            <a:stretch>
-              <a:fillRect/>
-            </a:stretch>
-          </a:blipFill>
-        </p:spPr>
-      </p:sp>
-      <p:sp>
-        <p:nvSpPr>
-          <p:cNvPr id="3" name="Freeform 3"/>
-          <p:cNvSpPr/>
-          <p:nvPr/>
-        </p:nvSpPr>
-        <p:spPr>
-          <a:xfrm>
-            <a:off x="11888339" y="2758109"/>
-            <a:ext cx="10156534" cy="10156534"/>
-          </a:xfrm>
-          <a:custGeom>
-            <a:avLst/>
-            <a:gdLst/>
-            <a:ahLst/>
-            <a:cxnLst/>
-            <a:rect l="l" t="t" r="r" b="b"/>
-            <a:pathLst>
-              <a:path w="10156534" h="10156534">
-                <a:moveTo>
-                  <a:pt x="0" y="0"/>
-                </a:moveTo>
-                <a:lnTo>
-                  <a:pt x="10156534" y="0"/>
-                </a:lnTo>
-                <a:lnTo>
-                  <a:pt x="10156534" y="10156534"/>
-                </a:lnTo>
-                <a:lnTo>
-                  <a:pt x="0" y="10156534"/>
-                </a:lnTo>
-                <a:lnTo>
-                  <a:pt x="0" y="0"/>
-                </a:lnTo>
-                <a:close/>
-              </a:path>
-            </a:pathLst>
-          </a:custGeom>
-          <a:blipFill>
-            <a:blip r:embed="rId2"/>
-            <a:stretch>
-              <a:fillRect/>
-            </a:stretch>
-          </a:blipFill>
-        </p:spPr>
-      </p:sp>
-      <p:sp>
-        <p:nvSpPr>
-          <p:cNvPr id="4" name="Freeform 4"/>
-          <p:cNvSpPr/>
-          <p:nvPr/>
-        </p:nvSpPr>
-        <p:spPr>
-          <a:xfrm>
-            <a:off x="14685065" y="-4472609"/>
-            <a:ext cx="8229600" cy="8229600"/>
-          </a:xfrm>
-          <a:custGeom>
-            <a:avLst/>
-            <a:gdLst/>
-            <a:ahLst/>
-            <a:cxnLst/>
-            <a:rect l="l" t="t" r="r" b="b"/>
-            <a:pathLst>
-              <a:path w="8229600" h="8229600">
-                <a:moveTo>
-                  <a:pt x="0" y="0"/>
-                </a:moveTo>
-                <a:lnTo>
-                  <a:pt x="8229600" y="0"/>
-                </a:lnTo>
-                <a:lnTo>
-                  <a:pt x="8229600" y="8229600"/>
-                </a:lnTo>
-                <a:lnTo>
-                  <a:pt x="0" y="8229600"/>
-                </a:lnTo>
-                <a:lnTo>
-                  <a:pt x="0" y="0"/>
-                </a:lnTo>
-                <a:close/>
-              </a:path>
-            </a:pathLst>
-          </a:custGeom>
-          <a:blipFill>
-            <a:blip r:embed="rId2"/>
-            <a:stretch>
-              <a:fillRect/>
-            </a:stretch>
-          </a:blipFill>
-        </p:spPr>
-      </p:sp>
-      <p:sp>
-        <p:nvSpPr>
-          <p:cNvPr id="5" name="Freeform 5"/>
-          <p:cNvSpPr/>
-          <p:nvPr/>
-        </p:nvSpPr>
-        <p:spPr>
-          <a:xfrm>
-            <a:off x="-3956517" y="6907696"/>
-            <a:ext cx="8229600" cy="8229600"/>
-          </a:xfrm>
-          <a:custGeom>
-            <a:avLst/>
-            <a:gdLst/>
-            <a:ahLst/>
-            <a:cxnLst/>
-            <a:rect l="l" t="t" r="r" b="b"/>
-            <a:pathLst>
-              <a:path w="8229600" h="8229600">
-                <a:moveTo>
-                  <a:pt x="0" y="0"/>
-                </a:moveTo>
-                <a:lnTo>
-                  <a:pt x="8229600" y="0"/>
-                </a:lnTo>
-                <a:lnTo>
-                  <a:pt x="8229600" y="8229600"/>
-                </a:lnTo>
-                <a:lnTo>
-                  <a:pt x="0" y="8229600"/>
-                </a:lnTo>
-                <a:lnTo>
-                  <a:pt x="0" y="0"/>
-                </a:lnTo>
-                <a:close/>
-              </a:path>
-            </a:pathLst>
-          </a:custGeom>
-          <a:blipFill>
-            <a:blip r:embed="rId2"/>
-            <a:stretch>
-              <a:fillRect/>
-            </a:stretch>
-          </a:blipFill>
-        </p:spPr>
-      </p:sp>
       <p:sp>
         <p:nvSpPr>
           <p:cNvPr id="6" name="Freeform 6"/>
@@ -6106,8 +5586,8 @@
         </p:nvSpPr>
         <p:spPr>
           <a:xfrm>
-            <a:off x="5958192" y="634784"/>
-            <a:ext cx="6444599" cy="679673"/>
+            <a:off x="6096000" y="634784"/>
+            <a:ext cx="5893832" cy="679673"/>
           </a:xfrm>
           <a:prstGeom prst="rect">
             <a:avLst/>
@@ -6137,14 +5617,85 @@
                 <a:cs typeface="Nunito Bold"/>
                 <a:sym typeface="Nunito Bold"/>
               </a:rPr>
-              <a:t>UNIQUE SELLING POINT [USP]</a:t>
-            </a:r>
-          </a:p>
-        </p:txBody>
+              <a:t>DEVELOPMENT LIFECYCLE</a:t>
+            </a:r>
+          </a:p>
+        </p:txBody>
+      </p:sp>
+    </p:spTree>
+  </p:cSld>
+  <p:clrMapOvr>
+    <a:masterClrMapping/>
+  </p:clrMapOvr>
+</p:sld>
+</file>
+
+<file path=ppt/slides/slide6.xml><?xml version="1.0" encoding="utf-8"?>
+<p:sld xmlns:a="http://schemas.openxmlformats.org/drawingml/2006/main" xmlns:r="http://schemas.openxmlformats.org/officeDocument/2006/relationships" xmlns:p="http://schemas.openxmlformats.org/presentationml/2006/main">
+  <p:cSld>
+    <p:spTree>
+      <p:nvGrpSpPr>
+        <p:cNvPr id="1" name=""/>
+        <p:cNvGrpSpPr/>
+        <p:nvPr/>
+      </p:nvGrpSpPr>
+      <p:grpSpPr>
+        <a:xfrm>
+          <a:off x="0" y="0"/>
+          <a:ext cx="0" cy="0"/>
+          <a:chOff x="0" y="0"/>
+          <a:chExt cx="0" cy="0"/>
+        </a:xfrm>
+      </p:grpSpPr>
+      <p:sp>
+        <p:nvSpPr>
+          <p:cNvPr id="2" name="Freeform 2"/>
+          <p:cNvSpPr/>
+          <p:nvPr/>
+        </p:nvSpPr>
+        <p:spPr>
+          <a:xfrm>
+            <a:off x="0" y="0"/>
+            <a:ext cx="18288000" cy="10287000"/>
+          </a:xfrm>
+          <a:custGeom>
+            <a:avLst/>
+            <a:gdLst/>
+            <a:ahLst/>
+            <a:cxnLst/>
+            <a:rect l="l" t="t" r="r" b="b"/>
+            <a:pathLst>
+              <a:path w="18288000" h="10287000">
+                <a:moveTo>
+                  <a:pt x="0" y="0"/>
+                </a:moveTo>
+                <a:lnTo>
+                  <a:pt x="18288000" y="0"/>
+                </a:lnTo>
+                <a:lnTo>
+                  <a:pt x="18288000" y="10287000"/>
+                </a:lnTo>
+                <a:lnTo>
+                  <a:pt x="0" y="10287000"/>
+                </a:lnTo>
+                <a:lnTo>
+                  <a:pt x="0" y="0"/>
+                </a:lnTo>
+                <a:close/>
+              </a:path>
+            </a:pathLst>
+          </a:custGeom>
+          <a:blipFill>
+            <a:blip r:embed="rId2"/>
+            <a:stretch>
+              <a:fillRect t="-10929" b="-10929"/>
+            </a:stretch>
+          </a:blipFill>
+        </p:spPr>
       </p:sp>
       <p:grpSp>
         <p:nvGrpSpPr>
-          <p:cNvPr id="12" name="Group 12"/>
+          <p:cNvPr id="3" name="Group 3"/>
           <p:cNvGrpSpPr/>
           <p:nvPr/>
         </p:nvGrpSpPr>
@@ -6158,7 +5709,7 @@
         </p:grpSpPr>
         <p:sp>
           <p:nvSpPr>
-            <p:cNvPr id="13" name="Freeform 13"/>
+            <p:cNvPr id="4" name="Freeform 4"/>
             <p:cNvSpPr/>
             <p:nvPr/>
           </p:nvSpPr>
@@ -6176,73 +5727,78 @@
               <a:pathLst>
                 <a:path w="4593743" h="2099574">
                   <a:moveTo>
-                    <a:pt x="16867" y="0"/>
+                    <a:pt x="7546" y="0"/>
                   </a:moveTo>
                   <a:lnTo>
-                    <a:pt x="4576876" y="0"/>
+                    <a:pt x="4586198" y="0"/>
                   </a:lnTo>
                   <a:cubicBezTo>
-                    <a:pt x="4581349" y="0"/>
-                    <a:pt x="4585640" y="1777"/>
-                    <a:pt x="4588803" y="4940"/>
-                  </a:cubicBezTo>
-                  <a:cubicBezTo>
-                    <a:pt x="4591966" y="8103"/>
-                    <a:pt x="4593743" y="12394"/>
-                    <a:pt x="4593743" y="16867"/>
+                    <a:pt x="4588199" y="0"/>
+                    <a:pt x="4590118" y="795"/>
+                    <a:pt x="4591533" y="2210"/>
+                  </a:cubicBezTo>
+                  <a:cubicBezTo>
+                    <a:pt x="4592948" y="3625"/>
+                    <a:pt x="4593743" y="5545"/>
+                    <a:pt x="4593743" y="7546"/>
                   </a:cubicBezTo>
                   <a:lnTo>
-                    <a:pt x="4593743" y="2082707"/>
+                    <a:pt x="4593743" y="2092028"/>
                   </a:lnTo>
                   <a:cubicBezTo>
-                    <a:pt x="4593743" y="2092022"/>
-                    <a:pt x="4586192" y="2099574"/>
-                    <a:pt x="4576876" y="2099574"/>
+                    <a:pt x="4593743" y="2096196"/>
+                    <a:pt x="4590365" y="2099574"/>
+                    <a:pt x="4586198" y="2099574"/>
                   </a:cubicBezTo>
                   <a:lnTo>
-                    <a:pt x="16867" y="2099574"/>
+                    <a:pt x="7546" y="2099574"/>
                   </a:lnTo>
                   <a:cubicBezTo>
-                    <a:pt x="12394" y="2099574"/>
-                    <a:pt x="8103" y="2097797"/>
-                    <a:pt x="4940" y="2094634"/>
-                  </a:cubicBezTo>
-                  <a:cubicBezTo>
-                    <a:pt x="1777" y="2091471"/>
-                    <a:pt x="0" y="2087180"/>
-                    <a:pt x="0" y="2082707"/>
+                    <a:pt x="5545" y="2099574"/>
+                    <a:pt x="3625" y="2098779"/>
+                    <a:pt x="2210" y="2097364"/>
+                  </a:cubicBezTo>
+                  <a:cubicBezTo>
+                    <a:pt x="795" y="2095949"/>
+                    <a:pt x="0" y="2094030"/>
+                    <a:pt x="0" y="2092028"/>
                   </a:cubicBezTo>
                   <a:lnTo>
-                    <a:pt x="0" y="16867"/>
+                    <a:pt x="0" y="7546"/>
                   </a:lnTo>
                   <a:cubicBezTo>
-                    <a:pt x="0" y="12394"/>
-                    <a:pt x="1777" y="8103"/>
-                    <a:pt x="4940" y="4940"/>
-                  </a:cubicBezTo>
-                  <a:cubicBezTo>
-                    <a:pt x="8103" y="1777"/>
-                    <a:pt x="12394" y="0"/>
-                    <a:pt x="16867" y="0"/>
+                    <a:pt x="0" y="5545"/>
+                    <a:pt x="795" y="3625"/>
+                    <a:pt x="2210" y="2210"/>
+                  </a:cubicBezTo>
+                  <a:cubicBezTo>
+                    <a:pt x="3625" y="795"/>
+                    <a:pt x="5545" y="0"/>
+                    <a:pt x="7546" y="0"/>
                   </a:cubicBezTo>
                   <a:close/>
                 </a:path>
               </a:pathLst>
             </a:custGeom>
-            <a:ln w="76200" cap="rnd">
+            <a:solidFill>
+              <a:srgbClr val="7B7B7B">
+                <a:alpha val="89804"/>
+              </a:srgbClr>
+            </a:solidFill>
+            <a:ln w="38100" cap="sq">
               <a:solidFill>
                 <a:srgbClr val="D1D1D1">
                   <a:alpha val="89804"/>
                 </a:srgbClr>
               </a:solidFill>
               <a:prstDash val="solid"/>
-              <a:round/>
+              <a:miter/>
             </a:ln>
           </p:spPr>
         </p:sp>
         <p:sp>
           <p:nvSpPr>
-            <p:cNvPr id="14" name="TextBox 14"/>
+            <p:cNvPr id="5" name="TextBox 5"/>
             <p:cNvSpPr txBox="1"/>
             <p:nvPr/>
           </p:nvSpPr>
@@ -6269,353 +5825,9 @@
           </p:txBody>
         </p:sp>
       </p:grpSp>
-    </p:spTree>
-  </p:cSld>
-  <p:clrMapOvr>
-    <a:masterClrMapping/>
-  </p:clrMapOvr>
-</p:sld>
-</file>
-
-<file path=ppt/slides/slide6.xml><?xml version="1.0" encoding="utf-8"?>
-<p:sld xmlns:a="http://schemas.openxmlformats.org/drawingml/2006/main" xmlns:r="http://schemas.openxmlformats.org/officeDocument/2006/relationships" xmlns:p="http://schemas.openxmlformats.org/presentationml/2006/main">
-  <p:cSld>
-    <p:bg>
-      <p:bgPr>
-        <a:solidFill>
-          <a:srgbClr val="000000"/>
-        </a:solidFill>
-        <a:effectLst/>
-      </p:bgPr>
-    </p:bg>
-    <p:spTree>
-      <p:nvGrpSpPr>
-        <p:cNvPr id="1" name=""/>
-        <p:cNvGrpSpPr/>
-        <p:nvPr/>
-      </p:nvGrpSpPr>
-      <p:grpSpPr>
-        <a:xfrm>
-          <a:off x="0" y="0"/>
-          <a:ext cx="0" cy="0"/>
-          <a:chOff x="0" y="0"/>
-          <a:chExt cx="0" cy="0"/>
-        </a:xfrm>
-      </p:grpSpPr>
-      <p:sp>
-        <p:nvSpPr>
-          <p:cNvPr id="2" name="Freeform 2"/>
-          <p:cNvSpPr/>
-          <p:nvPr/>
-        </p:nvSpPr>
-        <p:spPr>
-          <a:xfrm>
-            <a:off x="-3383650" y="-2941320"/>
-            <a:ext cx="8824700" cy="8824700"/>
-          </a:xfrm>
-          <a:custGeom>
-            <a:avLst/>
-            <a:gdLst/>
-            <a:ahLst/>
-            <a:cxnLst/>
-            <a:rect l="l" t="t" r="r" b="b"/>
-            <a:pathLst>
-              <a:path w="8824700" h="8824700">
-                <a:moveTo>
-                  <a:pt x="0" y="0"/>
-                </a:moveTo>
-                <a:lnTo>
-                  <a:pt x="8824700" y="0"/>
-                </a:lnTo>
-                <a:lnTo>
-                  <a:pt x="8824700" y="8824699"/>
-                </a:lnTo>
-                <a:lnTo>
-                  <a:pt x="0" y="8824699"/>
-                </a:lnTo>
-                <a:lnTo>
-                  <a:pt x="0" y="0"/>
-                </a:lnTo>
-                <a:close/>
-              </a:path>
-            </a:pathLst>
-          </a:custGeom>
-          <a:blipFill>
-            <a:blip r:embed="rId2"/>
-            <a:stretch>
-              <a:fillRect/>
-            </a:stretch>
-          </a:blipFill>
-        </p:spPr>
-      </p:sp>
-      <p:sp>
-        <p:nvSpPr>
-          <p:cNvPr id="3" name="Freeform 3"/>
-          <p:cNvSpPr/>
-          <p:nvPr/>
-        </p:nvSpPr>
-        <p:spPr>
-          <a:xfrm>
-            <a:off x="11888339" y="2758109"/>
-            <a:ext cx="10156534" cy="10156534"/>
-          </a:xfrm>
-          <a:custGeom>
-            <a:avLst/>
-            <a:gdLst/>
-            <a:ahLst/>
-            <a:cxnLst/>
-            <a:rect l="l" t="t" r="r" b="b"/>
-            <a:pathLst>
-              <a:path w="10156534" h="10156534">
-                <a:moveTo>
-                  <a:pt x="0" y="0"/>
-                </a:moveTo>
-                <a:lnTo>
-                  <a:pt x="10156534" y="0"/>
-                </a:lnTo>
-                <a:lnTo>
-                  <a:pt x="10156534" y="10156534"/>
-                </a:lnTo>
-                <a:lnTo>
-                  <a:pt x="0" y="10156534"/>
-                </a:lnTo>
-                <a:lnTo>
-                  <a:pt x="0" y="0"/>
-                </a:lnTo>
-                <a:close/>
-              </a:path>
-            </a:pathLst>
-          </a:custGeom>
-          <a:blipFill>
-            <a:blip r:embed="rId2"/>
-            <a:stretch>
-              <a:fillRect/>
-            </a:stretch>
-          </a:blipFill>
-        </p:spPr>
-      </p:sp>
-      <p:sp>
-        <p:nvSpPr>
-          <p:cNvPr id="4" name="Freeform 4"/>
-          <p:cNvSpPr/>
-          <p:nvPr/>
-        </p:nvSpPr>
-        <p:spPr>
-          <a:xfrm>
-            <a:off x="14685065" y="-4472609"/>
-            <a:ext cx="8229600" cy="8229600"/>
-          </a:xfrm>
-          <a:custGeom>
-            <a:avLst/>
-            <a:gdLst/>
-            <a:ahLst/>
-            <a:cxnLst/>
-            <a:rect l="l" t="t" r="r" b="b"/>
-            <a:pathLst>
-              <a:path w="8229600" h="8229600">
-                <a:moveTo>
-                  <a:pt x="0" y="0"/>
-                </a:moveTo>
-                <a:lnTo>
-                  <a:pt x="8229600" y="0"/>
-                </a:lnTo>
-                <a:lnTo>
-                  <a:pt x="8229600" y="8229600"/>
-                </a:lnTo>
-                <a:lnTo>
-                  <a:pt x="0" y="8229600"/>
-                </a:lnTo>
-                <a:lnTo>
-                  <a:pt x="0" y="0"/>
-                </a:lnTo>
-                <a:close/>
-              </a:path>
-            </a:pathLst>
-          </a:custGeom>
-          <a:blipFill>
-            <a:blip r:embed="rId2"/>
-            <a:stretch>
-              <a:fillRect/>
-            </a:stretch>
-          </a:blipFill>
-        </p:spPr>
-      </p:sp>
-      <p:sp>
-        <p:nvSpPr>
-          <p:cNvPr id="5" name="Freeform 5"/>
-          <p:cNvSpPr/>
-          <p:nvPr/>
-        </p:nvSpPr>
-        <p:spPr>
-          <a:xfrm>
-            <a:off x="-3956517" y="6907696"/>
-            <a:ext cx="8229600" cy="8229600"/>
-          </a:xfrm>
-          <a:custGeom>
-            <a:avLst/>
-            <a:gdLst/>
-            <a:ahLst/>
-            <a:cxnLst/>
-            <a:rect l="l" t="t" r="r" b="b"/>
-            <a:pathLst>
-              <a:path w="8229600" h="8229600">
-                <a:moveTo>
-                  <a:pt x="0" y="0"/>
-                </a:moveTo>
-                <a:lnTo>
-                  <a:pt x="8229600" y="0"/>
-                </a:lnTo>
-                <a:lnTo>
-                  <a:pt x="8229600" y="8229600"/>
-                </a:lnTo>
-                <a:lnTo>
-                  <a:pt x="0" y="8229600"/>
-                </a:lnTo>
-                <a:lnTo>
-                  <a:pt x="0" y="0"/>
-                </a:lnTo>
-                <a:close/>
-              </a:path>
-            </a:pathLst>
-          </a:custGeom>
-          <a:blipFill>
-            <a:blip r:embed="rId2"/>
-            <a:stretch>
-              <a:fillRect/>
-            </a:stretch>
-          </a:blipFill>
-        </p:spPr>
-      </p:sp>
-      <p:grpSp>
-        <p:nvGrpSpPr>
-          <p:cNvPr id="6" name="Group 6"/>
-          <p:cNvGrpSpPr/>
-          <p:nvPr/>
-        </p:nvGrpSpPr>
-        <p:grpSpPr>
-          <a:xfrm>
-            <a:off x="423065" y="1926934"/>
-            <a:ext cx="17441869" cy="7971820"/>
-            <a:chOff x="0" y="0"/>
-            <a:chExt cx="4593743" cy="2099574"/>
-          </a:xfrm>
-        </p:grpSpPr>
-        <p:sp>
-          <p:nvSpPr>
-            <p:cNvPr id="7" name="Freeform 7"/>
-            <p:cNvSpPr/>
-            <p:nvPr/>
-          </p:nvSpPr>
-          <p:spPr>
-            <a:xfrm>
-              <a:off x="0" y="0"/>
-              <a:ext cx="4593743" cy="2099574"/>
-            </a:xfrm>
-            <a:custGeom>
-              <a:avLst/>
-              <a:gdLst/>
-              <a:ahLst/>
-              <a:cxnLst/>
-              <a:rect l="l" t="t" r="r" b="b"/>
-              <a:pathLst>
-                <a:path w="4593743" h="2099574">
-                  <a:moveTo>
-                    <a:pt x="16867" y="0"/>
-                  </a:moveTo>
-                  <a:lnTo>
-                    <a:pt x="4576876" y="0"/>
-                  </a:lnTo>
-                  <a:cubicBezTo>
-                    <a:pt x="4581349" y="0"/>
-                    <a:pt x="4585640" y="1777"/>
-                    <a:pt x="4588803" y="4940"/>
-                  </a:cubicBezTo>
-                  <a:cubicBezTo>
-                    <a:pt x="4591966" y="8103"/>
-                    <a:pt x="4593743" y="12394"/>
-                    <a:pt x="4593743" y="16867"/>
-                  </a:cubicBezTo>
-                  <a:lnTo>
-                    <a:pt x="4593743" y="2082707"/>
-                  </a:lnTo>
-                  <a:cubicBezTo>
-                    <a:pt x="4593743" y="2092022"/>
-                    <a:pt x="4586192" y="2099574"/>
-                    <a:pt x="4576876" y="2099574"/>
-                  </a:cubicBezTo>
-                  <a:lnTo>
-                    <a:pt x="16867" y="2099574"/>
-                  </a:lnTo>
-                  <a:cubicBezTo>
-                    <a:pt x="12394" y="2099574"/>
-                    <a:pt x="8103" y="2097797"/>
-                    <a:pt x="4940" y="2094634"/>
-                  </a:cubicBezTo>
-                  <a:cubicBezTo>
-                    <a:pt x="1777" y="2091471"/>
-                    <a:pt x="0" y="2087180"/>
-                    <a:pt x="0" y="2082707"/>
-                  </a:cubicBezTo>
-                  <a:lnTo>
-                    <a:pt x="0" y="16867"/>
-                  </a:lnTo>
-                  <a:cubicBezTo>
-                    <a:pt x="0" y="12394"/>
-                    <a:pt x="1777" y="8103"/>
-                    <a:pt x="4940" y="4940"/>
-                  </a:cubicBezTo>
-                  <a:cubicBezTo>
-                    <a:pt x="8103" y="1777"/>
-                    <a:pt x="12394" y="0"/>
-                    <a:pt x="16867" y="0"/>
-                  </a:cubicBezTo>
-                  <a:close/>
-                </a:path>
-              </a:pathLst>
-            </a:custGeom>
-            <a:ln w="76200" cap="rnd">
-              <a:solidFill>
-                <a:srgbClr val="D1D1D1">
-                  <a:alpha val="89804"/>
-                </a:srgbClr>
-              </a:solidFill>
-              <a:prstDash val="solid"/>
-              <a:round/>
-            </a:ln>
-          </p:spPr>
-        </p:sp>
-        <p:sp>
-          <p:nvSpPr>
-            <p:cNvPr id="8" name="TextBox 8"/>
-            <p:cNvSpPr txBox="1"/>
-            <p:nvPr/>
-          </p:nvSpPr>
-          <p:spPr>
-            <a:xfrm>
-              <a:off x="0" y="-95250"/>
-              <a:ext cx="4593743" cy="2194824"/>
-            </a:xfrm>
-            <a:prstGeom prst="rect">
-              <a:avLst/>
-            </a:prstGeom>
-          </p:spPr>
-          <p:txBody>
-            <a:bodyPr lIns="50800" tIns="50800" rIns="50800" bIns="50800" rtlCol="0" anchor="ctr"/>
-            <a:lstStyle/>
-            <a:p>
-              <a:pPr algn="just">
-                <a:lnSpc>
-                  <a:spcPts val="3287"/>
-                </a:lnSpc>
-              </a:pPr>
-              <a:endParaRPr/>
-            </a:p>
-          </p:txBody>
-        </p:sp>
-      </p:grpSp>
-      <p:sp>
-        <p:nvSpPr>
-          <p:cNvPr id="9" name="Freeform 9"/>
+      <p:sp>
+        <p:nvSpPr>
+          <p:cNvPr id="6" name="Freeform 6"/>
           <p:cNvSpPr/>
           <p:nvPr/>
         </p:nvSpPr>
@@ -6661,7 +5873,7 @@
       </p:sp>
       <p:sp>
         <p:nvSpPr>
-          <p:cNvPr id="10" name="Freeform 10"/>
+          <p:cNvPr id="7" name="Freeform 7"/>
           <p:cNvSpPr/>
           <p:nvPr/>
         </p:nvSpPr>
@@ -6707,7 +5919,7 @@
       </p:sp>
       <p:grpSp>
         <p:nvGrpSpPr>
-          <p:cNvPr id="11" name="Group 11"/>
+          <p:cNvPr id="8" name="Group 8"/>
           <p:cNvGrpSpPr/>
           <p:nvPr/>
         </p:nvGrpSpPr>
@@ -6721,7 +5933,7 @@
         </p:grpSpPr>
         <p:sp>
           <p:nvSpPr>
-            <p:cNvPr id="12" name="Freeform 12"/>
+            <p:cNvPr id="9" name="Freeform 9"/>
             <p:cNvSpPr/>
             <p:nvPr/>
           </p:nvSpPr>
@@ -6803,7 +6015,7 @@
         </p:sp>
         <p:sp>
           <p:nvSpPr>
-            <p:cNvPr id="13" name="TextBox 13"/>
+            <p:cNvPr id="10" name="TextBox 10"/>
             <p:cNvSpPr txBox="1"/>
             <p:nvPr/>
           </p:nvSpPr>
@@ -6832,14 +6044,14 @@
       </p:grpSp>
       <p:sp>
         <p:nvSpPr>
-          <p:cNvPr id="14" name="TextBox 14"/>
+          <p:cNvPr id="11" name="TextBox 11"/>
           <p:cNvSpPr txBox="1"/>
           <p:nvPr/>
         </p:nvSpPr>
         <p:spPr>
           <a:xfrm>
-            <a:off x="6608413" y="634784"/>
-            <a:ext cx="5001312" cy="679673"/>
+            <a:off x="6324600" y="634784"/>
+            <a:ext cx="5285125" cy="679673"/>
           </a:xfrm>
           <a:prstGeom prst="rect">
             <a:avLst/>

--- a/public/Copy of PPT Template_1.pptx
+++ b/public/Copy of PPT Template_1.pptx
@@ -16,15 +16,15 @@
   <p:notesSz cx="6858000" cy="9144000"/>
   <p:embeddedFontLst>
     <p:embeddedFont>
-      <p:font typeface="Nunito Bold" panose="020B0604020202020204" charset="0"/>
+      <p:font typeface="Anonymous Pro" panose="020B0604020202020204" charset="0"/>
       <p:regular r:id="rId8"/>
     </p:embeddedFont>
     <p:embeddedFont>
-      <p:font typeface="Poppins" panose="020B0604020202020204" charset="0"/>
+      <p:font typeface="Nunito Bold" panose="020B0604020202020204" charset="0"/>
       <p:regular r:id="rId9"/>
     </p:embeddedFont>
     <p:embeddedFont>
-      <p:font typeface="Nunito" panose="020B0604020202020204" charset="0"/>
+      <p:font typeface="Poppins" panose="020B0604020202020204" charset="0"/>
       <p:regular r:id="rId10"/>
     </p:embeddedFont>
     <p:embeddedFont>
@@ -35,7 +35,7 @@
       <p:boldItalic r:id="rId14"/>
     </p:embeddedFont>
     <p:embeddedFont>
-      <p:font typeface="Anonymous Pro" panose="020B0604020202020204" charset="0"/>
+      <p:font typeface="Nunito" panose="020B0604020202020204" charset="0"/>
       <p:regular r:id="rId15"/>
     </p:embeddedFont>
   </p:embeddedFontLst>
@@ -335,7 +335,7 @@
             <a:fld id="{1D8BD707-D9CF-40AE-B4C6-C98DA3205C09}" type="datetimeFigureOut">
               <a:rPr lang="en-US" smtClean="0"/>
               <a:pPr/>
-              <a:t>2/20/2026</a:t>
+              <a:t>2/26/2026</a:t>
             </a:fld>
             <a:endParaRPr lang="en-US"/>
           </a:p>
@@ -502,7 +502,7 @@
             <a:fld id="{1D8BD707-D9CF-40AE-B4C6-C98DA3205C09}" type="datetimeFigureOut">
               <a:rPr lang="en-US" smtClean="0"/>
               <a:pPr/>
-              <a:t>2/20/2026</a:t>
+              <a:t>2/26/2026</a:t>
             </a:fld>
             <a:endParaRPr lang="en-US"/>
           </a:p>
@@ -679,7 +679,7 @@
             <a:fld id="{1D8BD707-D9CF-40AE-B4C6-C98DA3205C09}" type="datetimeFigureOut">
               <a:rPr lang="en-US" smtClean="0"/>
               <a:pPr/>
-              <a:t>2/20/2026</a:t>
+              <a:t>2/26/2026</a:t>
             </a:fld>
             <a:endParaRPr lang="en-US"/>
           </a:p>
@@ -846,7 +846,7 @@
             <a:fld id="{1D8BD707-D9CF-40AE-B4C6-C98DA3205C09}" type="datetimeFigureOut">
               <a:rPr lang="en-US" smtClean="0"/>
               <a:pPr/>
-              <a:t>2/20/2026</a:t>
+              <a:t>2/26/2026</a:t>
             </a:fld>
             <a:endParaRPr lang="en-US"/>
           </a:p>
@@ -1089,7 +1089,7 @@
             <a:fld id="{1D8BD707-D9CF-40AE-B4C6-C98DA3205C09}" type="datetimeFigureOut">
               <a:rPr lang="en-US" smtClean="0"/>
               <a:pPr/>
-              <a:t>2/20/2026</a:t>
+              <a:t>2/26/2026</a:t>
             </a:fld>
             <a:endParaRPr lang="en-US"/>
           </a:p>
@@ -1374,7 +1374,7 @@
             <a:fld id="{1D8BD707-D9CF-40AE-B4C6-C98DA3205C09}" type="datetimeFigureOut">
               <a:rPr lang="en-US" smtClean="0"/>
               <a:pPr/>
-              <a:t>2/20/2026</a:t>
+              <a:t>2/26/2026</a:t>
             </a:fld>
             <a:endParaRPr lang="en-US"/>
           </a:p>
@@ -1793,7 +1793,7 @@
             <a:fld id="{1D8BD707-D9CF-40AE-B4C6-C98DA3205C09}" type="datetimeFigureOut">
               <a:rPr lang="en-US" smtClean="0"/>
               <a:pPr/>
-              <a:t>2/20/2026</a:t>
+              <a:t>2/26/2026</a:t>
             </a:fld>
             <a:endParaRPr lang="en-US"/>
           </a:p>
@@ -1908,7 +1908,7 @@
             <a:fld id="{1D8BD707-D9CF-40AE-B4C6-C98DA3205C09}" type="datetimeFigureOut">
               <a:rPr lang="en-US" smtClean="0"/>
               <a:pPr/>
-              <a:t>2/20/2026</a:t>
+              <a:t>2/26/2026</a:t>
             </a:fld>
             <a:endParaRPr lang="en-US"/>
           </a:p>
@@ -2000,7 +2000,7 @@
             <a:fld id="{1D8BD707-D9CF-40AE-B4C6-C98DA3205C09}" type="datetimeFigureOut">
               <a:rPr lang="en-US" smtClean="0"/>
               <a:pPr/>
-              <a:t>2/20/2026</a:t>
+              <a:t>2/26/2026</a:t>
             </a:fld>
             <a:endParaRPr lang="en-US"/>
           </a:p>
@@ -2274,7 +2274,7 @@
             <a:fld id="{1D8BD707-D9CF-40AE-B4C6-C98DA3205C09}" type="datetimeFigureOut">
               <a:rPr lang="en-US" smtClean="0"/>
               <a:pPr/>
-              <a:t>2/20/2026</a:t>
+              <a:t>2/26/2026</a:t>
             </a:fld>
             <a:endParaRPr lang="en-US"/>
           </a:p>
@@ -2524,7 +2524,7 @@
             <a:fld id="{1D8BD707-D9CF-40AE-B4C6-C98DA3205C09}" type="datetimeFigureOut">
               <a:rPr lang="en-US" smtClean="0"/>
               <a:pPr/>
-              <a:t>2/20/2026</a:t>
+              <a:t>2/26/2026</a:t>
             </a:fld>
             <a:endParaRPr lang="en-US"/>
           </a:p>
@@ -2734,7 +2734,7 @@
             <a:fld id="{1D8BD707-D9CF-40AE-B4C6-C98DA3205C09}" type="datetimeFigureOut">
               <a:rPr lang="en-US" smtClean="0"/>
               <a:pPr/>
-              <a:t>2/20/2026</a:t>
+              <a:t>2/26/2026</a:t>
             </a:fld>
             <a:endParaRPr lang="en-US"/>
           </a:p>
@@ -3593,8 +3593,29 @@
                 <a:cs typeface="Nunito"/>
                 <a:sym typeface="Nunito"/>
               </a:rPr>
-              <a:t>Problem Statement Number :</a:t>
-            </a:r>
+              <a:t>Problem Statement </a:t>
+            </a:r>
+            <a:r>
+              <a:rPr lang="en-US" sz="2989" spc="164" dirty="0" smtClean="0">
+                <a:solidFill>
+                  <a:srgbClr val="FFFFFF"/>
+                </a:solidFill>
+                <a:latin typeface="Nunito"/>
+                <a:ea typeface="Nunito"/>
+                <a:cs typeface="Nunito"/>
+                <a:sym typeface="Nunito"/>
+              </a:rPr>
+              <a:t>Title:</a:t>
+            </a:r>
+            <a:endParaRPr lang="en-US" sz="2989" spc="164" dirty="0">
+              <a:solidFill>
+                <a:srgbClr val="FFFFFF"/>
+              </a:solidFill>
+              <a:latin typeface="Nunito"/>
+              <a:ea typeface="Nunito"/>
+              <a:cs typeface="Nunito"/>
+              <a:sym typeface="Nunito"/>
+            </a:endParaRPr>
           </a:p>
           <a:p>
             <a:pPr algn="l">
